--- a/Lectures/Lecture7-Features.pptx
+++ b/Lectures/Lecture7-Features.pptx
@@ -5,7 +5,7 @@
     <p:sldMasterId id="2147483648" r:id="rId1"/>
   </p:sldMasterIdLst>
   <p:notesMasterIdLst>
-    <p:notesMasterId r:id="rId36"/>
+    <p:notesMasterId r:id="rId40"/>
   </p:notesMasterIdLst>
   <p:sldIdLst>
     <p:sldId id="256" r:id="rId2"/>
@@ -22,29 +22,36 @@
     <p:sldId id="320" r:id="rId13"/>
     <p:sldId id="295" r:id="rId14"/>
     <p:sldId id="300" r:id="rId15"/>
-    <p:sldId id="478" r:id="rId16"/>
-    <p:sldId id="479" r:id="rId17"/>
-    <p:sldId id="302" r:id="rId18"/>
-    <p:sldId id="304" r:id="rId19"/>
-    <p:sldId id="277" r:id="rId20"/>
-    <p:sldId id="321" r:id="rId21"/>
-    <p:sldId id="278" r:id="rId22"/>
-    <p:sldId id="280" r:id="rId23"/>
-    <p:sldId id="279" r:id="rId24"/>
-    <p:sldId id="306" r:id="rId25"/>
-    <p:sldId id="310" r:id="rId26"/>
-    <p:sldId id="312" r:id="rId27"/>
-    <p:sldId id="313" r:id="rId28"/>
-    <p:sldId id="317" r:id="rId29"/>
-    <p:sldId id="314" r:id="rId30"/>
-    <p:sldId id="316" r:id="rId31"/>
-    <p:sldId id="315" r:id="rId32"/>
-    <p:sldId id="322" r:id="rId33"/>
-    <p:sldId id="473" r:id="rId34"/>
-    <p:sldId id="471" r:id="rId35"/>
+    <p:sldId id="479" r:id="rId16"/>
+    <p:sldId id="302" r:id="rId17"/>
+    <p:sldId id="304" r:id="rId18"/>
+    <p:sldId id="277" r:id="rId19"/>
+    <p:sldId id="478" r:id="rId20"/>
+    <p:sldId id="480" r:id="rId21"/>
+    <p:sldId id="321" r:id="rId22"/>
+    <p:sldId id="278" r:id="rId23"/>
+    <p:sldId id="280" r:id="rId24"/>
+    <p:sldId id="279" r:id="rId25"/>
+    <p:sldId id="306" r:id="rId26"/>
+    <p:sldId id="483" r:id="rId27"/>
+    <p:sldId id="484" r:id="rId28"/>
+    <p:sldId id="485" r:id="rId29"/>
+    <p:sldId id="486" r:id="rId30"/>
+    <p:sldId id="312" r:id="rId31"/>
+    <p:sldId id="313" r:id="rId32"/>
+    <p:sldId id="317" r:id="rId33"/>
+    <p:sldId id="314" r:id="rId34"/>
+    <p:sldId id="316" r:id="rId35"/>
+    <p:sldId id="315" r:id="rId36"/>
+    <p:sldId id="322" r:id="rId37"/>
+    <p:sldId id="473" r:id="rId38"/>
+    <p:sldId id="471" r:id="rId39"/>
   </p:sldIdLst>
   <p:sldSz cx="12192000" cy="6858000"/>
   <p:notesSz cx="6858000" cy="9144000"/>
+  <p:custDataLst>
+    <p:tags r:id="rId41"/>
+  </p:custDataLst>
   <p:defaultTextStyle>
     <a:defPPr marR="0" lvl="0" algn="l" rtl="0">
       <a:lnSpc>
@@ -279,7 +286,7 @@
       <p15:sldGuideLst xmlns:p15="http://schemas.microsoft.com/office/powerpoint/2012/main"/>
     </p:ext>
     <p:ext uri="http://customooxmlschemas.google.com/">
-      <go:slidesCustomData xmlns="" xmlns:mc="http://schemas.openxmlformats.org/markup-compatibility/2006" xmlns:mv="urn:schemas-microsoft-com:mac:vml" xmlns:c="http://schemas.openxmlformats.org/drawingml/2006/chart" xmlns:dgm="http://schemas.openxmlformats.org/drawingml/2006/diagram" xmlns:o="urn:schemas-microsoft-com:office:office" xmlns:v="urn:schemas-microsoft-com:vml" xmlns:pvml="urn:schemas-microsoft-com:office:powerpoint" xmlns:com="http://schemas.openxmlformats.org/drawingml/2006/compatibility" xmlns:p14="http://schemas.microsoft.com/office/powerpoint/2010/main" xmlns:p15="http://schemas.microsoft.com/office/powerpoint/2012/main" xmlns:go="http://customooxmlschemas.google.com/" r:id="rId40" roundtripDataSignature="AMtx7mjFyVUGRZWio+dc9dxzYsimUxNJbg=="/>
+      <go:slidesCustomData xmlns:go="http://customooxmlschemas.google.com/" xmlns:p15="http://schemas.microsoft.com/office/powerpoint/2012/main" xmlns:p14="http://schemas.microsoft.com/office/powerpoint/2010/main" xmlns:com="http://schemas.openxmlformats.org/drawingml/2006/compatibility" xmlns:pvml="urn:schemas-microsoft-com:office:powerpoint" xmlns:v="urn:schemas-microsoft-com:vml" xmlns:o="urn:schemas-microsoft-com:office:office" xmlns:dgm="http://schemas.openxmlformats.org/drawingml/2006/diagram" xmlns:c="http://schemas.openxmlformats.org/drawingml/2006/chart" xmlns:mv="urn:schemas-microsoft-com:mac:vml" xmlns:mc="http://schemas.openxmlformats.org/markup-compatibility/2006" xmlns="" r:id="rId42" roundtripDataSignature="AMtx7mjFyVUGRZWio+dc9dxzYsimUxNJbg=="/>
     </p:ext>
   </p:extLst>
 </p:presentation>
@@ -4663,6 +4670,115 @@
 </p:notes>
 </file>
 
+<file path=ppt/notesSlides/notesSlide4.xml><?xml version="1.0" encoding="utf-8"?>
+<p:notes xmlns:a="http://schemas.openxmlformats.org/drawingml/2006/main" xmlns:r="http://schemas.openxmlformats.org/officeDocument/2006/relationships" xmlns:p="http://schemas.openxmlformats.org/presentationml/2006/main">
+  <p:cSld>
+    <p:spTree>
+      <p:nvGrpSpPr>
+        <p:cNvPr id="1" name=""/>
+        <p:cNvGrpSpPr/>
+        <p:nvPr/>
+      </p:nvGrpSpPr>
+      <p:grpSpPr>
+        <a:xfrm>
+          <a:off x="0" y="0"/>
+          <a:ext cx="0" cy="0"/>
+          <a:chOff x="0" y="0"/>
+          <a:chExt cx="0" cy="0"/>
+        </a:xfrm>
+      </p:grpSpPr>
+      <p:sp>
+        <p:nvSpPr>
+          <p:cNvPr id="2" name="Slide Image Placeholder 1"/>
+          <p:cNvSpPr>
+            <a:spLocks noGrp="1" noRot="1" noChangeAspect="1"/>
+          </p:cNvSpPr>
+          <p:nvPr>
+            <p:ph type="sldImg"/>
+          </p:nvPr>
+        </p:nvSpPr>
+        <p:spPr/>
+      </p:sp>
+      <p:sp>
+        <p:nvSpPr>
+          <p:cNvPr id="3" name="Notes Placeholder 2"/>
+          <p:cNvSpPr>
+            <a:spLocks noGrp="1"/>
+          </p:cNvSpPr>
+          <p:nvPr>
+            <p:ph type="body" idx="1"/>
+          </p:nvPr>
+        </p:nvSpPr>
+        <p:spPr/>
+        <p:txBody>
+          <a:bodyPr/>
+          <a:lstStyle/>
+          <a:p>
+            <a:endParaRPr lang="en-US" dirty="0"/>
+          </a:p>
+        </p:txBody>
+      </p:sp>
+      <p:sp>
+        <p:nvSpPr>
+          <p:cNvPr id="4" name="Slide Number Placeholder 3"/>
+          <p:cNvSpPr>
+            <a:spLocks noGrp="1"/>
+          </p:cNvSpPr>
+          <p:nvPr>
+            <p:ph type="sldNum" idx="12"/>
+          </p:nvPr>
+        </p:nvSpPr>
+        <p:spPr/>
+        <p:txBody>
+          <a:bodyPr/>
+          <a:lstStyle/>
+          <a:p>
+            <a:pPr marL="0" marR="0" lvl="0" indent="0" algn="r" rtl="0">
+              <a:spcBef>
+                <a:spcPts val="0"/>
+              </a:spcBef>
+              <a:spcAft>
+                <a:spcPts val="0"/>
+              </a:spcAft>
+              <a:buNone/>
+            </a:pPr>
+            <a:fld id="{00000000-1234-1234-1234-123412341234}" type="slidenum">
+              <a:rPr lang="en-US" sz="1200" b="0" i="0" u="none" strike="noStrike" cap="none" smtClean="0">
+                <a:solidFill>
+                  <a:schemeClr val="dk1"/>
+                </a:solidFill>
+                <a:latin typeface="Calibri"/>
+                <a:ea typeface="Calibri"/>
+                <a:cs typeface="Calibri"/>
+                <a:sym typeface="Calibri"/>
+              </a:rPr>
+              <a:t>19</a:t>
+            </a:fld>
+            <a:endParaRPr lang="en-US" sz="1200" b="0" i="0" u="none" strike="noStrike" cap="none">
+              <a:solidFill>
+                <a:schemeClr val="dk1"/>
+              </a:solidFill>
+              <a:latin typeface="Calibri"/>
+              <a:ea typeface="Calibri"/>
+              <a:cs typeface="Calibri"/>
+              <a:sym typeface="Calibri"/>
+            </a:endParaRPr>
+          </a:p>
+        </p:txBody>
+      </p:sp>
+    </p:spTree>
+    <p:extLst>
+      <p:ext uri="{BB962C8B-B14F-4D97-AF65-F5344CB8AC3E}">
+        <p14:creationId xmlns:p14="http://schemas.microsoft.com/office/powerpoint/2010/main" val="3786010250"/>
+      </p:ext>
+    </p:extLst>
+  </p:cSld>
+  <p:clrMapOvr>
+    <a:masterClrMapping/>
+  </p:clrMapOvr>
+</p:notes>
+</file>
+
 <file path=ppt/slideLayouts/slideLayout1.xml><?xml version="1.0" encoding="utf-8"?>
 <p:sldLayout xmlns:a="http://schemas.openxmlformats.org/drawingml/2006/main" xmlns:r="http://schemas.openxmlformats.org/officeDocument/2006/relationships" xmlns:p="http://schemas.openxmlformats.org/presentationml/2006/main" matchingName="Title slide" type="title">
   <p:cSld name="TITLE">
@@ -11195,19 +11311,14 @@
             <p:ph type="title"/>
           </p:nvPr>
         </p:nvSpPr>
-        <p:spPr>
-          <a:xfrm>
-            <a:off x="111210" y="367459"/>
-            <a:ext cx="12080789" cy="763500"/>
-          </a:xfrm>
-        </p:spPr>
+        <p:spPr/>
         <p:txBody>
           <a:bodyPr/>
           <a:lstStyle/>
           <a:p>
             <a:r>
               <a:rPr lang="en-US" dirty="0"/>
-              <a:t>Is Scaling Important for…</a:t>
+              <a:t>Feature Generation</a:t>
             </a:r>
           </a:p>
         </p:txBody>
@@ -11222,382 +11333,72 @@
             <p:ph type="body" idx="1"/>
           </p:nvPr>
         </p:nvSpPr>
-        <p:spPr>
-          <a:xfrm>
-            <a:off x="415600" y="1536633"/>
-            <a:ext cx="4235913" cy="4555200"/>
-          </a:xfrm>
-        </p:spPr>
+        <p:spPr/>
         <p:txBody>
-          <a:bodyPr/>
+          <a:bodyPr>
+            <a:normAutofit/>
+          </a:bodyPr>
           <a:lstStyle/>
           <a:p>
             <a:r>
               <a:rPr lang="en-US" dirty="0"/>
-              <a:t>Decision Trees?</a:t>
-            </a:r>
-            <a:br>
-              <a:rPr lang="en-US" dirty="0"/>
-            </a:br>
-            <a:endParaRPr lang="en-US" dirty="0"/>
-          </a:p>
-          <a:p>
-            <a:r>
-              <a:rPr lang="en-US" dirty="0"/>
-              <a:t>k-Nearest Neighbors?</a:t>
-            </a:r>
-            <a:br>
-              <a:rPr lang="en-US" dirty="0"/>
-            </a:br>
-            <a:endParaRPr lang="en-US" dirty="0"/>
-          </a:p>
-          <a:p>
-            <a:r>
-              <a:rPr lang="en-US" dirty="0"/>
-              <a:t>Random Forest?</a:t>
-            </a:r>
-            <a:br>
-              <a:rPr lang="en-US" dirty="0"/>
-            </a:br>
-            <a:endParaRPr lang="en-US" dirty="0"/>
-          </a:p>
-          <a:p>
-            <a:r>
-              <a:rPr lang="en-US" dirty="0"/>
-              <a:t>Logistic Regression?</a:t>
-            </a:r>
-          </a:p>
-          <a:p>
-            <a:endParaRPr lang="en-US" dirty="0"/>
-          </a:p>
-          <a:p>
-            <a:r>
-              <a:rPr lang="en-US" dirty="0"/>
-              <a:t>Neural Nets?</a:t>
-            </a:r>
-          </a:p>
-          <a:p>
-            <a:endParaRPr lang="en-US" dirty="0"/>
-          </a:p>
-        </p:txBody>
-      </p:sp>
-      <p:sp>
-        <p:nvSpPr>
-          <p:cNvPr id="4" name="Content Placeholder 1">
-            <a:extLst>
-              <a:ext uri="{FF2B5EF4-FFF2-40B4-BE49-F238E27FC236}">
-                <a16:creationId xmlns:a16="http://schemas.microsoft.com/office/drawing/2014/main" id="{14BBE1C8-D8BC-2A41-A04B-7C6439BF19C4}"/>
-              </a:ext>
-            </a:extLst>
-          </p:cNvPr>
-          <p:cNvSpPr txBox="1">
-            <a:spLocks/>
-          </p:cNvSpPr>
-          <p:nvPr/>
-        </p:nvSpPr>
-        <p:spPr>
-          <a:xfrm>
-            <a:off x="6557983" y="2355190"/>
-            <a:ext cx="4235913" cy="3542027"/>
-          </a:xfrm>
-          <a:prstGeom prst="rect">
-            <a:avLst/>
-          </a:prstGeom>
-          <a:noFill/>
-          <a:ln>
-            <a:noFill/>
-          </a:ln>
-        </p:spPr>
-        <p:txBody>
-          <a:bodyPr spcFirstLastPara="1" wrap="square" lIns="121900" tIns="121900" rIns="121900" bIns="121900" anchor="t" anchorCtr="0">
-            <a:noAutofit/>
-          </a:bodyPr>
-          <a:lstStyle>
-            <a:defPPr marR="0" lvl="0" algn="l" rtl="0">
-              <a:lnSpc>
-                <a:spcPct val="100000"/>
-              </a:lnSpc>
-              <a:spcBef>
-                <a:spcPts val="0"/>
-              </a:spcBef>
-              <a:spcAft>
-                <a:spcPts val="0"/>
-              </a:spcAft>
-            </a:defPPr>
-            <a:lvl1pPr marL="457200" marR="0" lvl="0" indent="-381000" algn="l" rtl="0">
-              <a:lnSpc>
-                <a:spcPct val="115000"/>
-              </a:lnSpc>
-              <a:spcBef>
-                <a:spcPts val="0"/>
-              </a:spcBef>
-              <a:spcAft>
-                <a:spcPts val="0"/>
-              </a:spcAft>
-              <a:buClr>
-                <a:srgbClr val="434343"/>
-              </a:buClr>
-              <a:buSzPts val="2400"/>
-              <a:buFont typeface="Arial"/>
-              <a:buChar char="●"/>
-              <a:defRPr sz="2400" b="0" i="0" u="none" strike="noStrike" cap="none">
-                <a:solidFill>
-                  <a:srgbClr val="434343"/>
-                </a:solidFill>
-                <a:latin typeface="Arial"/>
-                <a:ea typeface="Arial"/>
-                <a:cs typeface="Arial"/>
-                <a:sym typeface="Arial"/>
-              </a:defRPr>
-            </a:lvl1pPr>
-            <a:lvl2pPr marL="914400" marR="0" lvl="1" indent="-349250" algn="l" rtl="0">
-              <a:lnSpc>
-                <a:spcPct val="115000"/>
-              </a:lnSpc>
-              <a:spcBef>
-                <a:spcPts val="2100"/>
-              </a:spcBef>
-              <a:spcAft>
-                <a:spcPts val="0"/>
-              </a:spcAft>
-              <a:buClr>
-                <a:srgbClr val="434343"/>
-              </a:buClr>
-              <a:buSzPts val="1900"/>
-              <a:buFont typeface="Arial"/>
-              <a:buChar char="○"/>
-              <a:defRPr sz="1900" b="0" i="0" u="none" strike="noStrike" cap="none">
-                <a:solidFill>
-                  <a:srgbClr val="434343"/>
-                </a:solidFill>
-                <a:latin typeface="Arial"/>
-                <a:ea typeface="Arial"/>
-                <a:cs typeface="Arial"/>
-                <a:sym typeface="Arial"/>
-              </a:defRPr>
-            </a:lvl2pPr>
-            <a:lvl3pPr marL="1371600" marR="0" lvl="2" indent="-349250" algn="l" rtl="0">
-              <a:lnSpc>
-                <a:spcPct val="115000"/>
-              </a:lnSpc>
-              <a:spcBef>
-                <a:spcPts val="2100"/>
-              </a:spcBef>
-              <a:spcAft>
-                <a:spcPts val="0"/>
-              </a:spcAft>
-              <a:buClr>
-                <a:srgbClr val="434343"/>
-              </a:buClr>
-              <a:buSzPts val="1900"/>
-              <a:buFont typeface="Arial"/>
-              <a:buChar char="■"/>
-              <a:defRPr sz="1900" b="0" i="0" u="none" strike="noStrike" cap="none">
-                <a:solidFill>
-                  <a:srgbClr val="434343"/>
-                </a:solidFill>
-                <a:latin typeface="Arial"/>
-                <a:ea typeface="Arial"/>
-                <a:cs typeface="Arial"/>
-                <a:sym typeface="Arial"/>
-              </a:defRPr>
-            </a:lvl3pPr>
-            <a:lvl4pPr marL="1828800" marR="0" lvl="3" indent="-349250" algn="l" rtl="0">
-              <a:lnSpc>
-                <a:spcPct val="115000"/>
-              </a:lnSpc>
-              <a:spcBef>
-                <a:spcPts val="2100"/>
-              </a:spcBef>
-              <a:spcAft>
-                <a:spcPts val="0"/>
-              </a:spcAft>
-              <a:buClr>
-                <a:srgbClr val="434343"/>
-              </a:buClr>
-              <a:buSzPts val="1900"/>
-              <a:buFont typeface="Arial"/>
-              <a:buChar char="●"/>
-              <a:defRPr sz="1900" b="0" i="0" u="none" strike="noStrike" cap="none">
-                <a:solidFill>
-                  <a:srgbClr val="434343"/>
-                </a:solidFill>
-                <a:latin typeface="Arial"/>
-                <a:ea typeface="Arial"/>
-                <a:cs typeface="Arial"/>
-                <a:sym typeface="Arial"/>
-              </a:defRPr>
-            </a:lvl4pPr>
-            <a:lvl5pPr marL="2286000" marR="0" lvl="4" indent="-349250" algn="l" rtl="0">
-              <a:lnSpc>
-                <a:spcPct val="115000"/>
-              </a:lnSpc>
-              <a:spcBef>
-                <a:spcPts val="2100"/>
-              </a:spcBef>
-              <a:spcAft>
-                <a:spcPts val="0"/>
-              </a:spcAft>
-              <a:buClr>
-                <a:srgbClr val="434343"/>
-              </a:buClr>
-              <a:buSzPts val="1900"/>
-              <a:buFont typeface="Arial"/>
-              <a:buChar char="○"/>
-              <a:defRPr sz="1900" b="0" i="0" u="none" strike="noStrike" cap="none">
-                <a:solidFill>
-                  <a:srgbClr val="434343"/>
-                </a:solidFill>
-                <a:latin typeface="Arial"/>
-                <a:ea typeface="Arial"/>
-                <a:cs typeface="Arial"/>
-                <a:sym typeface="Arial"/>
-              </a:defRPr>
-            </a:lvl5pPr>
-            <a:lvl6pPr marL="2743200" marR="0" lvl="5" indent="-349250" algn="l" rtl="0">
-              <a:lnSpc>
-                <a:spcPct val="115000"/>
-              </a:lnSpc>
-              <a:spcBef>
-                <a:spcPts val="2100"/>
-              </a:spcBef>
-              <a:spcAft>
-                <a:spcPts val="0"/>
-              </a:spcAft>
-              <a:buClr>
-                <a:srgbClr val="434343"/>
-              </a:buClr>
-              <a:buSzPts val="1900"/>
-              <a:buFont typeface="Arial"/>
-              <a:buChar char="■"/>
-              <a:defRPr sz="1900" b="0" i="0" u="none" strike="noStrike" cap="none">
-                <a:solidFill>
-                  <a:srgbClr val="434343"/>
-                </a:solidFill>
-                <a:latin typeface="Arial"/>
-                <a:ea typeface="Arial"/>
-                <a:cs typeface="Arial"/>
-                <a:sym typeface="Arial"/>
-              </a:defRPr>
-            </a:lvl6pPr>
-            <a:lvl7pPr marL="3200400" marR="0" lvl="6" indent="-349250" algn="l" rtl="0">
-              <a:lnSpc>
-                <a:spcPct val="115000"/>
-              </a:lnSpc>
-              <a:spcBef>
-                <a:spcPts val="2100"/>
-              </a:spcBef>
-              <a:spcAft>
-                <a:spcPts val="0"/>
-              </a:spcAft>
-              <a:buClr>
-                <a:srgbClr val="434343"/>
-              </a:buClr>
-              <a:buSzPts val="1900"/>
-              <a:buFont typeface="Arial"/>
-              <a:buChar char="●"/>
-              <a:defRPr sz="1900" b="0" i="0" u="none" strike="noStrike" cap="none">
-                <a:solidFill>
-                  <a:srgbClr val="434343"/>
-                </a:solidFill>
-                <a:latin typeface="Arial"/>
-                <a:ea typeface="Arial"/>
-                <a:cs typeface="Arial"/>
-                <a:sym typeface="Arial"/>
-              </a:defRPr>
-            </a:lvl7pPr>
-            <a:lvl8pPr marL="3657600" marR="0" lvl="7" indent="-349250" algn="l" rtl="0">
-              <a:lnSpc>
-                <a:spcPct val="115000"/>
-              </a:lnSpc>
-              <a:spcBef>
-                <a:spcPts val="2100"/>
-              </a:spcBef>
-              <a:spcAft>
-                <a:spcPts val="0"/>
-              </a:spcAft>
-              <a:buClr>
-                <a:srgbClr val="434343"/>
-              </a:buClr>
-              <a:buSzPts val="1900"/>
-              <a:buFont typeface="Arial"/>
-              <a:buChar char="○"/>
-              <a:defRPr sz="1900" b="0" i="0" u="none" strike="noStrike" cap="none">
-                <a:solidFill>
-                  <a:srgbClr val="434343"/>
-                </a:solidFill>
-                <a:latin typeface="Arial"/>
-                <a:ea typeface="Arial"/>
-                <a:cs typeface="Arial"/>
-                <a:sym typeface="Arial"/>
-              </a:defRPr>
-            </a:lvl8pPr>
-            <a:lvl9pPr marL="4114800" marR="0" lvl="8" indent="-349250" algn="l" rtl="0">
-              <a:lnSpc>
-                <a:spcPct val="115000"/>
-              </a:lnSpc>
-              <a:spcBef>
-                <a:spcPts val="2100"/>
-              </a:spcBef>
-              <a:spcAft>
-                <a:spcPts val="2100"/>
-              </a:spcAft>
-              <a:buClr>
-                <a:srgbClr val="434343"/>
-              </a:buClr>
-              <a:buSzPts val="1900"/>
-              <a:buFont typeface="Arial"/>
-              <a:buChar char="■"/>
-              <a:defRPr sz="1900" b="0" i="0" u="none" strike="noStrike" cap="none">
-                <a:solidFill>
-                  <a:srgbClr val="434343"/>
-                </a:solidFill>
-                <a:latin typeface="Arial"/>
-                <a:ea typeface="Arial"/>
-                <a:cs typeface="Arial"/>
-                <a:sym typeface="Arial"/>
-              </a:defRPr>
-            </a:lvl9pPr>
-          </a:lstStyle>
-          <a:p>
-            <a:pPr marL="76200" indent="0" algn="ctr">
-              <a:buNone/>
-            </a:pPr>
-            <a:r>
-              <a:rPr lang="en-US" sz="5400" b="1" dirty="0" err="1">
-                <a:solidFill>
-                  <a:srgbClr val="C00000"/>
-                </a:solidFill>
-              </a:rPr>
-              <a:t>slido.com</a:t>
-            </a:r>
-            <a:endParaRPr lang="en-US" sz="5400" b="1" dirty="0">
-              <a:solidFill>
-                <a:srgbClr val="C00000"/>
-              </a:solidFill>
-            </a:endParaRPr>
-          </a:p>
-          <a:p>
-            <a:pPr marL="76200" indent="0" algn="ctr">
-              <a:buNone/>
-            </a:pPr>
-            <a:endParaRPr lang="en-US" sz="5400" b="1" dirty="0">
-              <a:solidFill>
-                <a:srgbClr val="C00000"/>
-              </a:solidFill>
-            </a:endParaRPr>
-          </a:p>
-          <a:p>
-            <a:pPr marL="76200" indent="0" algn="ctr">
-              <a:buNone/>
-            </a:pPr>
-            <a:r>
-              <a:rPr lang="en-US" sz="5400" b="1" dirty="0">
-                <a:solidFill>
-                  <a:srgbClr val="C00000"/>
-                </a:solidFill>
-              </a:rPr>
-              <a:t>#10718</a:t>
+              <a:t>Categorical to Binary (Dummies)</a:t>
+            </a:r>
+          </a:p>
+          <a:p>
+            <a:r>
+              <a:rPr lang="en-US" dirty="0"/>
+              <a:t>Features for missing values</a:t>
+            </a:r>
+          </a:p>
+          <a:p>
+            <a:r>
+              <a:rPr lang="en-US" dirty="0"/>
+              <a:t>Discretization</a:t>
+            </a:r>
+          </a:p>
+          <a:p>
+            <a:r>
+              <a:rPr lang="en-US" dirty="0"/>
+              <a:t>Date/Time Features</a:t>
+            </a:r>
+          </a:p>
+          <a:p>
+            <a:r>
+              <a:rPr lang="en-US" dirty="0"/>
+              <a:t>Scaling/Normalizing</a:t>
+            </a:r>
+          </a:p>
+          <a:p>
+            <a:r>
+              <a:rPr lang="en-US" dirty="0"/>
+              <a:t>Transformations</a:t>
+            </a:r>
+          </a:p>
+          <a:p>
+            <a:r>
+              <a:rPr lang="en-US" b="1" dirty="0"/>
+              <a:t>Aggregations (space, time, space and time)</a:t>
+            </a:r>
+          </a:p>
+          <a:p>
+            <a:r>
+              <a:rPr lang="en-US" b="1" dirty="0"/>
+              <a:t>Relative (compared to the average</a:t>
+            </a:r>
+            <a:r>
+              <a:rPr lang="mr-IN" b="1" dirty="0"/>
+              <a:t>…</a:t>
+            </a:r>
+            <a:r>
+              <a:rPr lang="en-US" b="1" dirty="0"/>
+              <a:t>)</a:t>
+            </a:r>
+          </a:p>
+          <a:p>
+            <a:r>
+              <a:rPr lang="en-US" dirty="0"/>
+              <a:t>Interactions</a:t>
             </a:r>
           </a:p>
         </p:txBody>
@@ -11605,7 +11406,7 @@
     </p:spTree>
     <p:extLst>
       <p:ext uri="{BB962C8B-B14F-4D97-AF65-F5344CB8AC3E}">
-        <p14:creationId xmlns:p14="http://schemas.microsoft.com/office/powerpoint/2010/main" val="838504151"/>
+        <p14:creationId xmlns:p14="http://schemas.microsoft.com/office/powerpoint/2010/main" val="1333766914"/>
       </p:ext>
     </p:extLst>
   </p:cSld>
@@ -11649,138 +11450,6 @@
           <a:p>
             <a:r>
               <a:rPr lang="en-US" dirty="0"/>
-              <a:t>Feature Generation</a:t>
-            </a:r>
-          </a:p>
-        </p:txBody>
-      </p:sp>
-      <p:sp>
-        <p:nvSpPr>
-          <p:cNvPr id="2" name="Content Placeholder 1"/>
-          <p:cNvSpPr>
-            <a:spLocks noGrp="1"/>
-          </p:cNvSpPr>
-          <p:nvPr>
-            <p:ph type="body" idx="1"/>
-          </p:nvPr>
-        </p:nvSpPr>
-        <p:spPr/>
-        <p:txBody>
-          <a:bodyPr>
-            <a:normAutofit/>
-          </a:bodyPr>
-          <a:lstStyle/>
-          <a:p>
-            <a:r>
-              <a:rPr lang="en-US" dirty="0"/>
-              <a:t>Categorical to Binary (Dummies)</a:t>
-            </a:r>
-          </a:p>
-          <a:p>
-            <a:r>
-              <a:rPr lang="en-US" dirty="0"/>
-              <a:t>Features for missing values</a:t>
-            </a:r>
-          </a:p>
-          <a:p>
-            <a:r>
-              <a:rPr lang="en-US" dirty="0"/>
-              <a:t>Discretization</a:t>
-            </a:r>
-          </a:p>
-          <a:p>
-            <a:r>
-              <a:rPr lang="en-US" dirty="0"/>
-              <a:t>Date/Time Features</a:t>
-            </a:r>
-          </a:p>
-          <a:p>
-            <a:r>
-              <a:rPr lang="en-US" dirty="0"/>
-              <a:t>Scaling/Normalizing</a:t>
-            </a:r>
-          </a:p>
-          <a:p>
-            <a:r>
-              <a:rPr lang="en-US" dirty="0"/>
-              <a:t>Transformations</a:t>
-            </a:r>
-          </a:p>
-          <a:p>
-            <a:r>
-              <a:rPr lang="en-US" b="1" dirty="0"/>
-              <a:t>Aggregations (space, time, space and time)</a:t>
-            </a:r>
-          </a:p>
-          <a:p>
-            <a:r>
-              <a:rPr lang="en-US" b="1" dirty="0"/>
-              <a:t>Relative (compared to the average</a:t>
-            </a:r>
-            <a:r>
-              <a:rPr lang="mr-IN" b="1" dirty="0"/>
-              <a:t>…</a:t>
-            </a:r>
-            <a:r>
-              <a:rPr lang="en-US" b="1" dirty="0"/>
-              <a:t>)</a:t>
-            </a:r>
-          </a:p>
-          <a:p>
-            <a:r>
-              <a:rPr lang="en-US" dirty="0"/>
-              <a:t>Interactions</a:t>
-            </a:r>
-          </a:p>
-        </p:txBody>
-      </p:sp>
-    </p:spTree>
-    <p:extLst>
-      <p:ext uri="{BB962C8B-B14F-4D97-AF65-F5344CB8AC3E}">
-        <p14:creationId xmlns:p14="http://schemas.microsoft.com/office/powerpoint/2010/main" val="1333766914"/>
-      </p:ext>
-    </p:extLst>
-  </p:cSld>
-  <p:clrMapOvr>
-    <a:masterClrMapping/>
-  </p:clrMapOvr>
-</p:sld>
-</file>
-
-<file path=ppt/slides/slide17.xml><?xml version="1.0" encoding="utf-8"?>
-<p:sld xmlns:a="http://schemas.openxmlformats.org/drawingml/2006/main" xmlns:r="http://schemas.openxmlformats.org/officeDocument/2006/relationships" xmlns:p="http://schemas.openxmlformats.org/presentationml/2006/main">
-  <p:cSld>
-    <p:spTree>
-      <p:nvGrpSpPr>
-        <p:cNvPr id="1" name=""/>
-        <p:cNvGrpSpPr/>
-        <p:nvPr/>
-      </p:nvGrpSpPr>
-      <p:grpSpPr>
-        <a:xfrm>
-          <a:off x="0" y="0"/>
-          <a:ext cx="0" cy="0"/>
-          <a:chOff x="0" y="0"/>
-          <a:chExt cx="0" cy="0"/>
-        </a:xfrm>
-      </p:grpSpPr>
-      <p:sp>
-        <p:nvSpPr>
-          <p:cNvPr id="3" name="Title 2"/>
-          <p:cNvSpPr>
-            <a:spLocks noGrp="1"/>
-          </p:cNvSpPr>
-          <p:nvPr>
-            <p:ph type="title"/>
-          </p:nvPr>
-        </p:nvSpPr>
-        <p:spPr/>
-        <p:txBody>
-          <a:bodyPr/>
-          <a:lstStyle/>
-          <a:p>
-            <a:r>
-              <a:rPr lang="en-US" dirty="0"/>
               <a:t>Categorical to Binary</a:t>
             </a:r>
           </a:p>
@@ -11844,7 +11513,7 @@
 </p:sld>
 </file>
 
-<file path=ppt/slides/slide18.xml><?xml version="1.0" encoding="utf-8"?>
+<file path=ppt/slides/slide17.xml><?xml version="1.0" encoding="utf-8"?>
 <p:sld xmlns:a="http://schemas.openxmlformats.org/drawingml/2006/main" xmlns:r="http://schemas.openxmlformats.org/officeDocument/2006/relationships" xmlns:p="http://schemas.openxmlformats.org/presentationml/2006/main">
   <p:cSld>
     <p:spTree>
@@ -12136,7 +11805,7 @@
 </p:sld>
 </file>
 
-<file path=ppt/slides/slide19.xml><?xml version="1.0" encoding="utf-8"?>
+<file path=ppt/slides/slide18.xml><?xml version="1.0" encoding="utf-8"?>
 <p:sld xmlns:a="http://schemas.openxmlformats.org/drawingml/2006/main" xmlns:r="http://schemas.openxmlformats.org/officeDocument/2006/relationships" xmlns:p="http://schemas.openxmlformats.org/presentationml/2006/main">
   <p:cSld>
     <p:spTree>
@@ -12263,6 +11932,453 @@
     <p:extLst>
       <p:ext uri="{BB962C8B-B14F-4D97-AF65-F5344CB8AC3E}">
         <p14:creationId xmlns:p14="http://schemas.microsoft.com/office/powerpoint/2010/main" val="1008191164"/>
+      </p:ext>
+    </p:extLst>
+  </p:cSld>
+  <p:clrMapOvr>
+    <a:masterClrMapping/>
+  </p:clrMapOvr>
+</p:sld>
+</file>
+
+<file path=ppt/slides/slide19.xml><?xml version="1.0" encoding="utf-8"?>
+<p:sld xmlns:a="http://schemas.openxmlformats.org/drawingml/2006/main" xmlns:r="http://schemas.openxmlformats.org/officeDocument/2006/relationships" xmlns:p="http://schemas.openxmlformats.org/presentationml/2006/main" show="0">
+  <p:cSld>
+    <p:spTree>
+      <p:nvGrpSpPr>
+        <p:cNvPr id="1" name=""/>
+        <p:cNvGrpSpPr/>
+        <p:nvPr/>
+      </p:nvGrpSpPr>
+      <p:grpSpPr>
+        <a:xfrm>
+          <a:off x="0" y="0"/>
+          <a:ext cx="0" cy="0"/>
+          <a:chOff x="0" y="0"/>
+          <a:chExt cx="0" cy="0"/>
+        </a:xfrm>
+      </p:grpSpPr>
+      <p:sp>
+        <p:nvSpPr>
+          <p:cNvPr id="3" name="Title 2"/>
+          <p:cNvSpPr>
+            <a:spLocks noGrp="1"/>
+          </p:cNvSpPr>
+          <p:nvPr>
+            <p:ph type="title"/>
+          </p:nvPr>
+        </p:nvSpPr>
+        <p:spPr>
+          <a:xfrm>
+            <a:off x="111210" y="367459"/>
+            <a:ext cx="12080789" cy="763500"/>
+          </a:xfrm>
+        </p:spPr>
+        <p:txBody>
+          <a:bodyPr/>
+          <a:lstStyle/>
+          <a:p>
+            <a:r>
+              <a:rPr lang="en-US" dirty="0"/>
+              <a:t>Is Scaling Important for…</a:t>
+            </a:r>
+          </a:p>
+        </p:txBody>
+      </p:sp>
+      <p:sp>
+        <p:nvSpPr>
+          <p:cNvPr id="2" name="Content Placeholder 1"/>
+          <p:cNvSpPr>
+            <a:spLocks noGrp="1"/>
+          </p:cNvSpPr>
+          <p:nvPr>
+            <p:ph type="body" idx="1"/>
+          </p:nvPr>
+        </p:nvSpPr>
+        <p:spPr>
+          <a:xfrm>
+            <a:off x="415600" y="1536633"/>
+            <a:ext cx="4235913" cy="4555200"/>
+          </a:xfrm>
+        </p:spPr>
+        <p:txBody>
+          <a:bodyPr/>
+          <a:lstStyle/>
+          <a:p>
+            <a:r>
+              <a:rPr lang="en-US" dirty="0"/>
+              <a:t>Decision Trees?</a:t>
+            </a:r>
+            <a:br>
+              <a:rPr lang="en-US" dirty="0"/>
+            </a:br>
+            <a:endParaRPr lang="en-US" dirty="0"/>
+          </a:p>
+          <a:p>
+            <a:r>
+              <a:rPr lang="en-US" dirty="0"/>
+              <a:t>k-Nearest Neighbors?</a:t>
+            </a:r>
+            <a:br>
+              <a:rPr lang="en-US" dirty="0"/>
+            </a:br>
+            <a:endParaRPr lang="en-US" dirty="0"/>
+          </a:p>
+          <a:p>
+            <a:r>
+              <a:rPr lang="en-US" dirty="0"/>
+              <a:t>Random Forest?</a:t>
+            </a:r>
+            <a:br>
+              <a:rPr lang="en-US" dirty="0"/>
+            </a:br>
+            <a:endParaRPr lang="en-US" dirty="0"/>
+          </a:p>
+          <a:p>
+            <a:r>
+              <a:rPr lang="en-US" dirty="0"/>
+              <a:t>Logistic Regression?</a:t>
+            </a:r>
+          </a:p>
+          <a:p>
+            <a:endParaRPr lang="en-US" dirty="0"/>
+          </a:p>
+          <a:p>
+            <a:r>
+              <a:rPr lang="en-US" dirty="0"/>
+              <a:t>Neural Nets?</a:t>
+            </a:r>
+          </a:p>
+          <a:p>
+            <a:endParaRPr lang="en-US" dirty="0"/>
+          </a:p>
+        </p:txBody>
+      </p:sp>
+      <p:sp>
+        <p:nvSpPr>
+          <p:cNvPr id="4" name="Content Placeholder 1">
+            <a:extLst>
+              <a:ext uri="{FF2B5EF4-FFF2-40B4-BE49-F238E27FC236}">
+                <a16:creationId xmlns:a16="http://schemas.microsoft.com/office/drawing/2014/main" id="{14BBE1C8-D8BC-2A41-A04B-7C6439BF19C4}"/>
+              </a:ext>
+            </a:extLst>
+          </p:cNvPr>
+          <p:cNvSpPr txBox="1">
+            <a:spLocks/>
+          </p:cNvSpPr>
+          <p:nvPr/>
+        </p:nvSpPr>
+        <p:spPr>
+          <a:xfrm>
+            <a:off x="6557983" y="2355190"/>
+            <a:ext cx="4235913" cy="3542027"/>
+          </a:xfrm>
+          <a:prstGeom prst="rect">
+            <a:avLst/>
+          </a:prstGeom>
+          <a:noFill/>
+          <a:ln>
+            <a:noFill/>
+          </a:ln>
+        </p:spPr>
+        <p:txBody>
+          <a:bodyPr spcFirstLastPara="1" wrap="square" lIns="121900" tIns="121900" rIns="121900" bIns="121900" anchor="t" anchorCtr="0">
+            <a:noAutofit/>
+          </a:bodyPr>
+          <a:lstStyle>
+            <a:defPPr marR="0" lvl="0" algn="l" rtl="0">
+              <a:lnSpc>
+                <a:spcPct val="100000"/>
+              </a:lnSpc>
+              <a:spcBef>
+                <a:spcPts val="0"/>
+              </a:spcBef>
+              <a:spcAft>
+                <a:spcPts val="0"/>
+              </a:spcAft>
+            </a:defPPr>
+            <a:lvl1pPr marL="457200" marR="0" lvl="0" indent="-381000" algn="l" rtl="0">
+              <a:lnSpc>
+                <a:spcPct val="115000"/>
+              </a:lnSpc>
+              <a:spcBef>
+                <a:spcPts val="0"/>
+              </a:spcBef>
+              <a:spcAft>
+                <a:spcPts val="0"/>
+              </a:spcAft>
+              <a:buClr>
+                <a:srgbClr val="434343"/>
+              </a:buClr>
+              <a:buSzPts val="2400"/>
+              <a:buFont typeface="Arial"/>
+              <a:buChar char="●"/>
+              <a:defRPr sz="2400" b="0" i="0" u="none" strike="noStrike" cap="none">
+                <a:solidFill>
+                  <a:srgbClr val="434343"/>
+                </a:solidFill>
+                <a:latin typeface="Arial"/>
+                <a:ea typeface="Arial"/>
+                <a:cs typeface="Arial"/>
+                <a:sym typeface="Arial"/>
+              </a:defRPr>
+            </a:lvl1pPr>
+            <a:lvl2pPr marL="914400" marR="0" lvl="1" indent="-349250" algn="l" rtl="0">
+              <a:lnSpc>
+                <a:spcPct val="115000"/>
+              </a:lnSpc>
+              <a:spcBef>
+                <a:spcPts val="2100"/>
+              </a:spcBef>
+              <a:spcAft>
+                <a:spcPts val="0"/>
+              </a:spcAft>
+              <a:buClr>
+                <a:srgbClr val="434343"/>
+              </a:buClr>
+              <a:buSzPts val="1900"/>
+              <a:buFont typeface="Arial"/>
+              <a:buChar char="○"/>
+              <a:defRPr sz="1900" b="0" i="0" u="none" strike="noStrike" cap="none">
+                <a:solidFill>
+                  <a:srgbClr val="434343"/>
+                </a:solidFill>
+                <a:latin typeface="Arial"/>
+                <a:ea typeface="Arial"/>
+                <a:cs typeface="Arial"/>
+                <a:sym typeface="Arial"/>
+              </a:defRPr>
+            </a:lvl2pPr>
+            <a:lvl3pPr marL="1371600" marR="0" lvl="2" indent="-349250" algn="l" rtl="0">
+              <a:lnSpc>
+                <a:spcPct val="115000"/>
+              </a:lnSpc>
+              <a:spcBef>
+                <a:spcPts val="2100"/>
+              </a:spcBef>
+              <a:spcAft>
+                <a:spcPts val="0"/>
+              </a:spcAft>
+              <a:buClr>
+                <a:srgbClr val="434343"/>
+              </a:buClr>
+              <a:buSzPts val="1900"/>
+              <a:buFont typeface="Arial"/>
+              <a:buChar char="■"/>
+              <a:defRPr sz="1900" b="0" i="0" u="none" strike="noStrike" cap="none">
+                <a:solidFill>
+                  <a:srgbClr val="434343"/>
+                </a:solidFill>
+                <a:latin typeface="Arial"/>
+                <a:ea typeface="Arial"/>
+                <a:cs typeface="Arial"/>
+                <a:sym typeface="Arial"/>
+              </a:defRPr>
+            </a:lvl3pPr>
+            <a:lvl4pPr marL="1828800" marR="0" lvl="3" indent="-349250" algn="l" rtl="0">
+              <a:lnSpc>
+                <a:spcPct val="115000"/>
+              </a:lnSpc>
+              <a:spcBef>
+                <a:spcPts val="2100"/>
+              </a:spcBef>
+              <a:spcAft>
+                <a:spcPts val="0"/>
+              </a:spcAft>
+              <a:buClr>
+                <a:srgbClr val="434343"/>
+              </a:buClr>
+              <a:buSzPts val="1900"/>
+              <a:buFont typeface="Arial"/>
+              <a:buChar char="●"/>
+              <a:defRPr sz="1900" b="0" i="0" u="none" strike="noStrike" cap="none">
+                <a:solidFill>
+                  <a:srgbClr val="434343"/>
+                </a:solidFill>
+                <a:latin typeface="Arial"/>
+                <a:ea typeface="Arial"/>
+                <a:cs typeface="Arial"/>
+                <a:sym typeface="Arial"/>
+              </a:defRPr>
+            </a:lvl4pPr>
+            <a:lvl5pPr marL="2286000" marR="0" lvl="4" indent="-349250" algn="l" rtl="0">
+              <a:lnSpc>
+                <a:spcPct val="115000"/>
+              </a:lnSpc>
+              <a:spcBef>
+                <a:spcPts val="2100"/>
+              </a:spcBef>
+              <a:spcAft>
+                <a:spcPts val="0"/>
+              </a:spcAft>
+              <a:buClr>
+                <a:srgbClr val="434343"/>
+              </a:buClr>
+              <a:buSzPts val="1900"/>
+              <a:buFont typeface="Arial"/>
+              <a:buChar char="○"/>
+              <a:defRPr sz="1900" b="0" i="0" u="none" strike="noStrike" cap="none">
+                <a:solidFill>
+                  <a:srgbClr val="434343"/>
+                </a:solidFill>
+                <a:latin typeface="Arial"/>
+                <a:ea typeface="Arial"/>
+                <a:cs typeface="Arial"/>
+                <a:sym typeface="Arial"/>
+              </a:defRPr>
+            </a:lvl5pPr>
+            <a:lvl6pPr marL="2743200" marR="0" lvl="5" indent="-349250" algn="l" rtl="0">
+              <a:lnSpc>
+                <a:spcPct val="115000"/>
+              </a:lnSpc>
+              <a:spcBef>
+                <a:spcPts val="2100"/>
+              </a:spcBef>
+              <a:spcAft>
+                <a:spcPts val="0"/>
+              </a:spcAft>
+              <a:buClr>
+                <a:srgbClr val="434343"/>
+              </a:buClr>
+              <a:buSzPts val="1900"/>
+              <a:buFont typeface="Arial"/>
+              <a:buChar char="■"/>
+              <a:defRPr sz="1900" b="0" i="0" u="none" strike="noStrike" cap="none">
+                <a:solidFill>
+                  <a:srgbClr val="434343"/>
+                </a:solidFill>
+                <a:latin typeface="Arial"/>
+                <a:ea typeface="Arial"/>
+                <a:cs typeface="Arial"/>
+                <a:sym typeface="Arial"/>
+              </a:defRPr>
+            </a:lvl6pPr>
+            <a:lvl7pPr marL="3200400" marR="0" lvl="6" indent="-349250" algn="l" rtl="0">
+              <a:lnSpc>
+                <a:spcPct val="115000"/>
+              </a:lnSpc>
+              <a:spcBef>
+                <a:spcPts val="2100"/>
+              </a:spcBef>
+              <a:spcAft>
+                <a:spcPts val="0"/>
+              </a:spcAft>
+              <a:buClr>
+                <a:srgbClr val="434343"/>
+              </a:buClr>
+              <a:buSzPts val="1900"/>
+              <a:buFont typeface="Arial"/>
+              <a:buChar char="●"/>
+              <a:defRPr sz="1900" b="0" i="0" u="none" strike="noStrike" cap="none">
+                <a:solidFill>
+                  <a:srgbClr val="434343"/>
+                </a:solidFill>
+                <a:latin typeface="Arial"/>
+                <a:ea typeface="Arial"/>
+                <a:cs typeface="Arial"/>
+                <a:sym typeface="Arial"/>
+              </a:defRPr>
+            </a:lvl7pPr>
+            <a:lvl8pPr marL="3657600" marR="0" lvl="7" indent="-349250" algn="l" rtl="0">
+              <a:lnSpc>
+                <a:spcPct val="115000"/>
+              </a:lnSpc>
+              <a:spcBef>
+                <a:spcPts val="2100"/>
+              </a:spcBef>
+              <a:spcAft>
+                <a:spcPts val="0"/>
+              </a:spcAft>
+              <a:buClr>
+                <a:srgbClr val="434343"/>
+              </a:buClr>
+              <a:buSzPts val="1900"/>
+              <a:buFont typeface="Arial"/>
+              <a:buChar char="○"/>
+              <a:defRPr sz="1900" b="0" i="0" u="none" strike="noStrike" cap="none">
+                <a:solidFill>
+                  <a:srgbClr val="434343"/>
+                </a:solidFill>
+                <a:latin typeface="Arial"/>
+                <a:ea typeface="Arial"/>
+                <a:cs typeface="Arial"/>
+                <a:sym typeface="Arial"/>
+              </a:defRPr>
+            </a:lvl8pPr>
+            <a:lvl9pPr marL="4114800" marR="0" lvl="8" indent="-349250" algn="l" rtl="0">
+              <a:lnSpc>
+                <a:spcPct val="115000"/>
+              </a:lnSpc>
+              <a:spcBef>
+                <a:spcPts val="2100"/>
+              </a:spcBef>
+              <a:spcAft>
+                <a:spcPts val="2100"/>
+              </a:spcAft>
+              <a:buClr>
+                <a:srgbClr val="434343"/>
+              </a:buClr>
+              <a:buSzPts val="1900"/>
+              <a:buFont typeface="Arial"/>
+              <a:buChar char="■"/>
+              <a:defRPr sz="1900" b="0" i="0" u="none" strike="noStrike" cap="none">
+                <a:solidFill>
+                  <a:srgbClr val="434343"/>
+                </a:solidFill>
+                <a:latin typeface="Arial"/>
+                <a:ea typeface="Arial"/>
+                <a:cs typeface="Arial"/>
+                <a:sym typeface="Arial"/>
+              </a:defRPr>
+            </a:lvl9pPr>
+          </a:lstStyle>
+          <a:p>
+            <a:pPr marL="76200" indent="0" algn="ctr">
+              <a:buNone/>
+            </a:pPr>
+            <a:r>
+              <a:rPr lang="en-US" sz="5400" b="1" dirty="0" err="1">
+                <a:solidFill>
+                  <a:srgbClr val="C00000"/>
+                </a:solidFill>
+              </a:rPr>
+              <a:t>slido.com</a:t>
+            </a:r>
+            <a:endParaRPr lang="en-US" sz="5400" b="1" dirty="0">
+              <a:solidFill>
+                <a:srgbClr val="C00000"/>
+              </a:solidFill>
+            </a:endParaRPr>
+          </a:p>
+          <a:p>
+            <a:pPr marL="76200" indent="0" algn="ctr">
+              <a:buNone/>
+            </a:pPr>
+            <a:endParaRPr lang="en-US" sz="5400" b="1" dirty="0">
+              <a:solidFill>
+                <a:srgbClr val="C00000"/>
+              </a:solidFill>
+            </a:endParaRPr>
+          </a:p>
+          <a:p>
+            <a:pPr marL="76200" indent="0" algn="ctr">
+              <a:buNone/>
+            </a:pPr>
+            <a:r>
+              <a:rPr lang="en-US" sz="5400" b="1" dirty="0">
+                <a:solidFill>
+                  <a:srgbClr val="C00000"/>
+                </a:solidFill>
+              </a:rPr>
+              <a:t>#10718</a:t>
+            </a:r>
+          </a:p>
+        </p:txBody>
+      </p:sp>
+    </p:spTree>
+    <p:extLst>
+      <p:ext uri="{BB962C8B-B14F-4D97-AF65-F5344CB8AC3E}">
+        <p14:creationId xmlns:p14="http://schemas.microsoft.com/office/powerpoint/2010/main" val="838504151"/>
       </p:ext>
     </p:extLst>
   </p:cSld>
@@ -12388,6 +12504,531 @@
 </file>
 
 <file path=ppt/slides/slide20.xml><?xml version="1.0" encoding="utf-8"?>
+<p:sld xmlns:a="http://schemas.openxmlformats.org/drawingml/2006/main" xmlns:r="http://schemas.openxmlformats.org/officeDocument/2006/relationships" xmlns:p="http://schemas.openxmlformats.org/presentationml/2006/main" showMasterSp="0">
+  <p:cSld>
+    <p:bg>
+      <p:bgPr>
+        <a:solidFill>
+          <a:srgbClr val="FFFFFF"/>
+        </a:solidFill>
+        <a:effectLst/>
+      </p:bgPr>
+    </p:bg>
+    <p:spTree>
+      <p:nvGrpSpPr>
+        <p:cNvPr id="1" name=""/>
+        <p:cNvGrpSpPr/>
+        <p:nvPr/>
+      </p:nvGrpSpPr>
+      <p:grpSpPr>
+        <a:xfrm>
+          <a:off x="0" y="0"/>
+          <a:ext cx="0" cy="0"/>
+          <a:chOff x="0" y="0"/>
+          <a:chExt cx="0" cy="0"/>
+        </a:xfrm>
+      </p:grpSpPr>
+      <p:sp>
+        <p:nvSpPr>
+          <p:cNvPr id="2" name="Rectangle 1">
+            <a:extLst>
+              <a:ext uri="{FF2B5EF4-FFF2-40B4-BE49-F238E27FC236}">
+                <a16:creationId xmlns:a16="http://schemas.microsoft.com/office/drawing/2014/main" id="{F37C26D9-0420-EA8B-3039-CB2DD8AC15DD}"/>
+              </a:ext>
+            </a:extLst>
+          </p:cNvPr>
+          <p:cNvSpPr/>
+          <p:nvPr>
+            <p:custDataLst>
+              <p:tags r:id="rId2"/>
+            </p:custDataLst>
+          </p:nvPr>
+        </p:nvSpPr>
+        <p:spPr>
+          <a:xfrm>
+            <a:off x="444693" y="1742703"/>
+            <a:ext cx="2371696" cy="2371696"/>
+          </a:xfrm>
+          <a:prstGeom prst="rect">
+            <a:avLst/>
+          </a:prstGeom>
+          <a:blipFill>
+            <a:blip r:embed="rId5">
+              <a:extLst>
+                <a:ext uri="{96DAC541-7B7A-43D3-8B79-37D633B846F1}">
+                  <asvg:svgBlip xmlns:asvg="http://schemas.microsoft.com/office/drawing/2016/SVG/main" r:embed="rId6"/>
+                </a:ext>
+              </a:extLst>
+            </a:blip>
+            <a:stretch>
+              <a:fillRect/>
+            </a:stretch>
+          </a:blipFill>
+          <a:ln>
+            <a:solidFill>
+              <a:srgbClr val="FFFFFF"/>
+            </a:solidFill>
+          </a:ln>
+        </p:spPr>
+        <p:style>
+          <a:lnRef idx="2">
+            <a:schemeClr val="accent1">
+              <a:shade val="15000"/>
+            </a:schemeClr>
+          </a:lnRef>
+          <a:fillRef idx="1">
+            <a:schemeClr val="accent1"/>
+          </a:fillRef>
+          <a:effectRef idx="0">
+            <a:schemeClr val="accent1"/>
+          </a:effectRef>
+          <a:fontRef idx="minor">
+            <a:schemeClr val="lt1"/>
+          </a:fontRef>
+        </p:style>
+        <p:txBody>
+          <a:bodyPr rtlCol="0" anchor="ctr"/>
+          <a:lstStyle/>
+          <a:p>
+            <a:pPr algn="ctr"/>
+            <a:endParaRPr lang="en-US"/>
+          </a:p>
+        </p:txBody>
+      </p:sp>
+      <p:sp>
+        <p:nvSpPr>
+          <p:cNvPr id="3" name="Rectangle 2">
+            <a:extLst>
+              <a:ext uri="{FF2B5EF4-FFF2-40B4-BE49-F238E27FC236}">
+                <a16:creationId xmlns:a16="http://schemas.microsoft.com/office/drawing/2014/main" id="{D02AB616-3220-A06B-7D75-917250B17E3B}"/>
+              </a:ext>
+            </a:extLst>
+          </p:cNvPr>
+          <p:cNvSpPr/>
+          <p:nvPr>
+            <p:custDataLst>
+              <p:tags r:id="rId3"/>
+            </p:custDataLst>
+          </p:nvPr>
+        </p:nvSpPr>
+        <p:spPr>
+          <a:xfrm>
+            <a:off x="3112851" y="1000897"/>
+            <a:ext cx="8486226" cy="3855308"/>
+          </a:xfrm>
+          <a:prstGeom prst="rect">
+            <a:avLst/>
+          </a:prstGeom>
+          <a:noFill/>
+          <a:ln w="25400" cap="flat" cmpd="sng" algn="ctr">
+            <a:solidFill>
+              <a:srgbClr val="FFFFFF"/>
+            </a:solidFill>
+            <a:prstDash val="solid"/>
+          </a:ln>
+          <a:effectLst/>
+          <a:extLst>
+            <a:ext uri="{909E8E84-426E-40DD-AFC4-6F175D3DCCD1}">
+              <a14:hiddenFill xmlns:a14="http://schemas.microsoft.com/office/drawing/2010/main">
+                <a:solidFill>
+                  <a:schemeClr val="accent1"/>
+                </a:solidFill>
+              </a14:hiddenFill>
+            </a:ext>
+          </a:extLst>
+        </p:spPr>
+        <p:style>
+          <a:lnRef idx="2">
+            <a:schemeClr val="accent1">
+              <a:shade val="15000"/>
+            </a:schemeClr>
+          </a:lnRef>
+          <a:fillRef idx="1">
+            <a:schemeClr val="accent1"/>
+          </a:fillRef>
+          <a:effectRef idx="0">
+            <a:schemeClr val="accent1"/>
+          </a:effectRef>
+          <a:fontRef idx="minor">
+            <a:schemeClr val="lt1"/>
+          </a:fontRef>
+        </p:style>
+        <p:txBody>
+          <a:bodyPr rtlCol="0" anchor="ctr"/>
+          <a:lstStyle/>
+          <a:p>
+            <a:r>
+              <a:rPr lang="en-US" sz="4000" b="1">
+                <a:solidFill>
+                  <a:srgbClr val="000000"/>
+                </a:solidFill>
+              </a:rPr>
+              <a:t>Is Scaling Important for…</a:t>
+            </a:r>
+          </a:p>
+        </p:txBody>
+      </p:sp>
+      <p:sp>
+        <p:nvSpPr>
+          <p:cNvPr id="4" name="Rectangle 3">
+            <a:extLst>
+              <a:ext uri="{FF2B5EF4-FFF2-40B4-BE49-F238E27FC236}">
+                <a16:creationId xmlns:a16="http://schemas.microsoft.com/office/drawing/2014/main" id="{C27A4837-7600-3A94-20BE-066B174DAB61}"/>
+              </a:ext>
+            </a:extLst>
+          </p:cNvPr>
+          <p:cNvSpPr/>
+          <p:nvPr/>
+        </p:nvSpPr>
+        <p:spPr>
+          <a:xfrm>
+            <a:off x="0" y="5820032"/>
+            <a:ext cx="12192001" cy="1037968"/>
+          </a:xfrm>
+          <a:prstGeom prst="rect">
+            <a:avLst/>
+          </a:prstGeom>
+          <a:solidFill>
+            <a:srgbClr val="198038"/>
+          </a:solidFill>
+          <a:ln w="25400" cap="flat" cmpd="sng" algn="ctr">
+            <a:noFill/>
+            <a:prstDash val="solid"/>
+          </a:ln>
+          <a:effectLst/>
+          <a:extLst>
+            <a:ext uri="{91240B29-F687-4F45-9708-019B960494DF}">
+              <a14:hiddenLine xmlns:a14="http://schemas.microsoft.com/office/drawing/2010/main" w="25400" cap="flat" cmpd="sng" algn="ctr">
+                <a:solidFill>
+                  <a:schemeClr val="accent1">
+                    <a:shade val="15000"/>
+                  </a:schemeClr>
+                </a:solidFill>
+                <a:prstDash val="solid"/>
+              </a14:hiddenLine>
+            </a:ext>
+          </a:extLst>
+        </p:spPr>
+        <p:style>
+          <a:lnRef idx="2">
+            <a:schemeClr val="accent1">
+              <a:shade val="15000"/>
+            </a:schemeClr>
+          </a:lnRef>
+          <a:fillRef idx="1">
+            <a:schemeClr val="accent1"/>
+          </a:fillRef>
+          <a:effectRef idx="0">
+            <a:schemeClr val="accent1"/>
+          </a:effectRef>
+          <a:fontRef idx="minor">
+            <a:schemeClr val="lt1"/>
+          </a:fontRef>
+        </p:style>
+        <p:txBody>
+          <a:bodyPr lIns="741155" tIns="259492" rIns="1852888" bIns="203886" rtlCol="0" anchor="ctr">
+            <a:normAutofit fontScale="85000" lnSpcReduction="10000"/>
+          </a:bodyPr>
+          <a:lstStyle/>
+          <a:p>
+            <a:r>
+              <a:rPr lang="en-US" sz="2600">
+                <a:solidFill>
+                  <a:srgbClr val="FFFFFF"/>
+                </a:solidFill>
+              </a:rPr>
+              <a:t>The </a:t>
+            </a:r>
+            <a:r>
+              <a:rPr lang="en-US" sz="2600">
+                <a:solidFill>
+                  <a:srgbClr val="FFFFFF"/>
+                </a:solidFill>
+                <a:hlinkClick r:id="rId7">
+                  <a:extLst>
+                    <a:ext uri="{A12FA001-AC4F-418D-AE19-62706E023703}">
+                      <ahyp:hlinkClr xmlns:ahyp="http://schemas.microsoft.com/office/drawing/2018/hyperlinkcolor" val="tx"/>
+                    </a:ext>
+                  </a:extLst>
+                </a:hlinkClick>
+              </a:rPr>
+              <a:t>Slido app</a:t>
+            </a:r>
+            <a:r>
+              <a:rPr lang="en-US" sz="2600">
+                <a:solidFill>
+                  <a:srgbClr val="FFFFFF"/>
+                </a:solidFill>
+              </a:rPr>
+              <a:t> must be installed on every computer you’re presenting from</a:t>
+            </a:r>
+          </a:p>
+        </p:txBody>
+      </p:sp>
+      <p:pic>
+        <p:nvPicPr>
+          <p:cNvPr id="6" name="Graphic 5">
+            <a:extLst>
+              <a:ext uri="{FF2B5EF4-FFF2-40B4-BE49-F238E27FC236}">
+                <a16:creationId xmlns:a16="http://schemas.microsoft.com/office/drawing/2014/main" id="{B1998B16-CF69-87A8-160F-4EAFA5E9CDAF}"/>
+              </a:ext>
+            </a:extLst>
+          </p:cNvPr>
+          <p:cNvPicPr>
+            <a:picLocks/>
+          </p:cNvPicPr>
+          <p:nvPr/>
+        </p:nvPicPr>
+        <p:blipFill>
+          <a:blip r:embed="rId8">
+            <a:extLst>
+              <a:ext uri="{96DAC541-7B7A-43D3-8B79-37D633B846F1}">
+                <asvg:svgBlip xmlns:asvg="http://schemas.microsoft.com/office/drawing/2016/SVG/main" r:embed="rId9"/>
+              </a:ext>
+            </a:extLst>
+          </a:blip>
+          <a:stretch>
+            <a:fillRect/>
+          </a:stretch>
+        </p:blipFill>
+        <p:spPr>
+          <a:xfrm>
+            <a:off x="296462" y="6190785"/>
+            <a:ext cx="296462" cy="296462"/>
+          </a:xfrm>
+          <a:prstGeom prst="rect">
+            <a:avLst/>
+          </a:prstGeom>
+        </p:spPr>
+      </p:pic>
+      <p:sp>
+        <p:nvSpPr>
+          <p:cNvPr id="7" name="Trapezoid 6">
+            <a:extLst>
+              <a:ext uri="{FF2B5EF4-FFF2-40B4-BE49-F238E27FC236}">
+                <a16:creationId xmlns:a16="http://schemas.microsoft.com/office/drawing/2014/main" id="{5B8AB890-0815-5417-6141-EB10004C8598}"/>
+              </a:ext>
+            </a:extLst>
+          </p:cNvPr>
+          <p:cNvSpPr/>
+          <p:nvPr/>
+        </p:nvSpPr>
+        <p:spPr>
+          <a:xfrm rot="2700000">
+            <a:off x="9620371" y="514924"/>
+            <a:ext cx="3335198" cy="778213"/>
+          </a:xfrm>
+          <a:prstGeom prst="trapezoid">
+            <a:avLst>
+              <a:gd name="adj" fmla="val 100000"/>
+            </a:avLst>
+          </a:prstGeom>
+          <a:solidFill>
+            <a:srgbClr val="EDFAF2"/>
+          </a:solidFill>
+          <a:ln w="25400" cap="flat" cmpd="sng" algn="ctr">
+            <a:noFill/>
+            <a:prstDash val="solid"/>
+          </a:ln>
+          <a:effectLst/>
+          <a:extLst>
+            <a:ext uri="{91240B29-F687-4F45-9708-019B960494DF}">
+              <a14:hiddenLine xmlns:a14="http://schemas.microsoft.com/office/drawing/2010/main" w="25400" cap="flat" cmpd="sng" algn="ctr">
+                <a:solidFill>
+                  <a:schemeClr val="accent1">
+                    <a:shade val="15000"/>
+                  </a:schemeClr>
+                </a:solidFill>
+                <a:prstDash val="solid"/>
+              </a14:hiddenLine>
+            </a:ext>
+          </a:extLst>
+        </p:spPr>
+        <p:style>
+          <a:lnRef idx="2">
+            <a:schemeClr val="accent1">
+              <a:shade val="15000"/>
+            </a:schemeClr>
+          </a:lnRef>
+          <a:fillRef idx="1">
+            <a:schemeClr val="accent1"/>
+          </a:fillRef>
+          <a:effectRef idx="0">
+            <a:schemeClr val="accent1"/>
+          </a:effectRef>
+          <a:fontRef idx="minor">
+            <a:schemeClr val="lt1"/>
+          </a:fontRef>
+        </p:style>
+        <p:txBody>
+          <a:bodyPr tIns="0" bIns="0" rtlCol="0" anchor="t">
+            <a:normAutofit fontScale="70000" lnSpcReduction="20000"/>
+          </a:bodyPr>
+          <a:lstStyle/>
+          <a:p>
+            <a:pPr algn="ctr"/>
+            <a:r>
+              <a:rPr lang="en-US" sz="2600" b="1">
+                <a:solidFill>
+                  <a:srgbClr val="198038"/>
+                </a:solidFill>
+              </a:rPr>
+              <a:t>Do not edit
+</a:t>
+            </a:r>
+            <a:r>
+              <a:rPr lang="en-US" sz="2200">
+                <a:solidFill>
+                  <a:srgbClr val="198038"/>
+                </a:solidFill>
+                <a:hlinkClick r:id="rId10">
+                  <a:extLst>
+                    <a:ext uri="{A12FA001-AC4F-418D-AE19-62706E023703}">
+                      <ahyp:hlinkClr xmlns:ahyp="http://schemas.microsoft.com/office/drawing/2018/hyperlinkcolor" val="tx"/>
+                    </a:ext>
+                  </a:extLst>
+                </a:hlinkClick>
+              </a:rPr>
+              <a:t>How to change the design</a:t>
+            </a:r>
+            <a:endParaRPr lang="en-US" sz="2200">
+              <a:solidFill>
+                <a:srgbClr val="198038"/>
+              </a:solidFill>
+            </a:endParaRPr>
+          </a:p>
+        </p:txBody>
+      </p:sp>
+      <p:pic>
+        <p:nvPicPr>
+          <p:cNvPr id="9" name="Graphic 8">
+            <a:extLst>
+              <a:ext uri="{FF2B5EF4-FFF2-40B4-BE49-F238E27FC236}">
+                <a16:creationId xmlns:a16="http://schemas.microsoft.com/office/drawing/2014/main" id="{DC1F1D83-8514-E4AF-42CF-7129CE7450B5}"/>
+              </a:ext>
+            </a:extLst>
+          </p:cNvPr>
+          <p:cNvPicPr>
+            <a:picLocks/>
+          </p:cNvPicPr>
+          <p:nvPr/>
+        </p:nvPicPr>
+        <p:blipFill>
+          <a:blip r:embed="rId11">
+            <a:extLst>
+              <a:ext uri="{96DAC541-7B7A-43D3-8B79-37D633B846F1}">
+                <asvg:svgBlip xmlns:asvg="http://schemas.microsoft.com/office/drawing/2016/SVG/main" r:embed="rId12"/>
+              </a:ext>
+            </a:extLst>
+          </a:blip>
+          <a:stretch>
+            <a:fillRect/>
+          </a:stretch>
+        </p:blipFill>
+        <p:spPr>
+          <a:xfrm>
+            <a:off x="10746748" y="6153727"/>
+            <a:ext cx="1111733" cy="370578"/>
+          </a:xfrm>
+          <a:prstGeom prst="rect">
+            <a:avLst/>
+          </a:prstGeom>
+        </p:spPr>
+      </p:pic>
+    </p:spTree>
+    <p:custDataLst>
+      <p:tags r:id="rId1"/>
+    </p:custDataLst>
+    <p:extLst>
+      <p:ext uri="{BB962C8B-B14F-4D97-AF65-F5344CB8AC3E}">
+        <p14:creationId xmlns:p14="http://schemas.microsoft.com/office/powerpoint/2010/main" val="96502126"/>
+      </p:ext>
+    </p:extLst>
+  </p:cSld>
+  <p:clrMapOvr>
+    <a:masterClrMapping/>
+  </p:clrMapOvr>
+  <p:timing>
+    <p:tnLst>
+      <p:par>
+        <p:cTn id="1" dur="indefinite" restart="never" nodeType="tmRoot">
+          <p:childTnLst>
+            <p:seq concurrent="1" nextAc="seek">
+              <p:cTn id="2" dur="indefinite" nodeType="mainSeq">
+                <p:childTnLst>
+                  <p:par>
+                    <p:cTn id="3" fill="hold">
+                      <p:stCondLst>
+                        <p:cond delay="indefinite"/>
+                      </p:stCondLst>
+                      <p:childTnLst>
+                        <p:par>
+                          <p:cTn id="4" fill="hold">
+                            <p:stCondLst>
+                              <p:cond delay="0"/>
+                            </p:stCondLst>
+                            <p:childTnLst>
+                              <p:par>
+                                <p:cTn id="5" presetID="26" presetClass="emph" presetSubtype="0" fill="hold" grpId="0" nodeType="clickEffect">
+                                  <p:stCondLst>
+                                    <p:cond delay="0"/>
+                                  </p:stCondLst>
+                                  <p:childTnLst>
+                                    <p:animEffect transition="out" filter="fade">
+                                      <p:cBhvr>
+                                        <p:cTn id="6" dur="50" tmFilter="0, 0; .2, .5; .8, .5; 1, 0"/>
+                                        <p:tgtEl>
+                                          <p:spTgt spid="3"/>
+                                        </p:tgtEl>
+                                      </p:cBhvr>
+                                    </p:animEffect>
+                                    <p:animScale>
+                                      <p:cBhvr>
+                                        <p:cTn id="7" dur="25" autoRev="1" fill="hold"/>
+                                        <p:tgtEl>
+                                          <p:spTgt spid="3"/>
+                                        </p:tgtEl>
+                                      </p:cBhvr>
+                                      <p:by x="105000" y="105000"/>
+                                    </p:animScale>
+                                  </p:childTnLst>
+                                </p:cTn>
+                              </p:par>
+                            </p:childTnLst>
+                          </p:cTn>
+                        </p:par>
+                      </p:childTnLst>
+                    </p:cTn>
+                  </p:par>
+                </p:childTnLst>
+              </p:cTn>
+              <p:prevCondLst>
+                <p:cond evt="onPrev" delay="0">
+                  <p:tgtEl>
+                    <p:sldTgt/>
+                  </p:tgtEl>
+                </p:cond>
+              </p:prevCondLst>
+              <p:nextCondLst>
+                <p:cond evt="onNext" delay="0">
+                  <p:tgtEl>
+                    <p:sldTgt/>
+                  </p:tgtEl>
+                </p:cond>
+              </p:nextCondLst>
+            </p:seq>
+          </p:childTnLst>
+        </p:cTn>
+      </p:par>
+    </p:tnLst>
+    <p:bldLst>
+      <p:bldP spid="3" grpId="0" animBg="1"/>
+    </p:bldLst>
+  </p:timing>
+</p:sld>
+</file>
+
+<file path=ppt/slides/slide21.xml><?xml version="1.0" encoding="utf-8"?>
 <p:sld xmlns:a="http://schemas.openxmlformats.org/drawingml/2006/main" xmlns:r="http://schemas.openxmlformats.org/officeDocument/2006/relationships" xmlns:p="http://schemas.openxmlformats.org/presentationml/2006/main" show="0">
   <p:cSld>
     <p:spTree>
@@ -12508,7 +13149,7 @@
 </p:sld>
 </file>
 
-<file path=ppt/slides/slide21.xml><?xml version="1.0" encoding="utf-8"?>
+<file path=ppt/slides/slide22.xml><?xml version="1.0" encoding="utf-8"?>
 <p:sld xmlns:a="http://schemas.openxmlformats.org/drawingml/2006/main" xmlns:r="http://schemas.openxmlformats.org/officeDocument/2006/relationships" xmlns:p="http://schemas.openxmlformats.org/presentationml/2006/main">
   <p:cSld>
     <p:spTree>
@@ -12688,159 +13329,6 @@
 </p:sld>
 </file>
 
-<file path=ppt/slides/slide22.xml><?xml version="1.0" encoding="utf-8"?>
-<p:sld xmlns:a="http://schemas.openxmlformats.org/drawingml/2006/main" xmlns:r="http://schemas.openxmlformats.org/officeDocument/2006/relationships" xmlns:p="http://schemas.openxmlformats.org/presentationml/2006/main">
-  <p:cSld>
-    <p:spTree>
-      <p:nvGrpSpPr>
-        <p:cNvPr id="1" name=""/>
-        <p:cNvGrpSpPr/>
-        <p:nvPr/>
-      </p:nvGrpSpPr>
-      <p:grpSpPr>
-        <a:xfrm>
-          <a:off x="0" y="0"/>
-          <a:ext cx="0" cy="0"/>
-          <a:chOff x="0" y="0"/>
-          <a:chExt cx="0" cy="0"/>
-        </a:xfrm>
-      </p:grpSpPr>
-      <p:sp>
-        <p:nvSpPr>
-          <p:cNvPr id="3" name="Title 2"/>
-          <p:cNvSpPr>
-            <a:spLocks noGrp="1"/>
-          </p:cNvSpPr>
-          <p:nvPr>
-            <p:ph type="title"/>
-          </p:nvPr>
-        </p:nvSpPr>
-        <p:spPr/>
-        <p:txBody>
-          <a:bodyPr/>
-          <a:lstStyle/>
-          <a:p>
-            <a:r>
-              <a:rPr lang="en-US" dirty="0"/>
-              <a:t>Aggregations</a:t>
-            </a:r>
-          </a:p>
-        </p:txBody>
-      </p:sp>
-      <p:sp>
-        <p:nvSpPr>
-          <p:cNvPr id="2" name="Content Placeholder 1"/>
-          <p:cNvSpPr>
-            <a:spLocks noGrp="1"/>
-          </p:cNvSpPr>
-          <p:nvPr>
-            <p:ph type="body" idx="1"/>
-          </p:nvPr>
-        </p:nvSpPr>
-        <p:spPr/>
-        <p:txBody>
-          <a:bodyPr>
-            <a:normAutofit lnSpcReduction="10000"/>
-          </a:bodyPr>
-          <a:lstStyle/>
-          <a:p>
-            <a:r>
-              <a:rPr lang="en-US" dirty="0"/>
-              <a:t>Date differences (# of days since…)</a:t>
-            </a:r>
-          </a:p>
-          <a:p>
-            <a:r>
-              <a:rPr lang="en-US" dirty="0"/>
-              <a:t>Aggregates over different time periods</a:t>
-            </a:r>
-          </a:p>
-          <a:p>
-            <a:pPr lvl="1"/>
-            <a:r>
-              <a:rPr lang="en-US" dirty="0"/>
-              <a:t>min, max, avg, </a:t>
-            </a:r>
-            <a:r>
-              <a:rPr lang="en-US" dirty="0" err="1"/>
-              <a:t>stdev</a:t>
-            </a:r>
-            <a:endParaRPr lang="en-US" dirty="0"/>
-          </a:p>
-          <a:p>
-            <a:pPr lvl="1"/>
-            <a:r>
-              <a:rPr lang="en-US" dirty="0" err="1"/>
-              <a:t>Avg</a:t>
-            </a:r>
-            <a:r>
-              <a:rPr lang="en-US" dirty="0"/>
-              <a:t> spend in the past 3 months</a:t>
-            </a:r>
-          </a:p>
-          <a:p>
-            <a:r>
-              <a:rPr lang="en-US" dirty="0"/>
-              <a:t>Relative aggregates</a:t>
-            </a:r>
-          </a:p>
-          <a:p>
-            <a:pPr lvl="1"/>
-            <a:r>
-              <a:rPr lang="en-US" dirty="0"/>
-              <a:t>1.5x </a:t>
-            </a:r>
-            <a:r>
-              <a:rPr lang="en-US" dirty="0" err="1"/>
-              <a:t>avg</a:t>
-            </a:r>
-            <a:r>
-              <a:rPr lang="en-US" dirty="0"/>
-              <a:t> spend</a:t>
-            </a:r>
-          </a:p>
-          <a:p>
-            <a:r>
-              <a:rPr lang="en-US" dirty="0"/>
-              <a:t>Distances</a:t>
-            </a:r>
-          </a:p>
-          <a:p>
-            <a:r>
-              <a:rPr lang="en-US" dirty="0"/>
-              <a:t>Aggregates over different distances</a:t>
-            </a:r>
-          </a:p>
-          <a:p>
-            <a:r>
-              <a:rPr lang="en-US" dirty="0"/>
-              <a:t>Seasonality</a:t>
-            </a:r>
-          </a:p>
-          <a:p>
-            <a:endParaRPr lang="en-US" dirty="0"/>
-          </a:p>
-          <a:p>
-            <a:endParaRPr lang="en-US" dirty="0"/>
-          </a:p>
-          <a:p>
-            <a:endParaRPr lang="en-US" dirty="0"/>
-          </a:p>
-        </p:txBody>
-      </p:sp>
-    </p:spTree>
-    <p:extLst>
-      <p:ext uri="{BB962C8B-B14F-4D97-AF65-F5344CB8AC3E}">
-        <p14:creationId xmlns:p14="http://schemas.microsoft.com/office/powerpoint/2010/main" val="3227679789"/>
-      </p:ext>
-    </p:extLst>
-  </p:cSld>
-  <p:clrMapOvr>
-    <a:masterClrMapping/>
-  </p:clrMapOvr>
-</p:sld>
-</file>
-
 <file path=ppt/slides/slide23.xml><?xml version="1.0" encoding="utf-8"?>
 <p:sld xmlns:a="http://schemas.openxmlformats.org/drawingml/2006/main" xmlns:r="http://schemas.openxmlformats.org/officeDocument/2006/relationships" xmlns:p="http://schemas.openxmlformats.org/presentationml/2006/main">
   <p:cSld>
@@ -12875,7 +13363,7 @@
           <a:p>
             <a:r>
               <a:rPr lang="en-US" dirty="0"/>
-              <a:t>Feature Interactions</a:t>
+              <a:t>Aggregations</a:t>
             </a:r>
           </a:p>
         </p:txBody>
@@ -12892,46 +13380,99 @@
         </p:nvSpPr>
         <p:spPr/>
         <p:txBody>
-          <a:bodyPr/>
+          <a:bodyPr>
+            <a:normAutofit lnSpcReduction="10000"/>
+          </a:bodyPr>
           <a:lstStyle/>
           <a:p>
             <a:r>
               <a:rPr lang="en-US" dirty="0"/>
-              <a:t>Generate features for combination of features</a:t>
+              <a:t>Date differences (# of days since…)</a:t>
+            </a:r>
+          </a:p>
+          <a:p>
+            <a:r>
+              <a:rPr lang="en-US" dirty="0"/>
+              <a:t>Aggregates over different time periods</a:t>
             </a:r>
           </a:p>
           <a:p>
             <a:pPr lvl="1"/>
             <a:r>
               <a:rPr lang="en-US" dirty="0"/>
-              <a:t>Age x gender</a:t>
-            </a:r>
+              <a:t>min, max, avg, </a:t>
+            </a:r>
+            <a:r>
+              <a:rPr lang="en-US" dirty="0" err="1"/>
+              <a:t>stdev</a:t>
+            </a:r>
+            <a:endParaRPr lang="en-US" dirty="0"/>
           </a:p>
           <a:p>
             <a:pPr lvl="1"/>
+            <a:r>
+              <a:rPr lang="en-US" dirty="0" err="1"/>
+              <a:t>Avg</a:t>
+            </a:r>
+            <a:r>
+              <a:rPr lang="en-US" dirty="0"/>
+              <a:t> spend in the past 3 months</a:t>
+            </a:r>
+          </a:p>
+          <a:p>
+            <a:r>
+              <a:rPr lang="en-US" dirty="0"/>
+              <a:t>Relative aggregates</a:t>
+            </a:r>
+          </a:p>
+          <a:p>
+            <a:pPr lvl="1"/>
+            <a:r>
+              <a:rPr lang="en-US" dirty="0"/>
+              <a:t>1.5x </a:t>
+            </a:r>
+            <a:r>
+              <a:rPr lang="en-US" dirty="0" err="1"/>
+              <a:t>avg</a:t>
+            </a:r>
+            <a:r>
+              <a:rPr lang="en-US" dirty="0"/>
+              <a:t> spend</a:t>
+            </a:r>
+          </a:p>
+          <a:p>
+            <a:r>
+              <a:rPr lang="en-US" dirty="0"/>
+              <a:t>Distances</a:t>
+            </a:r>
+          </a:p>
+          <a:p>
+            <a:r>
+              <a:rPr lang="en-US" dirty="0"/>
+              <a:t>Aggregates over different distances</a:t>
+            </a:r>
+          </a:p>
+          <a:p>
+            <a:r>
+              <a:rPr lang="en-US" dirty="0"/>
+              <a:t>Seasonality</a:t>
+            </a:r>
+          </a:p>
+          <a:p>
             <a:endParaRPr lang="en-US" dirty="0"/>
           </a:p>
           <a:p>
-            <a:r>
-              <a:rPr lang="en-US" dirty="0"/>
-              <a:t>Allows you to use linear models but still model non linear relationships</a:t>
-            </a:r>
-          </a:p>
-          <a:p>
             <a:endParaRPr lang="en-US" dirty="0"/>
           </a:p>
           <a:p>
-            <a:r>
-              <a:rPr lang="en-US" dirty="0"/>
-              <a:t>Random Forests are one way of discovering useful interactions</a:t>
-            </a:r>
+            <a:endParaRPr lang="en-US" dirty="0"/>
           </a:p>
         </p:txBody>
       </p:sp>
     </p:spTree>
     <p:extLst>
       <p:ext uri="{BB962C8B-B14F-4D97-AF65-F5344CB8AC3E}">
-        <p14:creationId xmlns:p14="http://schemas.microsoft.com/office/powerpoint/2010/main" val="2835794600"/>
+        <p14:creationId xmlns:p14="http://schemas.microsoft.com/office/powerpoint/2010/main" val="3227679789"/>
       </p:ext>
     </p:extLst>
   </p:cSld>
@@ -12968,19 +13509,14 @@
             <p:ph type="title"/>
           </p:nvPr>
         </p:nvSpPr>
-        <p:spPr>
-          <a:xfrm>
-            <a:off x="180821" y="293023"/>
-            <a:ext cx="11360700" cy="763500"/>
-          </a:xfrm>
-        </p:spPr>
+        <p:spPr/>
         <p:txBody>
           <a:bodyPr/>
           <a:lstStyle/>
           <a:p>
             <a:r>
               <a:rPr lang="en-US" dirty="0"/>
-              <a:t>Features are also model-dependent</a:t>
+              <a:t>Feature Interactions</a:t>
             </a:r>
           </a:p>
         </p:txBody>
@@ -13000,39 +13536,43 @@
           <a:bodyPr/>
           <a:lstStyle/>
           <a:p>
+            <a:r>
+              <a:rPr lang="en-US" dirty="0"/>
+              <a:t>Generate features for combination of features</a:t>
+            </a:r>
+          </a:p>
+          <a:p>
+            <a:pPr lvl="1"/>
+            <a:r>
+              <a:rPr lang="en-US" dirty="0"/>
+              <a:t>Age x gender</a:t>
+            </a:r>
+          </a:p>
+          <a:p>
+            <a:pPr lvl="1"/>
             <a:endParaRPr lang="en-US" dirty="0"/>
           </a:p>
           <a:p>
-            <a:pPr marL="76200" indent="0">
-              <a:buNone/>
-            </a:pPr>
+            <a:r>
+              <a:rPr lang="en-US" dirty="0"/>
+              <a:t>Allows you to use linear models but still model non linear relationships</a:t>
+            </a:r>
+          </a:p>
+          <a:p>
             <a:endParaRPr lang="en-US" dirty="0"/>
           </a:p>
           <a:p>
             <a:r>
               <a:rPr lang="en-US" dirty="0"/>
-              <a:t>Linear models may need … ?</a:t>
-            </a:r>
-            <a:br>
-              <a:rPr lang="en-US" dirty="0"/>
-            </a:br>
-            <a:endParaRPr lang="en-US" dirty="0"/>
-          </a:p>
-          <a:p>
-            <a:r>
-              <a:rPr lang="en-US" dirty="0"/>
-              <a:t>Non-linear models may need …?</a:t>
-            </a:r>
-          </a:p>
-          <a:p>
-            <a:endParaRPr lang="en-US" dirty="0"/>
+              <a:t>Random Forests are one way of discovering useful interactions</a:t>
+            </a:r>
           </a:p>
         </p:txBody>
       </p:sp>
     </p:spTree>
     <p:extLst>
       <p:ext uri="{BB962C8B-B14F-4D97-AF65-F5344CB8AC3E}">
-        <p14:creationId xmlns:p14="http://schemas.microsoft.com/office/powerpoint/2010/main" val="466559840"/>
+        <p14:creationId xmlns:p14="http://schemas.microsoft.com/office/powerpoint/2010/main" val="2835794600"/>
       </p:ext>
     </p:extLst>
   </p:cSld>
@@ -13069,14 +13609,19 @@
             <p:ph type="title"/>
           </p:nvPr>
         </p:nvSpPr>
-        <p:spPr/>
+        <p:spPr>
+          <a:xfrm>
+            <a:off x="180821" y="293023"/>
+            <a:ext cx="11360700" cy="763500"/>
+          </a:xfrm>
+        </p:spPr>
         <p:txBody>
           <a:bodyPr/>
           <a:lstStyle/>
           <a:p>
             <a:r>
               <a:rPr lang="en-US" dirty="0"/>
-              <a:t>Missing Values</a:t>
+              <a:t>Features are also model-dependent</a:t>
             </a:r>
           </a:p>
         </p:txBody>
@@ -13096,56 +13641,39 @@
           <a:bodyPr/>
           <a:lstStyle/>
           <a:p>
-            <a:r>
-              <a:rPr lang="en-US" dirty="0"/>
-              <a:t>Impute (Fill in) missing values based on why you think they may be missing and what you want the model to do with those missing values</a:t>
-            </a:r>
-          </a:p>
-          <a:p>
-            <a:pPr lvl="1"/>
-            <a:r>
-              <a:rPr lang="en-US" dirty="0"/>
-              <a:t>Missing Completely at Random</a:t>
-            </a:r>
-          </a:p>
-          <a:p>
-            <a:pPr lvl="1"/>
-            <a:r>
-              <a:rPr lang="en-US" dirty="0"/>
-              <a:t>Missing at Random</a:t>
-            </a:r>
-          </a:p>
-          <a:p>
-            <a:pPr lvl="1"/>
-            <a:r>
-              <a:rPr lang="en-US" dirty="0"/>
-              <a:t>Missing Not at Random</a:t>
-            </a:r>
-          </a:p>
-          <a:p>
-            <a:pPr lvl="1"/>
             <a:endParaRPr lang="en-US" dirty="0"/>
           </a:p>
           <a:p>
-            <a:r>
-              <a:rPr lang="en-US" dirty="0"/>
-              <a:t>Typically, also add binary feature (dummy) for missing vs not missing in case “</a:t>
-            </a:r>
-            <a:r>
-              <a:rPr lang="en-US" dirty="0" err="1"/>
-              <a:t>missingness</a:t>
-            </a:r>
-            <a:r>
-              <a:rPr lang="en-US" dirty="0"/>
-              <a:t>” is predictive of the outcome</a:t>
-            </a:r>
+            <a:pPr marL="76200" indent="0">
+              <a:buNone/>
+            </a:pPr>
+            <a:endParaRPr lang="en-US" dirty="0"/>
+          </a:p>
+          <a:p>
+            <a:r>
+              <a:rPr lang="en-US" dirty="0"/>
+              <a:t>Linear models may need … ?</a:t>
+            </a:r>
+            <a:br>
+              <a:rPr lang="en-US" dirty="0"/>
+            </a:br>
+            <a:endParaRPr lang="en-US" dirty="0"/>
+          </a:p>
+          <a:p>
+            <a:r>
+              <a:rPr lang="en-US" dirty="0"/>
+              <a:t>Non-linear models may need …?</a:t>
+            </a:r>
+          </a:p>
+          <a:p>
+            <a:endParaRPr lang="en-US" dirty="0"/>
           </a:p>
         </p:txBody>
       </p:sp>
     </p:spTree>
     <p:extLst>
       <p:ext uri="{BB962C8B-B14F-4D97-AF65-F5344CB8AC3E}">
-        <p14:creationId xmlns:p14="http://schemas.microsoft.com/office/powerpoint/2010/main" val="3357099955"/>
+        <p14:creationId xmlns:p14="http://schemas.microsoft.com/office/powerpoint/2010/main" val="466559840"/>
       </p:ext>
     </p:extLst>
   </p:cSld>
@@ -13174,7 +13702,13 @@
       </p:grpSpPr>
       <p:sp>
         <p:nvSpPr>
-          <p:cNvPr id="3" name="Title 2"/>
+          <p:cNvPr id="2" name="Title 1">
+            <a:extLst>
+              <a:ext uri="{FF2B5EF4-FFF2-40B4-BE49-F238E27FC236}">
+                <a16:creationId xmlns:a16="http://schemas.microsoft.com/office/drawing/2014/main" id="{C5E248E6-03FE-5E72-6952-7BDB290D4903}"/>
+              </a:ext>
+            </a:extLst>
+          </p:cNvPr>
           <p:cNvSpPr>
             <a:spLocks noGrp="1"/>
           </p:cNvSpPr>
@@ -13189,14 +13723,20 @@
           <a:p>
             <a:r>
               <a:rPr lang="en-US" dirty="0"/>
-              <a:t>Imputing Missing Values: Some Options</a:t>
+              <a:t>Missing values</a:t>
             </a:r>
           </a:p>
         </p:txBody>
       </p:sp>
       <p:sp>
         <p:nvSpPr>
-          <p:cNvPr id="2" name="Content Placeholder 1"/>
+          <p:cNvPr id="3" name="Text Placeholder 2">
+            <a:extLst>
+              <a:ext uri="{FF2B5EF4-FFF2-40B4-BE49-F238E27FC236}">
+                <a16:creationId xmlns:a16="http://schemas.microsoft.com/office/drawing/2014/main" id="{59C6D3EE-BC81-6284-2A05-709A07242A50}"/>
+              </a:ext>
+            </a:extLst>
+          </p:cNvPr>
           <p:cNvSpPr>
             <a:spLocks noGrp="1"/>
           </p:cNvSpPr>
@@ -13204,88 +13744,47 @@
             <p:ph type="body" idx="1"/>
           </p:nvPr>
         </p:nvSpPr>
-        <p:spPr>
-          <a:xfrm>
-            <a:off x="415600" y="1601179"/>
-            <a:ext cx="11360700" cy="4555200"/>
-          </a:xfrm>
-        </p:spPr>
+        <p:spPr/>
         <p:txBody>
           <a:bodyPr/>
           <a:lstStyle/>
           <a:p>
             <a:r>
               <a:rPr lang="en-US" dirty="0"/>
-              <a:t>Nothing?</a:t>
-            </a:r>
-          </a:p>
-          <a:p>
-            <a:endParaRPr lang="en-US" dirty="0"/>
-          </a:p>
-          <a:p>
-            <a:r>
-              <a:rPr lang="en-US" dirty="0"/>
-              <a:t>Central Tendency: Mean / Median / Mode</a:t>
-            </a:r>
-            <a:br>
-              <a:rPr lang="en-US" dirty="0"/>
-            </a:br>
-            <a:endParaRPr lang="en-US" dirty="0"/>
-          </a:p>
-          <a:p>
-            <a:r>
-              <a:rPr lang="en-US" dirty="0"/>
-              <a:t>ML methods that handle missing data (e.g., </a:t>
-            </a:r>
-            <a:r>
-              <a:rPr lang="en-US" dirty="0" err="1"/>
-              <a:t>xgboost</a:t>
-            </a:r>
-            <a:r>
-              <a:rPr lang="en-US" dirty="0"/>
-              <a:t>)</a:t>
-            </a:r>
-          </a:p>
-          <a:p>
-            <a:endParaRPr lang="en-US" dirty="0"/>
-          </a:p>
-          <a:p>
-            <a:r>
-              <a:rPr lang="en-US" dirty="0"/>
-              <a:t>Others</a:t>
+              <a:t>Real data always has missing information</a:t>
+            </a:r>
+          </a:p>
+          <a:p>
+            <a:r>
+              <a:rPr lang="en-US" dirty="0"/>
+              <a:t>First question: do you know when data is missing? Or is it just…not there</a:t>
+            </a:r>
+          </a:p>
+          <a:p>
+            <a:r>
+              <a:rPr lang="en-US" dirty="0"/>
+              <a:t>NEVER drop all the rows with missing data</a:t>
             </a:r>
           </a:p>
           <a:p>
             <a:pPr lvl="1"/>
             <a:r>
               <a:rPr lang="en-US" dirty="0"/>
-              <a:t>Regression</a:t>
-            </a:r>
-          </a:p>
-          <a:p>
-            <a:pPr lvl="1"/>
-            <a:r>
-              <a:rPr lang="en-US" dirty="0"/>
-              <a:t>k-Nearest Neighbor</a:t>
-            </a:r>
-          </a:p>
-          <a:p>
-            <a:pPr lvl="1"/>
-            <a:r>
-              <a:rPr lang="en-US" dirty="0"/>
-              <a:t>Multiple Imputation</a:t>
-            </a:r>
-            <a:br>
-              <a:rPr lang="en-US" dirty="0"/>
-            </a:br>
-            <a:endParaRPr lang="en-US" dirty="0"/>
+              <a:t>What are you going to do at test time with an entity with missing data shows up?</a:t>
+            </a:r>
+          </a:p>
+          <a:p>
+            <a:r>
+              <a:rPr lang="en-US" dirty="0"/>
+              <a:t>Strategies for handling missingness depend on belief about distribution shift in missingness between training data and deployment</a:t>
+            </a:r>
           </a:p>
         </p:txBody>
       </p:sp>
     </p:spTree>
     <p:extLst>
       <p:ext uri="{BB962C8B-B14F-4D97-AF65-F5344CB8AC3E}">
-        <p14:creationId xmlns:p14="http://schemas.microsoft.com/office/powerpoint/2010/main" val="1168414506"/>
+        <p14:creationId xmlns:p14="http://schemas.microsoft.com/office/powerpoint/2010/main" val="3360183020"/>
       </p:ext>
     </p:extLst>
   </p:cSld>
@@ -13314,7 +13813,13 @@
       </p:grpSpPr>
       <p:sp>
         <p:nvSpPr>
-          <p:cNvPr id="3" name="Title 2"/>
+          <p:cNvPr id="2" name="Title 1">
+            <a:extLst>
+              <a:ext uri="{FF2B5EF4-FFF2-40B4-BE49-F238E27FC236}">
+                <a16:creationId xmlns:a16="http://schemas.microsoft.com/office/drawing/2014/main" id="{5DFEE20D-C8C5-317C-1DDF-33FB591811A5}"/>
+              </a:ext>
+            </a:extLst>
+          </p:cNvPr>
           <p:cNvSpPr>
             <a:spLocks noGrp="1"/>
           </p:cNvSpPr>
@@ -13329,14 +13834,20 @@
           <a:p>
             <a:r>
               <a:rPr lang="en-US" dirty="0"/>
-              <a:t>Imputing – Central Tendency</a:t>
+              <a:t>Missing values</a:t>
             </a:r>
           </a:p>
         </p:txBody>
       </p:sp>
       <p:sp>
         <p:nvSpPr>
-          <p:cNvPr id="2" name="Content Placeholder 1"/>
+          <p:cNvPr id="3" name="Text Placeholder 2">
+            <a:extLst>
+              <a:ext uri="{FF2B5EF4-FFF2-40B4-BE49-F238E27FC236}">
+                <a16:creationId xmlns:a16="http://schemas.microsoft.com/office/drawing/2014/main" id="{79DCE926-8A42-D606-1801-43215E9A3D18}"/>
+              </a:ext>
+            </a:extLst>
+          </p:cNvPr>
           <p:cNvSpPr>
             <a:spLocks noGrp="1"/>
           </p:cNvSpPr>
@@ -13349,131 +13860,65 @@
           <a:bodyPr/>
           <a:lstStyle/>
           <a:p>
-            <a:r>
-              <a:rPr lang="en-US" dirty="0"/>
-              <a:t>Simple to calculate and computationally fast</a:t>
-            </a:r>
-            <a:br>
-              <a:rPr lang="en-US" dirty="0"/>
-            </a:br>
+            <a:pPr marL="76200" indent="0">
+              <a:buNone/>
+            </a:pPr>
+            <a:r>
+              <a:rPr lang="en-US" dirty="0"/>
+              <a:t>Models for missingness:</a:t>
+            </a:r>
+          </a:p>
+          <a:p>
+            <a:r>
+              <a:rPr lang="en-US" dirty="0"/>
+              <a:t>Missing completely at random: uniform probability of missingness</a:t>
+            </a:r>
+          </a:p>
+          <a:p>
+            <a:r>
+              <a:rPr lang="en-US" dirty="0"/>
+              <a:t>Missing at random: </a:t>
+            </a:r>
+            <a:r>
+              <a:rPr lang="en-US" dirty="0" err="1"/>
+              <a:t>Pr</a:t>
+            </a:r>
+            <a:r>
+              <a:rPr lang="en-US" dirty="0"/>
+              <a:t>[missingness] captured by observed features</a:t>
+            </a:r>
+          </a:p>
+          <a:p>
+            <a:r>
+              <a:rPr lang="en-US" dirty="0"/>
+              <a:t>Missing not at random: none of the above</a:t>
+            </a:r>
+          </a:p>
+          <a:p>
+            <a:r>
+              <a:rPr lang="en-US" dirty="0"/>
+              <a:t>Similar to causal inference: assumptions cannot be verified by (observational) data alone </a:t>
+            </a:r>
+            <a:r>
+              <a:rPr lang="en-US" dirty="0">
+                <a:sym typeface="Wingdings" panose="05000000000000000000" pitchFamily="2" charset="2"/>
+              </a:rPr>
+              <a:t></a:t>
+            </a:r>
             <a:endParaRPr lang="en-US" dirty="0"/>
-          </a:p>
-          <a:p>
-            <a:r>
-              <a:rPr lang="en-US" dirty="0"/>
-              <a:t>Often a reasonable starting point</a:t>
-            </a:r>
-            <a:br>
-              <a:rPr lang="en-US" dirty="0"/>
-            </a:br>
-            <a:endParaRPr lang="en-US" dirty="0"/>
-          </a:p>
-          <a:p>
-            <a:r>
-              <a:rPr lang="en-US" dirty="0"/>
-              <a:t>May be able to capture more nuance by using other, correlated data to help fill in missing values</a:t>
-            </a:r>
-            <a:br>
-              <a:rPr lang="en-US" dirty="0"/>
-            </a:br>
-            <a:endParaRPr lang="en-US" dirty="0"/>
-          </a:p>
-          <a:p>
-            <a:r>
-              <a:rPr lang="en-US" dirty="0"/>
-              <a:t>Under-represents variance/covariance of data</a:t>
-            </a:r>
           </a:p>
         </p:txBody>
       </p:sp>
     </p:spTree>
     <p:extLst>
       <p:ext uri="{BB962C8B-B14F-4D97-AF65-F5344CB8AC3E}">
-        <p14:creationId xmlns:p14="http://schemas.microsoft.com/office/powerpoint/2010/main" val="2396215195"/>
+        <p14:creationId xmlns:p14="http://schemas.microsoft.com/office/powerpoint/2010/main" val="3585074227"/>
       </p:ext>
     </p:extLst>
   </p:cSld>
   <p:clrMapOvr>
     <a:masterClrMapping/>
   </p:clrMapOvr>
-  <p:timing>
-    <p:tnLst>
-      <p:par>
-        <p:cTn id="1" dur="indefinite" restart="never" nodeType="tmRoot">
-          <p:childTnLst>
-            <p:seq concurrent="1" nextAc="seek">
-              <p:cTn id="2" dur="indefinite" nodeType="mainSeq">
-                <p:childTnLst>
-                  <p:par>
-                    <p:cTn id="3" fill="hold">
-                      <p:stCondLst>
-                        <p:cond delay="indefinite"/>
-                      </p:stCondLst>
-                      <p:childTnLst>
-                        <p:par>
-                          <p:cTn id="4" fill="hold">
-                            <p:stCondLst>
-                              <p:cond delay="0"/>
-                            </p:stCondLst>
-                            <p:childTnLst>
-                              <p:par>
-                                <p:cTn id="5" presetID="1" presetClass="entr" presetSubtype="0" fill="hold" grpId="0" nodeType="clickEffect">
-                                  <p:stCondLst>
-                                    <p:cond delay="0"/>
-                                  </p:stCondLst>
-                                  <p:childTnLst>
-                                    <p:set>
-                                      <p:cBhvr>
-                                        <p:cTn id="6" dur="1" fill="hold">
-                                          <p:stCondLst>
-                                            <p:cond delay="0"/>
-                                          </p:stCondLst>
-                                        </p:cTn>
-                                        <p:tgtEl>
-                                          <p:spTgt spid="2"/>
-                                        </p:tgtEl>
-                                        <p:attrNameLst>
-                                          <p:attrName>style.visibility</p:attrName>
-                                        </p:attrNameLst>
-                                      </p:cBhvr>
-                                      <p:to>
-                                        <p:strVal val="visible"/>
-                                      </p:to>
-                                    </p:set>
-                                  </p:childTnLst>
-                                </p:cTn>
-                              </p:par>
-                            </p:childTnLst>
-                          </p:cTn>
-                        </p:par>
-                      </p:childTnLst>
-                    </p:cTn>
-                  </p:par>
-                </p:childTnLst>
-              </p:cTn>
-              <p:prevCondLst>
-                <p:cond evt="onPrev" delay="0">
-                  <p:tgtEl>
-                    <p:sldTgt/>
-                  </p:tgtEl>
-                </p:cond>
-              </p:prevCondLst>
-              <p:nextCondLst>
-                <p:cond evt="onNext" delay="0">
-                  <p:tgtEl>
-                    <p:sldTgt/>
-                  </p:tgtEl>
-                </p:cond>
-              </p:nextCondLst>
-            </p:seq>
-          </p:childTnLst>
-        </p:cTn>
-      </p:par>
-    </p:tnLst>
-    <p:bldLst>
-      <p:bldP spid="2" grpId="0"/>
-    </p:bldLst>
-  </p:timing>
 </p:sld>
 </file>
 
@@ -13496,7 +13941,13 @@
       </p:grpSpPr>
       <p:sp>
         <p:nvSpPr>
-          <p:cNvPr id="3" name="Title 2"/>
+          <p:cNvPr id="2" name="Title 1">
+            <a:extLst>
+              <a:ext uri="{FF2B5EF4-FFF2-40B4-BE49-F238E27FC236}">
+                <a16:creationId xmlns:a16="http://schemas.microsoft.com/office/drawing/2014/main" id="{C5E248E6-03FE-5E72-6952-7BDB290D4903}"/>
+              </a:ext>
+            </a:extLst>
+          </p:cNvPr>
           <p:cNvSpPr>
             <a:spLocks noGrp="1"/>
           </p:cNvSpPr>
@@ -13511,14 +13962,20 @@
           <a:p>
             <a:r>
               <a:rPr lang="en-US" dirty="0"/>
-              <a:t>Imputing – ML Methods with Missing Data Handling</a:t>
+              <a:t>Missing values</a:t>
             </a:r>
           </a:p>
         </p:txBody>
       </p:sp>
       <p:sp>
         <p:nvSpPr>
-          <p:cNvPr id="2" name="Content Placeholder 1"/>
+          <p:cNvPr id="3" name="Text Placeholder 2">
+            <a:extLst>
+              <a:ext uri="{FF2B5EF4-FFF2-40B4-BE49-F238E27FC236}">
+                <a16:creationId xmlns:a16="http://schemas.microsoft.com/office/drawing/2014/main" id="{59C6D3EE-BC81-6284-2A05-709A07242A50}"/>
+              </a:ext>
+            </a:extLst>
+          </p:cNvPr>
           <p:cNvSpPr>
             <a:spLocks noGrp="1"/>
           </p:cNvSpPr>
@@ -13533,35 +13990,42 @@
           <a:p>
             <a:r>
               <a:rPr lang="en-US" dirty="0"/>
-              <a:t>Some models have built-in handling of missing data, such as </a:t>
-            </a:r>
-            <a:r>
-              <a:rPr lang="en-US" dirty="0" err="1"/>
-              <a:t>xgboost</a:t>
-            </a:r>
-            <a:r>
-              <a:rPr lang="en-US" dirty="0"/>
-              <a:t> (which decides which direction to send missing values at each split)</a:t>
-            </a:r>
-            <a:br>
-              <a:rPr lang="en-US" dirty="0"/>
-            </a:br>
+              <a:t>Handling missingness depends on your goals</a:t>
+            </a:r>
+          </a:p>
+          <a:p>
+            <a:r>
+              <a:rPr lang="en-US" dirty="0"/>
+              <a:t>Statistical inference: recover the correct value of a </a:t>
+            </a:r>
+            <a:r>
+              <a:rPr lang="en-US" i="1" dirty="0"/>
+              <a:t>parameter</a:t>
+            </a:r>
+            <a:r>
+              <a:rPr lang="en-US" dirty="0"/>
+              <a:t> (e.g., the mean of a covariate or a coefficient in a linear regression model)</a:t>
+            </a:r>
+          </a:p>
+          <a:p>
+            <a:r>
+              <a:rPr lang="en-US" dirty="0"/>
+              <a:t>ML: predict unseen examples</a:t>
+            </a:r>
+          </a:p>
+          <a:p>
             <a:endParaRPr lang="en-US" dirty="0"/>
           </a:p>
           <a:p>
             <a:r>
               <a:rPr lang="en-US" dirty="0"/>
-              <a:t>May not be the best modeling method for your problem, don’t want to be locked into certain type of model</a:t>
-            </a:r>
-            <a:br>
-              <a:rPr lang="en-US" dirty="0"/>
-            </a:br>
-            <a:endParaRPr lang="en-US" dirty="0"/>
-          </a:p>
-          <a:p>
-            <a:r>
-              <a:rPr lang="en-US" dirty="0"/>
-              <a:t>Nevertheless, worth exploring performance of other imputation methods even when using these models as well</a:t>
+              <a:t>In inference, it is theoretically acceptable to throw away missing data if either (a) data is missing completely at random or (b) your model includes all variables the probability of missingness depends on </a:t>
+            </a:r>
+          </a:p>
+          <a:p>
+            <a:r>
+              <a:rPr lang="en-US" dirty="0"/>
+              <a:t>In prediction, missingness is part of the distribution and will likely be present at test time as well</a:t>
             </a:r>
           </a:p>
         </p:txBody>
@@ -13569,91 +14033,13 @@
     </p:spTree>
     <p:extLst>
       <p:ext uri="{BB962C8B-B14F-4D97-AF65-F5344CB8AC3E}">
-        <p14:creationId xmlns:p14="http://schemas.microsoft.com/office/powerpoint/2010/main" val="2521997284"/>
+        <p14:creationId xmlns:p14="http://schemas.microsoft.com/office/powerpoint/2010/main" val="3504445841"/>
       </p:ext>
     </p:extLst>
   </p:cSld>
   <p:clrMapOvr>
     <a:masterClrMapping/>
   </p:clrMapOvr>
-  <p:timing>
-    <p:tnLst>
-      <p:par>
-        <p:cTn id="1" dur="indefinite" restart="never" nodeType="tmRoot">
-          <p:childTnLst>
-            <p:seq concurrent="1" nextAc="seek">
-              <p:cTn id="2" dur="indefinite" nodeType="mainSeq">
-                <p:childTnLst>
-                  <p:par>
-                    <p:cTn id="3" fill="hold">
-                      <p:stCondLst>
-                        <p:cond delay="indefinite"/>
-                      </p:stCondLst>
-                      <p:childTnLst>
-                        <p:par>
-                          <p:cTn id="4" fill="hold">
-                            <p:stCondLst>
-                              <p:cond delay="0"/>
-                            </p:stCondLst>
-                            <p:childTnLst>
-                              <p:par>
-                                <p:cTn id="5" presetID="1" presetClass="entr" presetSubtype="0" fill="hold" grpId="0" nodeType="clickEffect">
-                                  <p:stCondLst>
-                                    <p:cond delay="0"/>
-                                  </p:stCondLst>
-                                  <p:childTnLst>
-                                    <p:set>
-                                      <p:cBhvr>
-                                        <p:cTn id="6" dur="1" fill="hold">
-                                          <p:stCondLst>
-                                            <p:cond delay="0"/>
-                                          </p:stCondLst>
-                                        </p:cTn>
-                                        <p:tgtEl>
-                                          <p:spTgt spid="2"/>
-                                        </p:tgtEl>
-                                        <p:attrNameLst>
-                                          <p:attrName>style.visibility</p:attrName>
-                                        </p:attrNameLst>
-                                      </p:cBhvr>
-                                      <p:to>
-                                        <p:strVal val="visible"/>
-                                      </p:to>
-                                    </p:set>
-                                  </p:childTnLst>
-                                </p:cTn>
-                              </p:par>
-                            </p:childTnLst>
-                          </p:cTn>
-                        </p:par>
-                      </p:childTnLst>
-                    </p:cTn>
-                  </p:par>
-                </p:childTnLst>
-              </p:cTn>
-              <p:prevCondLst>
-                <p:cond evt="onPrev" delay="0">
-                  <p:tgtEl>
-                    <p:sldTgt/>
-                  </p:tgtEl>
-                </p:cond>
-              </p:prevCondLst>
-              <p:nextCondLst>
-                <p:cond evt="onNext" delay="0">
-                  <p:tgtEl>
-                    <p:sldTgt/>
-                  </p:tgtEl>
-                </p:cond>
-              </p:nextCondLst>
-            </p:seq>
-          </p:childTnLst>
-        </p:cTn>
-      </p:par>
-    </p:tnLst>
-    <p:bldLst>
-      <p:bldP spid="2" grpId="0"/>
-    </p:bldLst>
-  </p:timing>
 </p:sld>
 </file>
 
@@ -13691,7 +14077,7 @@
           <a:p>
             <a:r>
               <a:rPr lang="en-US" dirty="0"/>
-              <a:t>Imputing – Regression</a:t>
+              <a:t>Imputation</a:t>
             </a:r>
           </a:p>
         </p:txBody>
@@ -13713,37 +14099,25 @@
           <a:p>
             <a:r>
               <a:rPr lang="en-US" dirty="0"/>
-              <a:t>Make use of information in correlated features, more flexible than central tendency</a:t>
-            </a:r>
-            <a:br>
-              <a:rPr lang="en-US" dirty="0"/>
-            </a:br>
+              <a:t>Impute (Fill in) missing values based on why you think they may be missing and what you want the model to do with those missing values</a:t>
+            </a:r>
+          </a:p>
+          <a:p>
+            <a:pPr lvl="1"/>
             <a:endParaRPr lang="en-US" dirty="0"/>
           </a:p>
           <a:p>
             <a:r>
               <a:rPr lang="en-US" dirty="0"/>
-              <a:t>However, may not be flexible enough to capture complex relationships or interactions</a:t>
-            </a:r>
-            <a:br>
-              <a:rPr lang="en-US" dirty="0"/>
-            </a:br>
-            <a:endParaRPr lang="en-US" dirty="0"/>
-          </a:p>
-          <a:p>
-            <a:r>
-              <a:rPr lang="en-US" dirty="0"/>
-              <a:t>May be somewhat more computationally expensive </a:t>
-            </a:r>
-            <a:br>
-              <a:rPr lang="en-US" dirty="0"/>
-            </a:br>
-            <a:endParaRPr lang="en-US" dirty="0"/>
-          </a:p>
-          <a:p>
-            <a:r>
-              <a:rPr lang="en-US" dirty="0"/>
-              <a:t>Generally will still underestimate variation in data</a:t>
+              <a:t>Typically, also add binary feature (dummy) for missing vs not missing in case “</a:t>
+            </a:r>
+            <a:r>
+              <a:rPr lang="en-US" dirty="0" err="1"/>
+              <a:t>missingness</a:t>
+            </a:r>
+            <a:r>
+              <a:rPr lang="en-US" dirty="0"/>
+              <a:t>” is predictive of the outcome</a:t>
             </a:r>
           </a:p>
         </p:txBody>
@@ -13751,91 +14125,13 @@
     </p:spTree>
     <p:extLst>
       <p:ext uri="{BB962C8B-B14F-4D97-AF65-F5344CB8AC3E}">
-        <p14:creationId xmlns:p14="http://schemas.microsoft.com/office/powerpoint/2010/main" val="3808227576"/>
+        <p14:creationId xmlns:p14="http://schemas.microsoft.com/office/powerpoint/2010/main" val="2415355454"/>
       </p:ext>
     </p:extLst>
   </p:cSld>
   <p:clrMapOvr>
     <a:masterClrMapping/>
   </p:clrMapOvr>
-  <p:timing>
-    <p:tnLst>
-      <p:par>
-        <p:cTn id="1" dur="indefinite" restart="never" nodeType="tmRoot">
-          <p:childTnLst>
-            <p:seq concurrent="1" nextAc="seek">
-              <p:cTn id="2" dur="indefinite" nodeType="mainSeq">
-                <p:childTnLst>
-                  <p:par>
-                    <p:cTn id="3" fill="hold">
-                      <p:stCondLst>
-                        <p:cond delay="indefinite"/>
-                      </p:stCondLst>
-                      <p:childTnLst>
-                        <p:par>
-                          <p:cTn id="4" fill="hold">
-                            <p:stCondLst>
-                              <p:cond delay="0"/>
-                            </p:stCondLst>
-                            <p:childTnLst>
-                              <p:par>
-                                <p:cTn id="5" presetID="1" presetClass="entr" presetSubtype="0" fill="hold" grpId="0" nodeType="clickEffect">
-                                  <p:stCondLst>
-                                    <p:cond delay="0"/>
-                                  </p:stCondLst>
-                                  <p:childTnLst>
-                                    <p:set>
-                                      <p:cBhvr>
-                                        <p:cTn id="6" dur="1" fill="hold">
-                                          <p:stCondLst>
-                                            <p:cond delay="0"/>
-                                          </p:stCondLst>
-                                        </p:cTn>
-                                        <p:tgtEl>
-                                          <p:spTgt spid="2"/>
-                                        </p:tgtEl>
-                                        <p:attrNameLst>
-                                          <p:attrName>style.visibility</p:attrName>
-                                        </p:attrNameLst>
-                                      </p:cBhvr>
-                                      <p:to>
-                                        <p:strVal val="visible"/>
-                                      </p:to>
-                                    </p:set>
-                                  </p:childTnLst>
-                                </p:cTn>
-                              </p:par>
-                            </p:childTnLst>
-                          </p:cTn>
-                        </p:par>
-                      </p:childTnLst>
-                    </p:cTn>
-                  </p:par>
-                </p:childTnLst>
-              </p:cTn>
-              <p:prevCondLst>
-                <p:cond evt="onPrev" delay="0">
-                  <p:tgtEl>
-                    <p:sldTgt/>
-                  </p:tgtEl>
-                </p:cond>
-              </p:prevCondLst>
-              <p:nextCondLst>
-                <p:cond evt="onNext" delay="0">
-                  <p:tgtEl>
-                    <p:sldTgt/>
-                  </p:tgtEl>
-                </p:cond>
-              </p:nextCondLst>
-            </p:seq>
-          </p:childTnLst>
-        </p:cTn>
-      </p:par>
-    </p:tnLst>
-    <p:bldLst>
-      <p:bldP spid="2" grpId="0"/>
-    </p:bldLst>
-  </p:timing>
 </p:sld>
 </file>
 
@@ -14046,7 +14342,7 @@
           <a:p>
             <a:r>
               <a:rPr lang="en-US" dirty="0"/>
-              <a:t>Imputing – k-Nearest Neighbor</a:t>
+              <a:t>Imputing Missing Values: Some Options</a:t>
             </a:r>
           </a:p>
         </p:txBody>
@@ -14061,14 +14357,25 @@
             <p:ph type="body" idx="1"/>
           </p:nvPr>
         </p:nvSpPr>
-        <p:spPr/>
+        <p:spPr>
+          <a:xfrm>
+            <a:off x="415600" y="1601179"/>
+            <a:ext cx="11360700" cy="4555200"/>
+          </a:xfrm>
+        </p:spPr>
         <p:txBody>
           <a:bodyPr/>
           <a:lstStyle/>
           <a:p>
-            <a:r>
-              <a:rPr lang="en-US" dirty="0"/>
-              <a:t>More flexible option, capture more complexity in relationships in data</a:t>
+            <a:pPr marL="76200" indent="0">
+              <a:buNone/>
+            </a:pPr>
+            <a:endParaRPr lang="en-US" dirty="0"/>
+          </a:p>
+          <a:p>
+            <a:r>
+              <a:rPr lang="en-US" dirty="0"/>
+              <a:t>Central Tendency: Mean / Median / Mode</a:t>
             </a:r>
             <a:br>
               <a:rPr lang="en-US" dirty="0"/>
@@ -14078,119 +14385,63 @@
           <a:p>
             <a:r>
               <a:rPr lang="en-US" dirty="0"/>
-              <a:t>Difficult to choose appropriate distance metric, value of k</a:t>
+              <a:t>ML methods that handle missing data (e.g., </a:t>
+            </a:r>
+            <a:r>
+              <a:rPr lang="en-US" dirty="0" err="1"/>
+              <a:t>xgboost</a:t>
+            </a:r>
+            <a:r>
+              <a:rPr lang="en-US" dirty="0"/>
+              <a:t>)</a:t>
+            </a:r>
+          </a:p>
+          <a:p>
+            <a:endParaRPr lang="en-US" dirty="0"/>
+          </a:p>
+          <a:p>
+            <a:r>
+              <a:rPr lang="en-US" dirty="0"/>
+              <a:t>Others</a:t>
+            </a:r>
+          </a:p>
+          <a:p>
+            <a:pPr lvl="1"/>
+            <a:r>
+              <a:rPr lang="en-US" dirty="0"/>
+              <a:t>Regression</a:t>
+            </a:r>
+          </a:p>
+          <a:p>
+            <a:pPr lvl="1"/>
+            <a:r>
+              <a:rPr lang="en-US" dirty="0"/>
+              <a:t>k-Nearest Neighbor</a:t>
+            </a:r>
+          </a:p>
+          <a:p>
+            <a:pPr lvl="1"/>
+            <a:r>
+              <a:rPr lang="en-US" dirty="0"/>
+              <a:t>Multiple Imputation</a:t>
             </a:r>
             <a:br>
               <a:rPr lang="en-US" dirty="0"/>
             </a:br>
             <a:endParaRPr lang="en-US" dirty="0"/>
-          </a:p>
-          <a:p>
-            <a:r>
-              <a:rPr lang="en-US" dirty="0"/>
-              <a:t>More computationally expensive than other methods of imputation</a:t>
-            </a:r>
-            <a:br>
-              <a:rPr lang="en-US" dirty="0"/>
-            </a:br>
-            <a:endParaRPr lang="en-US" dirty="0"/>
-          </a:p>
-          <a:p>
-            <a:r>
-              <a:rPr lang="en-US" dirty="0"/>
-              <a:t>Requires entire training set to calculate imputed values for new examples</a:t>
-            </a:r>
           </a:p>
         </p:txBody>
       </p:sp>
     </p:spTree>
     <p:extLst>
       <p:ext uri="{BB962C8B-B14F-4D97-AF65-F5344CB8AC3E}">
-        <p14:creationId xmlns:p14="http://schemas.microsoft.com/office/powerpoint/2010/main" val="3729575760"/>
+        <p14:creationId xmlns:p14="http://schemas.microsoft.com/office/powerpoint/2010/main" val="1168414506"/>
       </p:ext>
     </p:extLst>
   </p:cSld>
   <p:clrMapOvr>
     <a:masterClrMapping/>
   </p:clrMapOvr>
-  <p:timing>
-    <p:tnLst>
-      <p:par>
-        <p:cTn id="1" dur="indefinite" restart="never" nodeType="tmRoot">
-          <p:childTnLst>
-            <p:seq concurrent="1" nextAc="seek">
-              <p:cTn id="2" dur="indefinite" nodeType="mainSeq">
-                <p:childTnLst>
-                  <p:par>
-                    <p:cTn id="3" fill="hold">
-                      <p:stCondLst>
-                        <p:cond delay="indefinite"/>
-                      </p:stCondLst>
-                      <p:childTnLst>
-                        <p:par>
-                          <p:cTn id="4" fill="hold">
-                            <p:stCondLst>
-                              <p:cond delay="0"/>
-                            </p:stCondLst>
-                            <p:childTnLst>
-                              <p:par>
-                                <p:cTn id="5" presetID="1" presetClass="entr" presetSubtype="0" fill="hold" grpId="0" nodeType="clickEffect">
-                                  <p:stCondLst>
-                                    <p:cond delay="0"/>
-                                  </p:stCondLst>
-                                  <p:childTnLst>
-                                    <p:set>
-                                      <p:cBhvr>
-                                        <p:cTn id="6" dur="1" fill="hold">
-                                          <p:stCondLst>
-                                            <p:cond delay="0"/>
-                                          </p:stCondLst>
-                                        </p:cTn>
-                                        <p:tgtEl>
-                                          <p:spTgt spid="2"/>
-                                        </p:tgtEl>
-                                        <p:attrNameLst>
-                                          <p:attrName>style.visibility</p:attrName>
-                                        </p:attrNameLst>
-                                      </p:cBhvr>
-                                      <p:to>
-                                        <p:strVal val="visible"/>
-                                      </p:to>
-                                    </p:set>
-                                  </p:childTnLst>
-                                </p:cTn>
-                              </p:par>
-                            </p:childTnLst>
-                          </p:cTn>
-                        </p:par>
-                      </p:childTnLst>
-                    </p:cTn>
-                  </p:par>
-                </p:childTnLst>
-              </p:cTn>
-              <p:prevCondLst>
-                <p:cond evt="onPrev" delay="0">
-                  <p:tgtEl>
-                    <p:sldTgt/>
-                  </p:tgtEl>
-                </p:cond>
-              </p:prevCondLst>
-              <p:nextCondLst>
-                <p:cond evt="onNext" delay="0">
-                  <p:tgtEl>
-                    <p:sldTgt/>
-                  </p:tgtEl>
-                </p:cond>
-              </p:nextCondLst>
-            </p:seq>
-          </p:childTnLst>
-        </p:cTn>
-      </p:par>
-    </p:tnLst>
-    <p:bldLst>
-      <p:bldP spid="2" grpId="0"/>
-    </p:bldLst>
-  </p:timing>
 </p:sld>
 </file>
 
@@ -14228,7 +14479,7 @@
           <a:p>
             <a:r>
               <a:rPr lang="en-US" dirty="0"/>
-              <a:t>Imputing – Multiple Imputation</a:t>
+              <a:t>Imputing – Central Tendency</a:t>
             </a:r>
           </a:p>
         </p:txBody>
@@ -14250,7 +14501,7 @@
           <a:p>
             <a:r>
               <a:rPr lang="en-US" dirty="0"/>
-              <a:t>Create multiple “complete” datasets with different values using different regression models</a:t>
+              <a:t>Simple to calculate and computationally fast</a:t>
             </a:r>
             <a:br>
               <a:rPr lang="en-US" dirty="0"/>
@@ -14260,7 +14511,7 @@
           <a:p>
             <a:r>
               <a:rPr lang="en-US" dirty="0"/>
-              <a:t>Helps analyze sensitivity to handling of missing values</a:t>
+              <a:t>Often a reasonable starting point</a:t>
             </a:r>
             <a:br>
               <a:rPr lang="en-US" dirty="0"/>
@@ -14270,7 +14521,7 @@
           <a:p>
             <a:r>
               <a:rPr lang="en-US" dirty="0"/>
-              <a:t>Much more computationally expensive, both for imputation and downstream modeling</a:t>
+              <a:t>May be able to capture more nuance by using other, correlated data to help fill in missing values</a:t>
             </a:r>
             <a:br>
               <a:rPr lang="en-US" dirty="0"/>
@@ -14280,7 +14531,7 @@
           <a:p>
             <a:r>
               <a:rPr lang="en-US" dirty="0"/>
-              <a:t>Can provide better representation of variability in data</a:t>
+              <a:t>Under-represents variance/covariance of data</a:t>
             </a:r>
           </a:p>
         </p:txBody>
@@ -14288,7 +14539,7 @@
     </p:spTree>
     <p:extLst>
       <p:ext uri="{BB962C8B-B14F-4D97-AF65-F5344CB8AC3E}">
-        <p14:creationId xmlns:p14="http://schemas.microsoft.com/office/powerpoint/2010/main" val="2069799902"/>
+        <p14:creationId xmlns:p14="http://schemas.microsoft.com/office/powerpoint/2010/main" val="2396215195"/>
       </p:ext>
     </p:extLst>
   </p:cSld>
@@ -14395,6 +14646,732 @@
       </p:grpSpPr>
       <p:sp>
         <p:nvSpPr>
+          <p:cNvPr id="3" name="Title 2"/>
+          <p:cNvSpPr>
+            <a:spLocks noGrp="1"/>
+          </p:cNvSpPr>
+          <p:nvPr>
+            <p:ph type="title"/>
+          </p:nvPr>
+        </p:nvSpPr>
+        <p:spPr/>
+        <p:txBody>
+          <a:bodyPr/>
+          <a:lstStyle/>
+          <a:p>
+            <a:r>
+              <a:rPr lang="en-US" dirty="0"/>
+              <a:t>Imputing – ML Methods with Missing Data Handling</a:t>
+            </a:r>
+          </a:p>
+        </p:txBody>
+      </p:sp>
+      <p:sp>
+        <p:nvSpPr>
+          <p:cNvPr id="2" name="Content Placeholder 1"/>
+          <p:cNvSpPr>
+            <a:spLocks noGrp="1"/>
+          </p:cNvSpPr>
+          <p:nvPr>
+            <p:ph type="body" idx="1"/>
+          </p:nvPr>
+        </p:nvSpPr>
+        <p:spPr/>
+        <p:txBody>
+          <a:bodyPr/>
+          <a:lstStyle/>
+          <a:p>
+            <a:r>
+              <a:rPr lang="en-US" dirty="0"/>
+              <a:t>Some models have built-in handling of missing data, such as </a:t>
+            </a:r>
+            <a:r>
+              <a:rPr lang="en-US" dirty="0" err="1"/>
+              <a:t>xgboost</a:t>
+            </a:r>
+            <a:r>
+              <a:rPr lang="en-US" dirty="0"/>
+              <a:t> (which decides which direction to send missing values at each split)</a:t>
+            </a:r>
+            <a:br>
+              <a:rPr lang="en-US" dirty="0"/>
+            </a:br>
+            <a:endParaRPr lang="en-US" dirty="0"/>
+          </a:p>
+          <a:p>
+            <a:r>
+              <a:rPr lang="en-US" dirty="0"/>
+              <a:t>May not be the best modeling method for your problem, don’t want to be locked into certain type of model</a:t>
+            </a:r>
+            <a:br>
+              <a:rPr lang="en-US" dirty="0"/>
+            </a:br>
+            <a:endParaRPr lang="en-US" dirty="0"/>
+          </a:p>
+          <a:p>
+            <a:r>
+              <a:rPr lang="en-US" dirty="0"/>
+              <a:t>Nevertheless, worth exploring performance of other imputation methods even when using these models as well</a:t>
+            </a:r>
+          </a:p>
+        </p:txBody>
+      </p:sp>
+    </p:spTree>
+    <p:extLst>
+      <p:ext uri="{BB962C8B-B14F-4D97-AF65-F5344CB8AC3E}">
+        <p14:creationId xmlns:p14="http://schemas.microsoft.com/office/powerpoint/2010/main" val="2521997284"/>
+      </p:ext>
+    </p:extLst>
+  </p:cSld>
+  <p:clrMapOvr>
+    <a:masterClrMapping/>
+  </p:clrMapOvr>
+  <p:timing>
+    <p:tnLst>
+      <p:par>
+        <p:cTn id="1" dur="indefinite" restart="never" nodeType="tmRoot">
+          <p:childTnLst>
+            <p:seq concurrent="1" nextAc="seek">
+              <p:cTn id="2" dur="indefinite" nodeType="mainSeq">
+                <p:childTnLst>
+                  <p:par>
+                    <p:cTn id="3" fill="hold">
+                      <p:stCondLst>
+                        <p:cond delay="indefinite"/>
+                      </p:stCondLst>
+                      <p:childTnLst>
+                        <p:par>
+                          <p:cTn id="4" fill="hold">
+                            <p:stCondLst>
+                              <p:cond delay="0"/>
+                            </p:stCondLst>
+                            <p:childTnLst>
+                              <p:par>
+                                <p:cTn id="5" presetID="1" presetClass="entr" presetSubtype="0" fill="hold" grpId="0" nodeType="clickEffect">
+                                  <p:stCondLst>
+                                    <p:cond delay="0"/>
+                                  </p:stCondLst>
+                                  <p:childTnLst>
+                                    <p:set>
+                                      <p:cBhvr>
+                                        <p:cTn id="6" dur="1" fill="hold">
+                                          <p:stCondLst>
+                                            <p:cond delay="0"/>
+                                          </p:stCondLst>
+                                        </p:cTn>
+                                        <p:tgtEl>
+                                          <p:spTgt spid="2"/>
+                                        </p:tgtEl>
+                                        <p:attrNameLst>
+                                          <p:attrName>style.visibility</p:attrName>
+                                        </p:attrNameLst>
+                                      </p:cBhvr>
+                                      <p:to>
+                                        <p:strVal val="visible"/>
+                                      </p:to>
+                                    </p:set>
+                                  </p:childTnLst>
+                                </p:cTn>
+                              </p:par>
+                            </p:childTnLst>
+                          </p:cTn>
+                        </p:par>
+                      </p:childTnLst>
+                    </p:cTn>
+                  </p:par>
+                </p:childTnLst>
+              </p:cTn>
+              <p:prevCondLst>
+                <p:cond evt="onPrev" delay="0">
+                  <p:tgtEl>
+                    <p:sldTgt/>
+                  </p:tgtEl>
+                </p:cond>
+              </p:prevCondLst>
+              <p:nextCondLst>
+                <p:cond evt="onNext" delay="0">
+                  <p:tgtEl>
+                    <p:sldTgt/>
+                  </p:tgtEl>
+                </p:cond>
+              </p:nextCondLst>
+            </p:seq>
+          </p:childTnLst>
+        </p:cTn>
+      </p:par>
+    </p:tnLst>
+    <p:bldLst>
+      <p:bldP spid="2" grpId="0"/>
+    </p:bldLst>
+  </p:timing>
+</p:sld>
+</file>
+
+<file path=ppt/slides/slide33.xml><?xml version="1.0" encoding="utf-8"?>
+<p:sld xmlns:a="http://schemas.openxmlformats.org/drawingml/2006/main" xmlns:r="http://schemas.openxmlformats.org/officeDocument/2006/relationships" xmlns:p="http://schemas.openxmlformats.org/presentationml/2006/main">
+  <p:cSld>
+    <p:spTree>
+      <p:nvGrpSpPr>
+        <p:cNvPr id="1" name=""/>
+        <p:cNvGrpSpPr/>
+        <p:nvPr/>
+      </p:nvGrpSpPr>
+      <p:grpSpPr>
+        <a:xfrm>
+          <a:off x="0" y="0"/>
+          <a:ext cx="0" cy="0"/>
+          <a:chOff x="0" y="0"/>
+          <a:chExt cx="0" cy="0"/>
+        </a:xfrm>
+      </p:grpSpPr>
+      <p:sp>
+        <p:nvSpPr>
+          <p:cNvPr id="3" name="Title 2"/>
+          <p:cNvSpPr>
+            <a:spLocks noGrp="1"/>
+          </p:cNvSpPr>
+          <p:nvPr>
+            <p:ph type="title"/>
+          </p:nvPr>
+        </p:nvSpPr>
+        <p:spPr/>
+        <p:txBody>
+          <a:bodyPr/>
+          <a:lstStyle/>
+          <a:p>
+            <a:r>
+              <a:rPr lang="en-US" dirty="0"/>
+              <a:t>Imputing – Regression</a:t>
+            </a:r>
+          </a:p>
+        </p:txBody>
+      </p:sp>
+      <p:sp>
+        <p:nvSpPr>
+          <p:cNvPr id="2" name="Content Placeholder 1"/>
+          <p:cNvSpPr>
+            <a:spLocks noGrp="1"/>
+          </p:cNvSpPr>
+          <p:nvPr>
+            <p:ph type="body" idx="1"/>
+          </p:nvPr>
+        </p:nvSpPr>
+        <p:spPr/>
+        <p:txBody>
+          <a:bodyPr/>
+          <a:lstStyle/>
+          <a:p>
+            <a:r>
+              <a:rPr lang="en-US" dirty="0"/>
+              <a:t>Make use of information in correlated features, more flexible than central tendency</a:t>
+            </a:r>
+            <a:br>
+              <a:rPr lang="en-US" dirty="0"/>
+            </a:br>
+            <a:endParaRPr lang="en-US" dirty="0"/>
+          </a:p>
+          <a:p>
+            <a:r>
+              <a:rPr lang="en-US" dirty="0"/>
+              <a:t>However, may not be flexible enough to capture complex relationships or interactions</a:t>
+            </a:r>
+            <a:br>
+              <a:rPr lang="en-US" dirty="0"/>
+            </a:br>
+            <a:endParaRPr lang="en-US" dirty="0"/>
+          </a:p>
+          <a:p>
+            <a:r>
+              <a:rPr lang="en-US" dirty="0"/>
+              <a:t>May be somewhat more computationally expensive </a:t>
+            </a:r>
+            <a:br>
+              <a:rPr lang="en-US" dirty="0"/>
+            </a:br>
+            <a:endParaRPr lang="en-US" dirty="0"/>
+          </a:p>
+          <a:p>
+            <a:r>
+              <a:rPr lang="en-US" dirty="0"/>
+              <a:t>Generally will still underestimate variation in data</a:t>
+            </a:r>
+          </a:p>
+        </p:txBody>
+      </p:sp>
+    </p:spTree>
+    <p:extLst>
+      <p:ext uri="{BB962C8B-B14F-4D97-AF65-F5344CB8AC3E}">
+        <p14:creationId xmlns:p14="http://schemas.microsoft.com/office/powerpoint/2010/main" val="3808227576"/>
+      </p:ext>
+    </p:extLst>
+  </p:cSld>
+  <p:clrMapOvr>
+    <a:masterClrMapping/>
+  </p:clrMapOvr>
+  <p:timing>
+    <p:tnLst>
+      <p:par>
+        <p:cTn id="1" dur="indefinite" restart="never" nodeType="tmRoot">
+          <p:childTnLst>
+            <p:seq concurrent="1" nextAc="seek">
+              <p:cTn id="2" dur="indefinite" nodeType="mainSeq">
+                <p:childTnLst>
+                  <p:par>
+                    <p:cTn id="3" fill="hold">
+                      <p:stCondLst>
+                        <p:cond delay="indefinite"/>
+                      </p:stCondLst>
+                      <p:childTnLst>
+                        <p:par>
+                          <p:cTn id="4" fill="hold">
+                            <p:stCondLst>
+                              <p:cond delay="0"/>
+                            </p:stCondLst>
+                            <p:childTnLst>
+                              <p:par>
+                                <p:cTn id="5" presetID="1" presetClass="entr" presetSubtype="0" fill="hold" grpId="0" nodeType="clickEffect">
+                                  <p:stCondLst>
+                                    <p:cond delay="0"/>
+                                  </p:stCondLst>
+                                  <p:childTnLst>
+                                    <p:set>
+                                      <p:cBhvr>
+                                        <p:cTn id="6" dur="1" fill="hold">
+                                          <p:stCondLst>
+                                            <p:cond delay="0"/>
+                                          </p:stCondLst>
+                                        </p:cTn>
+                                        <p:tgtEl>
+                                          <p:spTgt spid="2"/>
+                                        </p:tgtEl>
+                                        <p:attrNameLst>
+                                          <p:attrName>style.visibility</p:attrName>
+                                        </p:attrNameLst>
+                                      </p:cBhvr>
+                                      <p:to>
+                                        <p:strVal val="visible"/>
+                                      </p:to>
+                                    </p:set>
+                                  </p:childTnLst>
+                                </p:cTn>
+                              </p:par>
+                            </p:childTnLst>
+                          </p:cTn>
+                        </p:par>
+                      </p:childTnLst>
+                    </p:cTn>
+                  </p:par>
+                </p:childTnLst>
+              </p:cTn>
+              <p:prevCondLst>
+                <p:cond evt="onPrev" delay="0">
+                  <p:tgtEl>
+                    <p:sldTgt/>
+                  </p:tgtEl>
+                </p:cond>
+              </p:prevCondLst>
+              <p:nextCondLst>
+                <p:cond evt="onNext" delay="0">
+                  <p:tgtEl>
+                    <p:sldTgt/>
+                  </p:tgtEl>
+                </p:cond>
+              </p:nextCondLst>
+            </p:seq>
+          </p:childTnLst>
+        </p:cTn>
+      </p:par>
+    </p:tnLst>
+    <p:bldLst>
+      <p:bldP spid="2" grpId="0"/>
+    </p:bldLst>
+  </p:timing>
+</p:sld>
+</file>
+
+<file path=ppt/slides/slide34.xml><?xml version="1.0" encoding="utf-8"?>
+<p:sld xmlns:a="http://schemas.openxmlformats.org/drawingml/2006/main" xmlns:r="http://schemas.openxmlformats.org/officeDocument/2006/relationships" xmlns:p="http://schemas.openxmlformats.org/presentationml/2006/main">
+  <p:cSld>
+    <p:spTree>
+      <p:nvGrpSpPr>
+        <p:cNvPr id="1" name=""/>
+        <p:cNvGrpSpPr/>
+        <p:nvPr/>
+      </p:nvGrpSpPr>
+      <p:grpSpPr>
+        <a:xfrm>
+          <a:off x="0" y="0"/>
+          <a:ext cx="0" cy="0"/>
+          <a:chOff x="0" y="0"/>
+          <a:chExt cx="0" cy="0"/>
+        </a:xfrm>
+      </p:grpSpPr>
+      <p:sp>
+        <p:nvSpPr>
+          <p:cNvPr id="3" name="Title 2"/>
+          <p:cNvSpPr>
+            <a:spLocks noGrp="1"/>
+          </p:cNvSpPr>
+          <p:nvPr>
+            <p:ph type="title"/>
+          </p:nvPr>
+        </p:nvSpPr>
+        <p:spPr/>
+        <p:txBody>
+          <a:bodyPr/>
+          <a:lstStyle/>
+          <a:p>
+            <a:r>
+              <a:rPr lang="en-US" dirty="0"/>
+              <a:t>Imputing – k-Nearest Neighbor</a:t>
+            </a:r>
+          </a:p>
+        </p:txBody>
+      </p:sp>
+      <p:sp>
+        <p:nvSpPr>
+          <p:cNvPr id="2" name="Content Placeholder 1"/>
+          <p:cNvSpPr>
+            <a:spLocks noGrp="1"/>
+          </p:cNvSpPr>
+          <p:nvPr>
+            <p:ph type="body" idx="1"/>
+          </p:nvPr>
+        </p:nvSpPr>
+        <p:spPr/>
+        <p:txBody>
+          <a:bodyPr/>
+          <a:lstStyle/>
+          <a:p>
+            <a:r>
+              <a:rPr lang="en-US" dirty="0"/>
+              <a:t>More flexible option, capture more complexity in relationships in data</a:t>
+            </a:r>
+            <a:br>
+              <a:rPr lang="en-US" dirty="0"/>
+            </a:br>
+            <a:endParaRPr lang="en-US" dirty="0"/>
+          </a:p>
+          <a:p>
+            <a:r>
+              <a:rPr lang="en-US" dirty="0"/>
+              <a:t>Difficult to choose appropriate distance metric, value of k</a:t>
+            </a:r>
+            <a:br>
+              <a:rPr lang="en-US" dirty="0"/>
+            </a:br>
+            <a:endParaRPr lang="en-US" dirty="0"/>
+          </a:p>
+          <a:p>
+            <a:r>
+              <a:rPr lang="en-US" dirty="0"/>
+              <a:t>More computationally expensive than other methods of imputation</a:t>
+            </a:r>
+            <a:br>
+              <a:rPr lang="en-US" dirty="0"/>
+            </a:br>
+            <a:endParaRPr lang="en-US" dirty="0"/>
+          </a:p>
+          <a:p>
+            <a:r>
+              <a:rPr lang="en-US" dirty="0"/>
+              <a:t>Requires entire training set to calculate imputed values for new examples</a:t>
+            </a:r>
+          </a:p>
+        </p:txBody>
+      </p:sp>
+    </p:spTree>
+    <p:extLst>
+      <p:ext uri="{BB962C8B-B14F-4D97-AF65-F5344CB8AC3E}">
+        <p14:creationId xmlns:p14="http://schemas.microsoft.com/office/powerpoint/2010/main" val="3729575760"/>
+      </p:ext>
+    </p:extLst>
+  </p:cSld>
+  <p:clrMapOvr>
+    <a:masterClrMapping/>
+  </p:clrMapOvr>
+  <p:timing>
+    <p:tnLst>
+      <p:par>
+        <p:cTn id="1" dur="indefinite" restart="never" nodeType="tmRoot">
+          <p:childTnLst>
+            <p:seq concurrent="1" nextAc="seek">
+              <p:cTn id="2" dur="indefinite" nodeType="mainSeq">
+                <p:childTnLst>
+                  <p:par>
+                    <p:cTn id="3" fill="hold">
+                      <p:stCondLst>
+                        <p:cond delay="indefinite"/>
+                      </p:stCondLst>
+                      <p:childTnLst>
+                        <p:par>
+                          <p:cTn id="4" fill="hold">
+                            <p:stCondLst>
+                              <p:cond delay="0"/>
+                            </p:stCondLst>
+                            <p:childTnLst>
+                              <p:par>
+                                <p:cTn id="5" presetID="1" presetClass="entr" presetSubtype="0" fill="hold" grpId="0" nodeType="clickEffect">
+                                  <p:stCondLst>
+                                    <p:cond delay="0"/>
+                                  </p:stCondLst>
+                                  <p:childTnLst>
+                                    <p:set>
+                                      <p:cBhvr>
+                                        <p:cTn id="6" dur="1" fill="hold">
+                                          <p:stCondLst>
+                                            <p:cond delay="0"/>
+                                          </p:stCondLst>
+                                        </p:cTn>
+                                        <p:tgtEl>
+                                          <p:spTgt spid="2"/>
+                                        </p:tgtEl>
+                                        <p:attrNameLst>
+                                          <p:attrName>style.visibility</p:attrName>
+                                        </p:attrNameLst>
+                                      </p:cBhvr>
+                                      <p:to>
+                                        <p:strVal val="visible"/>
+                                      </p:to>
+                                    </p:set>
+                                  </p:childTnLst>
+                                </p:cTn>
+                              </p:par>
+                            </p:childTnLst>
+                          </p:cTn>
+                        </p:par>
+                      </p:childTnLst>
+                    </p:cTn>
+                  </p:par>
+                </p:childTnLst>
+              </p:cTn>
+              <p:prevCondLst>
+                <p:cond evt="onPrev" delay="0">
+                  <p:tgtEl>
+                    <p:sldTgt/>
+                  </p:tgtEl>
+                </p:cond>
+              </p:prevCondLst>
+              <p:nextCondLst>
+                <p:cond evt="onNext" delay="0">
+                  <p:tgtEl>
+                    <p:sldTgt/>
+                  </p:tgtEl>
+                </p:cond>
+              </p:nextCondLst>
+            </p:seq>
+          </p:childTnLst>
+        </p:cTn>
+      </p:par>
+    </p:tnLst>
+    <p:bldLst>
+      <p:bldP spid="2" grpId="0"/>
+    </p:bldLst>
+  </p:timing>
+</p:sld>
+</file>
+
+<file path=ppt/slides/slide35.xml><?xml version="1.0" encoding="utf-8"?>
+<p:sld xmlns:a="http://schemas.openxmlformats.org/drawingml/2006/main" xmlns:r="http://schemas.openxmlformats.org/officeDocument/2006/relationships" xmlns:p="http://schemas.openxmlformats.org/presentationml/2006/main">
+  <p:cSld>
+    <p:spTree>
+      <p:nvGrpSpPr>
+        <p:cNvPr id="1" name=""/>
+        <p:cNvGrpSpPr/>
+        <p:nvPr/>
+      </p:nvGrpSpPr>
+      <p:grpSpPr>
+        <a:xfrm>
+          <a:off x="0" y="0"/>
+          <a:ext cx="0" cy="0"/>
+          <a:chOff x="0" y="0"/>
+          <a:chExt cx="0" cy="0"/>
+        </a:xfrm>
+      </p:grpSpPr>
+      <p:sp>
+        <p:nvSpPr>
+          <p:cNvPr id="3" name="Title 2"/>
+          <p:cNvSpPr>
+            <a:spLocks noGrp="1"/>
+          </p:cNvSpPr>
+          <p:nvPr>
+            <p:ph type="title"/>
+          </p:nvPr>
+        </p:nvSpPr>
+        <p:spPr/>
+        <p:txBody>
+          <a:bodyPr/>
+          <a:lstStyle/>
+          <a:p>
+            <a:r>
+              <a:rPr lang="en-US" dirty="0"/>
+              <a:t>Imputing – Multiple Imputation</a:t>
+            </a:r>
+          </a:p>
+        </p:txBody>
+      </p:sp>
+      <p:sp>
+        <p:nvSpPr>
+          <p:cNvPr id="2" name="Content Placeholder 1"/>
+          <p:cNvSpPr>
+            <a:spLocks noGrp="1"/>
+          </p:cNvSpPr>
+          <p:nvPr>
+            <p:ph type="body" idx="1"/>
+          </p:nvPr>
+        </p:nvSpPr>
+        <p:spPr/>
+        <p:txBody>
+          <a:bodyPr/>
+          <a:lstStyle/>
+          <a:p>
+            <a:r>
+              <a:rPr lang="en-US" dirty="0"/>
+              <a:t>Create multiple “complete” datasets with different values using different regression models</a:t>
+            </a:r>
+            <a:br>
+              <a:rPr lang="en-US" dirty="0"/>
+            </a:br>
+            <a:endParaRPr lang="en-US" dirty="0"/>
+          </a:p>
+          <a:p>
+            <a:r>
+              <a:rPr lang="en-US" dirty="0"/>
+              <a:t>Helps analyze sensitivity to handling of missing values</a:t>
+            </a:r>
+            <a:br>
+              <a:rPr lang="en-US" dirty="0"/>
+            </a:br>
+            <a:endParaRPr lang="en-US" dirty="0"/>
+          </a:p>
+          <a:p>
+            <a:r>
+              <a:rPr lang="en-US" dirty="0"/>
+              <a:t>Much more computationally expensive, both for imputation and downstream modeling</a:t>
+            </a:r>
+            <a:br>
+              <a:rPr lang="en-US" dirty="0"/>
+            </a:br>
+            <a:endParaRPr lang="en-US" dirty="0"/>
+          </a:p>
+          <a:p>
+            <a:r>
+              <a:rPr lang="en-US" dirty="0"/>
+              <a:t>Can provide better representation of variability in data</a:t>
+            </a:r>
+          </a:p>
+        </p:txBody>
+      </p:sp>
+    </p:spTree>
+    <p:extLst>
+      <p:ext uri="{BB962C8B-B14F-4D97-AF65-F5344CB8AC3E}">
+        <p14:creationId xmlns:p14="http://schemas.microsoft.com/office/powerpoint/2010/main" val="2069799902"/>
+      </p:ext>
+    </p:extLst>
+  </p:cSld>
+  <p:clrMapOvr>
+    <a:masterClrMapping/>
+  </p:clrMapOvr>
+  <p:timing>
+    <p:tnLst>
+      <p:par>
+        <p:cTn id="1" dur="indefinite" restart="never" nodeType="tmRoot">
+          <p:childTnLst>
+            <p:seq concurrent="1" nextAc="seek">
+              <p:cTn id="2" dur="indefinite" nodeType="mainSeq">
+                <p:childTnLst>
+                  <p:par>
+                    <p:cTn id="3" fill="hold">
+                      <p:stCondLst>
+                        <p:cond delay="indefinite"/>
+                      </p:stCondLst>
+                      <p:childTnLst>
+                        <p:par>
+                          <p:cTn id="4" fill="hold">
+                            <p:stCondLst>
+                              <p:cond delay="0"/>
+                            </p:stCondLst>
+                            <p:childTnLst>
+                              <p:par>
+                                <p:cTn id="5" presetID="1" presetClass="entr" presetSubtype="0" fill="hold" grpId="0" nodeType="clickEffect">
+                                  <p:stCondLst>
+                                    <p:cond delay="0"/>
+                                  </p:stCondLst>
+                                  <p:childTnLst>
+                                    <p:set>
+                                      <p:cBhvr>
+                                        <p:cTn id="6" dur="1" fill="hold">
+                                          <p:stCondLst>
+                                            <p:cond delay="0"/>
+                                          </p:stCondLst>
+                                        </p:cTn>
+                                        <p:tgtEl>
+                                          <p:spTgt spid="2"/>
+                                        </p:tgtEl>
+                                        <p:attrNameLst>
+                                          <p:attrName>style.visibility</p:attrName>
+                                        </p:attrNameLst>
+                                      </p:cBhvr>
+                                      <p:to>
+                                        <p:strVal val="visible"/>
+                                      </p:to>
+                                    </p:set>
+                                  </p:childTnLst>
+                                </p:cTn>
+                              </p:par>
+                            </p:childTnLst>
+                          </p:cTn>
+                        </p:par>
+                      </p:childTnLst>
+                    </p:cTn>
+                  </p:par>
+                </p:childTnLst>
+              </p:cTn>
+              <p:prevCondLst>
+                <p:cond evt="onPrev" delay="0">
+                  <p:tgtEl>
+                    <p:sldTgt/>
+                  </p:tgtEl>
+                </p:cond>
+              </p:prevCondLst>
+              <p:nextCondLst>
+                <p:cond evt="onNext" delay="0">
+                  <p:tgtEl>
+                    <p:sldTgt/>
+                  </p:tgtEl>
+                </p:cond>
+              </p:nextCondLst>
+            </p:seq>
+          </p:childTnLst>
+        </p:cTn>
+      </p:par>
+    </p:tnLst>
+    <p:bldLst>
+      <p:bldP spid="2" grpId="0"/>
+    </p:bldLst>
+  </p:timing>
+</p:sld>
+</file>
+
+<file path=ppt/slides/slide36.xml><?xml version="1.0" encoding="utf-8"?>
+<p:sld xmlns:a="http://schemas.openxmlformats.org/drawingml/2006/main" xmlns:r="http://schemas.openxmlformats.org/officeDocument/2006/relationships" xmlns:p="http://schemas.openxmlformats.org/presentationml/2006/main">
+  <p:cSld>
+    <p:spTree>
+      <p:nvGrpSpPr>
+        <p:cNvPr id="1" name=""/>
+        <p:cNvGrpSpPr/>
+        <p:nvPr/>
+      </p:nvGrpSpPr>
+      <p:grpSpPr>
+        <a:xfrm>
+          <a:off x="0" y="0"/>
+          <a:ext cx="0" cy="0"/>
+          <a:chOff x="0" y="0"/>
+          <a:chExt cx="0" cy="0"/>
+        </a:xfrm>
+      </p:grpSpPr>
+      <p:sp>
+        <p:nvSpPr>
           <p:cNvPr id="2" name="Title 1">
             <a:extLst>
               <a:ext uri="{FF2B5EF4-FFF2-40B4-BE49-F238E27FC236}">
@@ -14489,7 +15466,7 @@
 </p:sld>
 </file>
 
-<file path=ppt/slides/slide33.xml><?xml version="1.0" encoding="utf-8"?>
+<file path=ppt/slides/slide37.xml><?xml version="1.0" encoding="utf-8"?>
 <p:sld xmlns:a="http://schemas.openxmlformats.org/drawingml/2006/main" xmlns:r="http://schemas.openxmlformats.org/officeDocument/2006/relationships" xmlns:p="http://schemas.openxmlformats.org/presentationml/2006/main">
   <p:cSld>
     <p:spTree>
@@ -14572,7 +15549,7 @@
 </p:sld>
 </file>
 
-<file path=ppt/slides/slide34.xml><?xml version="1.0" encoding="utf-8"?>
+<file path=ppt/slides/slide38.xml><?xml version="1.0" encoding="utf-8"?>
 <p:sld xmlns:a="http://schemas.openxmlformats.org/drawingml/2006/main" xmlns:r="http://schemas.openxmlformats.org/officeDocument/2006/relationships" xmlns:p="http://schemas.openxmlformats.org/presentationml/2006/main">
   <p:cSld>
     <p:spTree>
@@ -16272,6 +17249,36 @@
     <a:masterClrMapping/>
   </p:clrMapOvr>
 </p:sld>
+</file>
+
+<file path=ppt/tags/tag1.xml><?xml version="1.0" encoding="utf-8"?>
+<p:tagLst xmlns:a="http://schemas.openxmlformats.org/drawingml/2006/main" xmlns:r="http://schemas.openxmlformats.org/officeDocument/2006/relationships" xmlns:p="http://schemas.openxmlformats.org/presentationml/2006/main">
+  <p:tag name="SLIDO_APP_VERSION" val="1.5.0.0"/>
+  <p:tag name="SLIDO_PRESENTATION_ID" val="11ead6e8-609d-4495-a0d3-07bf899fb75e"/>
+  <p:tag name="SLIDO_EVENT_UUID" val="0161bee7-9b52-48ab-bd01-308fc07c8a33"/>
+  <p:tag name="SLIDO_EVENT_SECTION_UUID" val="53f7b2fd-9b37-4ce9-89ff-a9a7d9b782ad"/>
+</p:tagLst>
+</file>
+
+<file path=ppt/tags/tag2.xml><?xml version="1.0" encoding="utf-8"?>
+<p:tagLst xmlns:a="http://schemas.openxmlformats.org/drawingml/2006/main" xmlns:r="http://schemas.openxmlformats.org/officeDocument/2006/relationships" xmlns:p="http://schemas.openxmlformats.org/presentationml/2006/main">
+  <p:tag name="SLIDO_TYPE" val="SlidoPoll"/>
+  <p:tag name="SLIDO_POLL_UUID" val="aa6a89c6-875e-4f7b-a267-78443e5fe7ca"/>
+  <p:tag name="SLIDO_TIMELINE" val="W3sicG9sbFF1ZXN0aW9uVXVpZCI6IjE2YzI3YTU2LTBiMzktNGQ4Ni05N2UwLTBjZmQyMTA2YzhlYyIsInNob3dSZXN1bHRzIjpmYWxzZX0seyJwb2xsUXVlc3Rpb25VdWlkIjoiMTZjMjdhNTYtMGIzOS00ZDg2LTk3ZTAtMGNmZDIxMDZjOGVjIiwic2hvd1Jlc3VsdHMiOnRydWV9XQ=="/>
+</p:tagLst>
+</file>
+
+<file path=ppt/tags/tag3.xml><?xml version="1.0" encoding="utf-8"?>
+<p:tagLst xmlns:a="http://schemas.openxmlformats.org/drawingml/2006/main" xmlns:r="http://schemas.openxmlformats.org/officeDocument/2006/relationships" xmlns:p="http://schemas.openxmlformats.org/presentationml/2006/main">
+  <p:tag name="SLIDO_ELEMENT" val="interaction_image"/>
+  <p:tag name="INTERACTION_TYPE" val="MultipleChoice"/>
+</p:tagLst>
+</file>
+
+<file path=ppt/tags/tag4.xml><?xml version="1.0" encoding="utf-8"?>
+<p:tagLst xmlns:a="http://schemas.openxmlformats.org/drawingml/2006/main" xmlns:r="http://schemas.openxmlformats.org/officeDocument/2006/relationships" xmlns:p="http://schemas.openxmlformats.org/presentationml/2006/main">
+  <p:tag name="SLIDO_ELEMENT" val="title"/>
+</p:tagLst>
 </file>
 
 <file path=ppt/theme/theme1.xml><?xml version="1.0" encoding="utf-8"?>

--- a/Lectures/Lecture7-Features.pptx
+++ b/Lectures/Lecture7-Features.pptx
@@ -5,52 +5,55 @@
     <p:sldMasterId id="2147483648" r:id="rId1"/>
   </p:sldMasterIdLst>
   <p:notesMasterIdLst>
-    <p:notesMasterId r:id="rId40"/>
+    <p:notesMasterId r:id="rId43"/>
   </p:notesMasterIdLst>
   <p:sldIdLst>
     <p:sldId id="256" r:id="rId2"/>
-    <p:sldId id="474" r:id="rId3"/>
-    <p:sldId id="282" r:id="rId4"/>
-    <p:sldId id="428" r:id="rId5"/>
-    <p:sldId id="475" r:id="rId6"/>
-    <p:sldId id="476" r:id="rId7"/>
-    <p:sldId id="477" r:id="rId8"/>
-    <p:sldId id="274" r:id="rId9"/>
-    <p:sldId id="309" r:id="rId10"/>
-    <p:sldId id="301" r:id="rId11"/>
-    <p:sldId id="303" r:id="rId12"/>
-    <p:sldId id="320" r:id="rId13"/>
-    <p:sldId id="295" r:id="rId14"/>
-    <p:sldId id="300" r:id="rId15"/>
-    <p:sldId id="479" r:id="rId16"/>
-    <p:sldId id="302" r:id="rId17"/>
-    <p:sldId id="304" r:id="rId18"/>
-    <p:sldId id="277" r:id="rId19"/>
-    <p:sldId id="478" r:id="rId20"/>
-    <p:sldId id="480" r:id="rId21"/>
-    <p:sldId id="321" r:id="rId22"/>
-    <p:sldId id="278" r:id="rId23"/>
-    <p:sldId id="280" r:id="rId24"/>
-    <p:sldId id="279" r:id="rId25"/>
-    <p:sldId id="306" r:id="rId26"/>
-    <p:sldId id="483" r:id="rId27"/>
-    <p:sldId id="484" r:id="rId28"/>
-    <p:sldId id="485" r:id="rId29"/>
-    <p:sldId id="486" r:id="rId30"/>
-    <p:sldId id="312" r:id="rId31"/>
-    <p:sldId id="313" r:id="rId32"/>
-    <p:sldId id="317" r:id="rId33"/>
-    <p:sldId id="314" r:id="rId34"/>
-    <p:sldId id="316" r:id="rId35"/>
-    <p:sldId id="315" r:id="rId36"/>
-    <p:sldId id="322" r:id="rId37"/>
-    <p:sldId id="473" r:id="rId38"/>
-    <p:sldId id="471" r:id="rId39"/>
+    <p:sldId id="488" r:id="rId3"/>
+    <p:sldId id="474" r:id="rId4"/>
+    <p:sldId id="282" r:id="rId5"/>
+    <p:sldId id="428" r:id="rId6"/>
+    <p:sldId id="475" r:id="rId7"/>
+    <p:sldId id="487" r:id="rId8"/>
+    <p:sldId id="476" r:id="rId9"/>
+    <p:sldId id="477" r:id="rId10"/>
+    <p:sldId id="274" r:id="rId11"/>
+    <p:sldId id="309" r:id="rId12"/>
+    <p:sldId id="301" r:id="rId13"/>
+    <p:sldId id="303" r:id="rId14"/>
+    <p:sldId id="320" r:id="rId15"/>
+    <p:sldId id="295" r:id="rId16"/>
+    <p:sldId id="300" r:id="rId17"/>
+    <p:sldId id="479" r:id="rId18"/>
+    <p:sldId id="302" r:id="rId19"/>
+    <p:sldId id="304" r:id="rId20"/>
+    <p:sldId id="277" r:id="rId21"/>
+    <p:sldId id="478" r:id="rId22"/>
+    <p:sldId id="480" r:id="rId23"/>
+    <p:sldId id="321" r:id="rId24"/>
+    <p:sldId id="278" r:id="rId25"/>
+    <p:sldId id="280" r:id="rId26"/>
+    <p:sldId id="279" r:id="rId27"/>
+    <p:sldId id="306" r:id="rId28"/>
+    <p:sldId id="483" r:id="rId29"/>
+    <p:sldId id="484" r:id="rId30"/>
+    <p:sldId id="485" r:id="rId31"/>
+    <p:sldId id="486" r:id="rId32"/>
+    <p:sldId id="312" r:id="rId33"/>
+    <p:sldId id="313" r:id="rId34"/>
+    <p:sldId id="317" r:id="rId35"/>
+    <p:sldId id="314" r:id="rId36"/>
+    <p:sldId id="316" r:id="rId37"/>
+    <p:sldId id="315" r:id="rId38"/>
+    <p:sldId id="322" r:id="rId39"/>
+    <p:sldId id="473" r:id="rId40"/>
+    <p:sldId id="489" r:id="rId41"/>
+    <p:sldId id="471" r:id="rId42"/>
   </p:sldIdLst>
   <p:sldSz cx="12192000" cy="6858000"/>
   <p:notesSz cx="6858000" cy="9144000"/>
   <p:custDataLst>
-    <p:tags r:id="rId41"/>
+    <p:tags r:id="rId44"/>
   </p:custDataLst>
   <p:defaultTextStyle>
     <a:defPPr marR="0" lvl="0" algn="l" rtl="0">
@@ -286,7 +289,7 @@
       <p15:sldGuideLst xmlns:p15="http://schemas.microsoft.com/office/powerpoint/2012/main"/>
     </p:ext>
     <p:ext uri="http://customooxmlschemas.google.com/">
-      <go:slidesCustomData xmlns:go="http://customooxmlschemas.google.com/" xmlns:p15="http://schemas.microsoft.com/office/powerpoint/2012/main" xmlns:p14="http://schemas.microsoft.com/office/powerpoint/2010/main" xmlns:com="http://schemas.openxmlformats.org/drawingml/2006/compatibility" xmlns:pvml="urn:schemas-microsoft-com:office:powerpoint" xmlns:v="urn:schemas-microsoft-com:vml" xmlns:o="urn:schemas-microsoft-com:office:office" xmlns:dgm="http://schemas.openxmlformats.org/drawingml/2006/diagram" xmlns:c="http://schemas.openxmlformats.org/drawingml/2006/chart" xmlns:mv="urn:schemas-microsoft-com:mac:vml" xmlns:mc="http://schemas.openxmlformats.org/markup-compatibility/2006" xmlns="" r:id="rId42" roundtripDataSignature="AMtx7mjFyVUGRZWio+dc9dxzYsimUxNJbg=="/>
+      <go:slidesCustomData xmlns:go="http://customooxmlschemas.google.com/" xmlns:p15="http://schemas.microsoft.com/office/powerpoint/2012/main" xmlns:p14="http://schemas.microsoft.com/office/powerpoint/2010/main" xmlns:com="http://schemas.openxmlformats.org/drawingml/2006/compatibility" xmlns:pvml="urn:schemas-microsoft-com:office:powerpoint" xmlns:v="urn:schemas-microsoft-com:vml" xmlns:o="urn:schemas-microsoft-com:office:office" xmlns:dgm="http://schemas.openxmlformats.org/drawingml/2006/diagram" xmlns:c="http://schemas.openxmlformats.org/drawingml/2006/chart" xmlns:mv="urn:schemas-microsoft-com:mac:vml" xmlns:mc="http://schemas.openxmlformats.org/markup-compatibility/2006" xmlns="" r:id="rId45" roundtripDataSignature="AMtx7mjFyVUGRZWio+dc9dxzYsimUxNJbg=="/>
     </p:ext>
   </p:extLst>
 </p:presentation>
@@ -4567,7 +4570,7 @@
           <a:p>
             <a:fld id="{87916DAE-669F-3546-9A68-DB1260F5EB98}" type="slidenum">
               <a:rPr lang="en-US" smtClean="0"/>
-              <a:t>8</a:t>
+              <a:t>10</a:t>
             </a:fld>
             <a:endParaRPr lang="en-US"/>
           </a:p>
@@ -4651,7 +4654,7 @@
           <a:p>
             <a:fld id="{87916DAE-669F-3546-9A68-DB1260F5EB98}" type="slidenum">
               <a:rPr lang="en-US" smtClean="0"/>
-              <a:t>9</a:t>
+              <a:t>11</a:t>
             </a:fld>
             <a:endParaRPr lang="en-US"/>
           </a:p>
@@ -4752,7 +4755,7 @@
                 <a:cs typeface="Calibri"/>
                 <a:sym typeface="Calibri"/>
               </a:rPr>
-              <a:t>19</a:t>
+              <a:t>21</a:t>
             </a:fld>
             <a:endParaRPr lang="en-US" sz="1200" b="0" i="0" u="none" strike="noStrike" cap="none">
               <a:solidFill>
@@ -4770,6 +4773,217 @@
     <p:extLst>
       <p:ext uri="{BB962C8B-B14F-4D97-AF65-F5344CB8AC3E}">
         <p14:creationId xmlns:p14="http://schemas.microsoft.com/office/powerpoint/2010/main" val="3786010250"/>
+      </p:ext>
+    </p:extLst>
+  </p:cSld>
+  <p:clrMapOvr>
+    <a:masterClrMapping/>
+  </p:clrMapOvr>
+</p:notes>
+</file>
+
+<file path=ppt/notesSlides/notesSlide5.xml><?xml version="1.0" encoding="utf-8"?>
+<p:notes xmlns:a="http://schemas.openxmlformats.org/drawingml/2006/main" xmlns:r="http://schemas.openxmlformats.org/officeDocument/2006/relationships" xmlns:p="http://schemas.openxmlformats.org/presentationml/2006/main">
+  <p:cSld>
+    <p:spTree>
+      <p:nvGrpSpPr>
+        <p:cNvPr id="1" name=""/>
+        <p:cNvGrpSpPr/>
+        <p:nvPr/>
+      </p:nvGrpSpPr>
+      <p:grpSpPr>
+        <a:xfrm>
+          <a:off x="0" y="0"/>
+          <a:ext cx="0" cy="0"/>
+          <a:chOff x="0" y="0"/>
+          <a:chExt cx="0" cy="0"/>
+        </a:xfrm>
+      </p:grpSpPr>
+      <p:sp>
+        <p:nvSpPr>
+          <p:cNvPr id="2" name="Slide Image Placeholder 1"/>
+          <p:cNvSpPr>
+            <a:spLocks noGrp="1" noRot="1" noChangeAspect="1"/>
+          </p:cNvSpPr>
+          <p:nvPr>
+            <p:ph type="sldImg"/>
+          </p:nvPr>
+        </p:nvSpPr>
+        <p:spPr/>
+      </p:sp>
+      <p:sp>
+        <p:nvSpPr>
+          <p:cNvPr id="3" name="Notes Placeholder 2"/>
+          <p:cNvSpPr>
+            <a:spLocks noGrp="1"/>
+          </p:cNvSpPr>
+          <p:nvPr>
+            <p:ph type="body" idx="1"/>
+          </p:nvPr>
+        </p:nvSpPr>
+        <p:spPr/>
+        <p:txBody>
+          <a:bodyPr/>
+          <a:lstStyle/>
+          <a:p>
+            <a:r>
+              <a:rPr lang="en-US" sz="1200" b="0" i="0" u="none" strike="noStrike" cap="none" dirty="0">
+                <a:solidFill>
+                  <a:schemeClr val="dk1"/>
+                </a:solidFill>
+                <a:effectLst/>
+                <a:latin typeface="Calibri"/>
+                <a:ea typeface="Calibri"/>
+                <a:cs typeface="Calibri"/>
+                <a:sym typeface="Calibri"/>
+              </a:rPr>
+              <a:t>MCAR each member has the same chance of being included in the sample</a:t>
+            </a:r>
+          </a:p>
+          <a:p>
+            <a:endParaRPr lang="en-US" sz="1200" b="0" i="0" u="none" strike="noStrike" cap="none" dirty="0">
+              <a:solidFill>
+                <a:schemeClr val="dk1"/>
+              </a:solidFill>
+              <a:effectLst/>
+              <a:latin typeface="Calibri"/>
+              <a:cs typeface="Calibri"/>
+              <a:sym typeface="Calibri"/>
+            </a:endParaRPr>
+          </a:p>
+          <a:p>
+            <a:r>
+              <a:rPr lang="en-US" sz="1200" b="0" i="0" u="none" strike="noStrike" cap="none" dirty="0">
+                <a:solidFill>
+                  <a:schemeClr val="dk1"/>
+                </a:solidFill>
+                <a:effectLst/>
+                <a:latin typeface="Calibri"/>
+                <a:ea typeface="Calibri"/>
+                <a:cs typeface="Calibri"/>
+                <a:sym typeface="Calibri"/>
+              </a:rPr>
+              <a:t>If the probability of being missing is the same only within groups defined by the </a:t>
+            </a:r>
+            <a:r>
+              <a:rPr lang="en-US" sz="1200" b="0" i="1" u="none" strike="noStrike" cap="none" dirty="0">
+                <a:solidFill>
+                  <a:schemeClr val="dk1"/>
+                </a:solidFill>
+                <a:effectLst/>
+                <a:latin typeface="Calibri"/>
+                <a:ea typeface="Calibri"/>
+                <a:cs typeface="Calibri"/>
+                <a:sym typeface="Calibri"/>
+              </a:rPr>
+              <a:t>observed</a:t>
+            </a:r>
+            <a:r>
+              <a:rPr lang="en-US" sz="1200" b="0" i="0" u="none" strike="noStrike" cap="none" dirty="0">
+                <a:solidFill>
+                  <a:schemeClr val="dk1"/>
+                </a:solidFill>
+                <a:effectLst/>
+                <a:latin typeface="Calibri"/>
+                <a:ea typeface="Calibri"/>
+                <a:cs typeface="Calibri"/>
+                <a:sym typeface="Calibri"/>
+              </a:rPr>
+              <a:t> data, then the data are missing at random (MAR). when we take a sample from a population, where the probability to be included depends on some known property. </a:t>
+            </a:r>
+          </a:p>
+          <a:p>
+            <a:endParaRPr lang="en-US" sz="1200" b="0" i="0" u="none" strike="noStrike" cap="none" dirty="0">
+              <a:solidFill>
+                <a:schemeClr val="dk1"/>
+              </a:solidFill>
+              <a:effectLst/>
+              <a:latin typeface="Calibri"/>
+              <a:cs typeface="Calibri"/>
+              <a:sym typeface="Calibri"/>
+            </a:endParaRPr>
+          </a:p>
+          <a:p>
+            <a:endParaRPr lang="en-US" sz="1200" b="0" i="0" u="none" strike="noStrike" cap="none" dirty="0">
+              <a:solidFill>
+                <a:schemeClr val="dk1"/>
+              </a:solidFill>
+              <a:effectLst/>
+              <a:latin typeface="Calibri"/>
+              <a:cs typeface="Calibri"/>
+              <a:sym typeface="Calibri"/>
+            </a:endParaRPr>
+          </a:p>
+          <a:p>
+            <a:r>
+              <a:rPr lang="en-US" sz="1200" b="0" i="0" u="none" strike="noStrike" cap="none" dirty="0">
+                <a:solidFill>
+                  <a:schemeClr val="dk1"/>
+                </a:solidFill>
+                <a:effectLst/>
+                <a:latin typeface="Calibri"/>
+                <a:ea typeface="Calibri"/>
+                <a:cs typeface="Calibri"/>
+                <a:sym typeface="Calibri"/>
+              </a:rPr>
+              <a:t>probability of being missing varies for reasons that are unknown to us - politics</a:t>
+            </a:r>
+            <a:endParaRPr lang="en-US" dirty="0"/>
+          </a:p>
+        </p:txBody>
+      </p:sp>
+      <p:sp>
+        <p:nvSpPr>
+          <p:cNvPr id="4" name="Slide Number Placeholder 3"/>
+          <p:cNvSpPr>
+            <a:spLocks noGrp="1"/>
+          </p:cNvSpPr>
+          <p:nvPr>
+            <p:ph type="sldNum" idx="12"/>
+          </p:nvPr>
+        </p:nvSpPr>
+        <p:spPr/>
+        <p:txBody>
+          <a:bodyPr/>
+          <a:lstStyle/>
+          <a:p>
+            <a:pPr marL="0" marR="0" lvl="0" indent="0" algn="r" rtl="0">
+              <a:spcBef>
+                <a:spcPts val="0"/>
+              </a:spcBef>
+              <a:spcAft>
+                <a:spcPts val="0"/>
+              </a:spcAft>
+              <a:buNone/>
+            </a:pPr>
+            <a:fld id="{00000000-1234-1234-1234-123412341234}" type="slidenum">
+              <a:rPr lang="en-US" sz="1200" b="0" i="0" u="none" strike="noStrike" cap="none" smtClean="0">
+                <a:solidFill>
+                  <a:schemeClr val="dk1"/>
+                </a:solidFill>
+                <a:latin typeface="Calibri"/>
+                <a:ea typeface="Calibri"/>
+                <a:cs typeface="Calibri"/>
+                <a:sym typeface="Calibri"/>
+              </a:rPr>
+              <a:t>29</a:t>
+            </a:fld>
+            <a:endParaRPr lang="en-US" sz="1200" b="0" i="0" u="none" strike="noStrike" cap="none">
+              <a:solidFill>
+                <a:schemeClr val="dk1"/>
+              </a:solidFill>
+              <a:latin typeface="Calibri"/>
+              <a:ea typeface="Calibri"/>
+              <a:cs typeface="Calibri"/>
+              <a:sym typeface="Calibri"/>
+            </a:endParaRPr>
+          </a:p>
+        </p:txBody>
+      </p:sp>
+    </p:spTree>
+    <p:extLst>
+      <p:ext uri="{BB962C8B-B14F-4D97-AF65-F5344CB8AC3E}">
+        <p14:creationId xmlns:p14="http://schemas.microsoft.com/office/powerpoint/2010/main" val="3517981116"/>
       </p:ext>
     </p:extLst>
   </p:cSld>
@@ -10376,6 +10590,229 @@
             <p:ph type="title"/>
           </p:nvPr>
         </p:nvSpPr>
+        <p:spPr/>
+        <p:txBody>
+          <a:bodyPr/>
+          <a:lstStyle/>
+          <a:p>
+            <a:r>
+              <a:rPr lang="en-US" dirty="0"/>
+              <a:t>Why do we care?</a:t>
+            </a:r>
+          </a:p>
+        </p:txBody>
+      </p:sp>
+      <p:sp>
+        <p:nvSpPr>
+          <p:cNvPr id="2" name="Content Placeholder 1"/>
+          <p:cNvSpPr>
+            <a:spLocks noGrp="1"/>
+          </p:cNvSpPr>
+          <p:nvPr>
+            <p:ph type="body" idx="1"/>
+          </p:nvPr>
+        </p:nvSpPr>
+        <p:spPr/>
+        <p:txBody>
+          <a:bodyPr>
+            <a:normAutofit/>
+          </a:bodyPr>
+          <a:lstStyle/>
+          <a:p>
+            <a:r>
+              <a:rPr lang="en-US" dirty="0"/>
+              <a:t>Features are hints/rules of thumb you give your model</a:t>
+            </a:r>
+          </a:p>
+          <a:p>
+            <a:pPr lvl="1"/>
+            <a:r>
+              <a:rPr lang="en-US" sz="2000" dirty="0"/>
+              <a:t>Encoding domain knowledge and context for the model to use</a:t>
+            </a:r>
+          </a:p>
+          <a:p>
+            <a:endParaRPr lang="en-US" dirty="0"/>
+          </a:p>
+          <a:p>
+            <a:r>
+              <a:rPr lang="en-US" dirty="0"/>
+              <a:t>Feature generation is a critical part of the machine learning modeling process, especially with structured data.</a:t>
+            </a:r>
+          </a:p>
+          <a:p>
+            <a:endParaRPr lang="en-US" dirty="0"/>
+          </a:p>
+          <a:p>
+            <a:r>
+              <a:rPr lang="en-US" dirty="0"/>
+              <a:t>Complexity in features may allow us to use less complex models that are faster to run, easier to understand and easier to maintain.</a:t>
+            </a:r>
+          </a:p>
+          <a:p>
+            <a:endParaRPr lang="en-US" dirty="0"/>
+          </a:p>
+          <a:p>
+            <a:endParaRPr lang="en-US" dirty="0"/>
+          </a:p>
+        </p:txBody>
+      </p:sp>
+    </p:spTree>
+    <p:extLst>
+      <p:ext uri="{BB962C8B-B14F-4D97-AF65-F5344CB8AC3E}">
+        <p14:creationId xmlns:p14="http://schemas.microsoft.com/office/powerpoint/2010/main" val="837826461"/>
+      </p:ext>
+    </p:extLst>
+  </p:cSld>
+  <p:clrMapOvr>
+    <a:masterClrMapping/>
+  </p:clrMapOvr>
+</p:sld>
+</file>
+
+<file path=ppt/slides/slide11.xml><?xml version="1.0" encoding="utf-8"?>
+<p:sld xmlns:a="http://schemas.openxmlformats.org/drawingml/2006/main" xmlns:r="http://schemas.openxmlformats.org/officeDocument/2006/relationships" xmlns:p="http://schemas.openxmlformats.org/presentationml/2006/main">
+  <p:cSld>
+    <p:spTree>
+      <p:nvGrpSpPr>
+        <p:cNvPr id="1" name=""/>
+        <p:cNvGrpSpPr/>
+        <p:nvPr/>
+      </p:nvGrpSpPr>
+      <p:grpSpPr>
+        <a:xfrm>
+          <a:off x="0" y="0"/>
+          <a:ext cx="0" cy="0"/>
+          <a:chOff x="0" y="0"/>
+          <a:chExt cx="0" cy="0"/>
+        </a:xfrm>
+      </p:grpSpPr>
+      <p:sp>
+        <p:nvSpPr>
+          <p:cNvPr id="3" name="Title 2"/>
+          <p:cNvSpPr>
+            <a:spLocks noGrp="1"/>
+          </p:cNvSpPr>
+          <p:nvPr>
+            <p:ph type="title"/>
+          </p:nvPr>
+        </p:nvSpPr>
+        <p:spPr/>
+        <p:txBody>
+          <a:bodyPr/>
+          <a:lstStyle/>
+          <a:p>
+            <a:r>
+              <a:rPr lang="en-US" dirty="0"/>
+              <a:t>Practical Pointers</a:t>
+            </a:r>
+          </a:p>
+        </p:txBody>
+      </p:sp>
+      <p:sp>
+        <p:nvSpPr>
+          <p:cNvPr id="2" name="Content Placeholder 1"/>
+          <p:cNvSpPr>
+            <a:spLocks noGrp="1"/>
+          </p:cNvSpPr>
+          <p:nvPr>
+            <p:ph type="body" idx="1"/>
+          </p:nvPr>
+        </p:nvSpPr>
+        <p:spPr/>
+        <p:txBody>
+          <a:bodyPr>
+            <a:normAutofit/>
+          </a:bodyPr>
+          <a:lstStyle/>
+          <a:p>
+            <a:r>
+              <a:rPr lang="en-US" dirty="0"/>
+              <a:t>When generating a feature, what did you know and </a:t>
+            </a:r>
+            <a:r>
+              <a:rPr lang="en-US" b="1" u="sng" dirty="0"/>
+              <a:t>when</a:t>
+            </a:r>
+            <a:r>
+              <a:rPr lang="en-US" dirty="0"/>
+              <a:t> did you know it?</a:t>
+            </a:r>
+          </a:p>
+          <a:p>
+            <a:pPr lvl="1"/>
+            <a:r>
+              <a:rPr lang="en-US" dirty="0"/>
+              <a:t>You can only create features from information available </a:t>
+            </a:r>
+            <a:r>
+              <a:rPr lang="en-US" sz="3200" b="1" dirty="0">
+                <a:solidFill>
+                  <a:srgbClr val="FF0000"/>
+                </a:solidFill>
+              </a:rPr>
+              <a:t>before</a:t>
+            </a:r>
+            <a:r>
+              <a:rPr lang="en-US" dirty="0"/>
+              <a:t> the “training” date for a given row</a:t>
+            </a:r>
+            <a:br>
+              <a:rPr lang="en-US" dirty="0"/>
+            </a:br>
+            <a:endParaRPr lang="en-US" dirty="0"/>
+          </a:p>
+          <a:p>
+            <a:r>
+              <a:rPr lang="en-US" dirty="0"/>
+              <a:t>Domain/expert knowledge and prior research in the field can help a lot!</a:t>
+            </a:r>
+          </a:p>
+          <a:p>
+            <a:endParaRPr lang="en-US" dirty="0"/>
+          </a:p>
+        </p:txBody>
+      </p:sp>
+    </p:spTree>
+    <p:extLst>
+      <p:ext uri="{BB962C8B-B14F-4D97-AF65-F5344CB8AC3E}">
+        <p14:creationId xmlns:p14="http://schemas.microsoft.com/office/powerpoint/2010/main" val="4045032903"/>
+      </p:ext>
+    </p:extLst>
+  </p:cSld>
+  <p:clrMapOvr>
+    <a:masterClrMapping/>
+  </p:clrMapOvr>
+</p:sld>
+</file>
+
+<file path=ppt/slides/slide12.xml><?xml version="1.0" encoding="utf-8"?>
+<p:sld xmlns:a="http://schemas.openxmlformats.org/drawingml/2006/main" xmlns:r="http://schemas.openxmlformats.org/officeDocument/2006/relationships" xmlns:p="http://schemas.openxmlformats.org/presentationml/2006/main">
+  <p:cSld>
+    <p:spTree>
+      <p:nvGrpSpPr>
+        <p:cNvPr id="1" name=""/>
+        <p:cNvGrpSpPr/>
+        <p:nvPr/>
+      </p:nvGrpSpPr>
+      <p:grpSpPr>
+        <a:xfrm>
+          <a:off x="0" y="0"/>
+          <a:ext cx="0" cy="0"/>
+          <a:chOff x="0" y="0"/>
+          <a:chExt cx="0" cy="0"/>
+        </a:xfrm>
+      </p:grpSpPr>
+      <p:sp>
+        <p:nvSpPr>
+          <p:cNvPr id="3" name="Title 2"/>
+          <p:cNvSpPr>
+            <a:spLocks noGrp="1"/>
+          </p:cNvSpPr>
+          <p:nvPr>
+            <p:ph type="title"/>
+          </p:nvPr>
+        </p:nvSpPr>
         <p:spPr>
           <a:xfrm>
             <a:off x="415600" y="86585"/>
@@ -10478,7 +10915,7 @@
 </p:sld>
 </file>
 
-<file path=ppt/slides/slide11.xml><?xml version="1.0" encoding="utf-8"?>
+<file path=ppt/slides/slide13.xml><?xml version="1.0" encoding="utf-8"?>
 <p:sld xmlns:a="http://schemas.openxmlformats.org/drawingml/2006/main" xmlns:r="http://schemas.openxmlformats.org/officeDocument/2006/relationships" xmlns:p="http://schemas.openxmlformats.org/presentationml/2006/main">
   <p:cSld>
     <p:spTree>
@@ -10584,7 +11021,7 @@
 </p:sld>
 </file>
 
-<file path=ppt/slides/slide12.xml><?xml version="1.0" encoding="utf-8"?>
+<file path=ppt/slides/slide14.xml><?xml version="1.0" encoding="utf-8"?>
 <p:sld xmlns:a="http://schemas.openxmlformats.org/drawingml/2006/main" xmlns:r="http://schemas.openxmlformats.org/officeDocument/2006/relationships" xmlns:p="http://schemas.openxmlformats.org/presentationml/2006/main">
   <p:cSld>
     <p:spTree>
@@ -10766,7 +11203,7 @@
 </p:sld>
 </file>
 
-<file path=ppt/slides/slide13.xml><?xml version="1.0" encoding="utf-8"?>
+<file path=ppt/slides/slide15.xml><?xml version="1.0" encoding="utf-8"?>
 <p:sld xmlns:a="http://schemas.openxmlformats.org/drawingml/2006/main" xmlns:r="http://schemas.openxmlformats.org/officeDocument/2006/relationships" xmlns:p="http://schemas.openxmlformats.org/presentationml/2006/main">
   <p:cSld>
     <p:spTree>
@@ -10876,7 +11313,7 @@
 </p:sld>
 </file>
 
-<file path=ppt/slides/slide14.xml><?xml version="1.0" encoding="utf-8"?>
+<file path=ppt/slides/slide16.xml><?xml version="1.0" encoding="utf-8"?>
 <p:sld xmlns:a="http://schemas.openxmlformats.org/drawingml/2006/main" xmlns:r="http://schemas.openxmlformats.org/officeDocument/2006/relationships" xmlns:p="http://schemas.openxmlformats.org/presentationml/2006/main">
   <p:cSld>
     <p:spTree>
@@ -11284,7 +11721,7 @@
 </p:sld>
 </file>
 
-<file path=ppt/slides/slide15.xml><?xml version="1.0" encoding="utf-8"?>
+<file path=ppt/slides/slide17.xml><?xml version="1.0" encoding="utf-8"?>
 <p:sld xmlns:a="http://schemas.openxmlformats.org/drawingml/2006/main" xmlns:r="http://schemas.openxmlformats.org/officeDocument/2006/relationships" xmlns:p="http://schemas.openxmlformats.org/presentationml/2006/main">
   <p:cSld>
     <p:spTree>
@@ -11416,7 +11853,7 @@
 </p:sld>
 </file>
 
-<file path=ppt/slides/slide16.xml><?xml version="1.0" encoding="utf-8"?>
+<file path=ppt/slides/slide18.xml><?xml version="1.0" encoding="utf-8"?>
 <p:sld xmlns:a="http://schemas.openxmlformats.org/drawingml/2006/main" xmlns:r="http://schemas.openxmlformats.org/officeDocument/2006/relationships" xmlns:p="http://schemas.openxmlformats.org/presentationml/2006/main">
   <p:cSld>
     <p:spTree>
@@ -11513,7 +11950,7 @@
 </p:sld>
 </file>
 
-<file path=ppt/slides/slide17.xml><?xml version="1.0" encoding="utf-8"?>
+<file path=ppt/slides/slide19.xml><?xml version="1.0" encoding="utf-8"?>
 <p:sld xmlns:a="http://schemas.openxmlformats.org/drawingml/2006/main" xmlns:r="http://schemas.openxmlformats.org/officeDocument/2006/relationships" xmlns:p="http://schemas.openxmlformats.org/presentationml/2006/main">
   <p:cSld>
     <p:spTree>
@@ -11805,7 +12242,532 @@
 </p:sld>
 </file>
 
-<file path=ppt/slides/slide18.xml><?xml version="1.0" encoding="utf-8"?>
+<file path=ppt/slides/slide2.xml><?xml version="1.0" encoding="utf-8"?>
+<p:sld xmlns:a="http://schemas.openxmlformats.org/drawingml/2006/main" xmlns:r="http://schemas.openxmlformats.org/officeDocument/2006/relationships" xmlns:p="http://schemas.openxmlformats.org/presentationml/2006/main" showMasterSp="0">
+  <p:cSld>
+    <p:bg>
+      <p:bgPr>
+        <a:solidFill>
+          <a:srgbClr val="FFFFFF"/>
+        </a:solidFill>
+        <a:effectLst/>
+      </p:bgPr>
+    </p:bg>
+    <p:spTree>
+      <p:nvGrpSpPr>
+        <p:cNvPr id="1" name=""/>
+        <p:cNvGrpSpPr/>
+        <p:nvPr/>
+      </p:nvGrpSpPr>
+      <p:grpSpPr>
+        <a:xfrm>
+          <a:off x="0" y="0"/>
+          <a:ext cx="0" cy="0"/>
+          <a:chOff x="0" y="0"/>
+          <a:chExt cx="0" cy="0"/>
+        </a:xfrm>
+      </p:grpSpPr>
+      <p:sp>
+        <p:nvSpPr>
+          <p:cNvPr id="2" name="Rectangle 1">
+            <a:extLst>
+              <a:ext uri="{FF2B5EF4-FFF2-40B4-BE49-F238E27FC236}">
+                <a16:creationId xmlns:a16="http://schemas.microsoft.com/office/drawing/2014/main" id="{719D5240-BF62-2B17-8161-97252FB97DA7}"/>
+              </a:ext>
+            </a:extLst>
+          </p:cNvPr>
+          <p:cNvSpPr/>
+          <p:nvPr>
+            <p:custDataLst>
+              <p:tags r:id="rId2"/>
+            </p:custDataLst>
+          </p:nvPr>
+        </p:nvSpPr>
+        <p:spPr>
+          <a:xfrm>
+            <a:off x="444693" y="1742703"/>
+            <a:ext cx="2371696" cy="2371696"/>
+          </a:xfrm>
+          <a:prstGeom prst="rect">
+            <a:avLst/>
+          </a:prstGeom>
+          <a:blipFill>
+            <a:blip r:embed="rId5">
+              <a:extLst>
+                <a:ext uri="{96DAC541-7B7A-43D3-8B79-37D633B846F1}">
+                  <asvg:svgBlip xmlns:asvg="http://schemas.microsoft.com/office/drawing/2016/SVG/main" r:embed="rId6"/>
+                </a:ext>
+              </a:extLst>
+            </a:blip>
+            <a:stretch>
+              <a:fillRect/>
+            </a:stretch>
+          </a:blipFill>
+          <a:ln>
+            <a:solidFill>
+              <a:srgbClr val="FFFFFF"/>
+            </a:solidFill>
+          </a:ln>
+        </p:spPr>
+        <p:style>
+          <a:lnRef idx="2">
+            <a:schemeClr val="accent1">
+              <a:shade val="15000"/>
+            </a:schemeClr>
+          </a:lnRef>
+          <a:fillRef idx="1">
+            <a:schemeClr val="accent1"/>
+          </a:fillRef>
+          <a:effectRef idx="0">
+            <a:schemeClr val="accent1"/>
+          </a:effectRef>
+          <a:fontRef idx="minor">
+            <a:schemeClr val="lt1"/>
+          </a:fontRef>
+        </p:style>
+        <p:txBody>
+          <a:bodyPr rtlCol="0" anchor="ctr"/>
+          <a:lstStyle/>
+          <a:p>
+            <a:pPr algn="ctr"/>
+            <a:endParaRPr lang="en-US"/>
+          </a:p>
+        </p:txBody>
+      </p:sp>
+      <p:sp>
+        <p:nvSpPr>
+          <p:cNvPr id="3" name="Rectangle 2">
+            <a:extLst>
+              <a:ext uri="{FF2B5EF4-FFF2-40B4-BE49-F238E27FC236}">
+                <a16:creationId xmlns:a16="http://schemas.microsoft.com/office/drawing/2014/main" id="{1B7E063A-5C5D-C2EC-944E-16EFF9EEF3BB}"/>
+              </a:ext>
+            </a:extLst>
+          </p:cNvPr>
+          <p:cNvSpPr/>
+          <p:nvPr>
+            <p:custDataLst>
+              <p:tags r:id="rId3"/>
+            </p:custDataLst>
+          </p:nvPr>
+        </p:nvSpPr>
+        <p:spPr>
+          <a:xfrm>
+            <a:off x="3112851" y="1000897"/>
+            <a:ext cx="8486226" cy="3855308"/>
+          </a:xfrm>
+          <a:prstGeom prst="rect">
+            <a:avLst/>
+          </a:prstGeom>
+          <a:noFill/>
+          <a:ln w="25400" cap="flat" cmpd="sng" algn="ctr">
+            <a:solidFill>
+              <a:srgbClr val="FFFFFF"/>
+            </a:solidFill>
+            <a:prstDash val="solid"/>
+          </a:ln>
+          <a:effectLst/>
+          <a:extLst>
+            <a:ext uri="{909E8E84-426E-40DD-AFC4-6F175D3DCCD1}">
+              <a14:hiddenFill xmlns:a14="http://schemas.microsoft.com/office/drawing/2010/main">
+                <a:solidFill>
+                  <a:schemeClr val="accent1"/>
+                </a:solidFill>
+              </a14:hiddenFill>
+            </a:ext>
+          </a:extLst>
+        </p:spPr>
+        <p:style>
+          <a:lnRef idx="2">
+            <a:schemeClr val="accent1">
+              <a:shade val="15000"/>
+            </a:schemeClr>
+          </a:lnRef>
+          <a:fillRef idx="1">
+            <a:schemeClr val="accent1"/>
+          </a:fillRef>
+          <a:effectRef idx="0">
+            <a:schemeClr val="accent1"/>
+          </a:effectRef>
+          <a:fontRef idx="minor">
+            <a:schemeClr val="lt1"/>
+          </a:fontRef>
+        </p:style>
+        <p:txBody>
+          <a:bodyPr rtlCol="0" anchor="ctr"/>
+          <a:lstStyle/>
+          <a:p>
+            <a:r>
+              <a:rPr lang="en-US" sz="4000" b="1">
+                <a:solidFill>
+                  <a:srgbClr val="000000"/>
+                </a:solidFill>
+              </a:rPr>
+              <a:t>How is teamwork going?</a:t>
+            </a:r>
+          </a:p>
+        </p:txBody>
+      </p:sp>
+      <p:sp>
+        <p:nvSpPr>
+          <p:cNvPr id="4" name="Rectangle 3">
+            <a:extLst>
+              <a:ext uri="{FF2B5EF4-FFF2-40B4-BE49-F238E27FC236}">
+                <a16:creationId xmlns:a16="http://schemas.microsoft.com/office/drawing/2014/main" id="{F8A8CC75-C426-1653-1033-7F3C959BFFA9}"/>
+              </a:ext>
+            </a:extLst>
+          </p:cNvPr>
+          <p:cNvSpPr/>
+          <p:nvPr/>
+        </p:nvSpPr>
+        <p:spPr>
+          <a:xfrm>
+            <a:off x="0" y="5820032"/>
+            <a:ext cx="12192001" cy="1037968"/>
+          </a:xfrm>
+          <a:prstGeom prst="rect">
+            <a:avLst/>
+          </a:prstGeom>
+          <a:solidFill>
+            <a:srgbClr val="198038"/>
+          </a:solidFill>
+          <a:ln w="25400" cap="flat" cmpd="sng" algn="ctr">
+            <a:noFill/>
+            <a:prstDash val="solid"/>
+          </a:ln>
+          <a:effectLst/>
+          <a:extLst>
+            <a:ext uri="{91240B29-F687-4F45-9708-019B960494DF}">
+              <a14:hiddenLine xmlns:a14="http://schemas.microsoft.com/office/drawing/2010/main" w="25400" cap="flat" cmpd="sng" algn="ctr">
+                <a:solidFill>
+                  <a:schemeClr val="accent1">
+                    <a:shade val="15000"/>
+                  </a:schemeClr>
+                </a:solidFill>
+                <a:prstDash val="solid"/>
+              </a14:hiddenLine>
+            </a:ext>
+          </a:extLst>
+        </p:spPr>
+        <p:style>
+          <a:lnRef idx="2">
+            <a:schemeClr val="accent1">
+              <a:shade val="15000"/>
+            </a:schemeClr>
+          </a:lnRef>
+          <a:fillRef idx="1">
+            <a:schemeClr val="accent1"/>
+          </a:fillRef>
+          <a:effectRef idx="0">
+            <a:schemeClr val="accent1"/>
+          </a:effectRef>
+          <a:fontRef idx="minor">
+            <a:schemeClr val="lt1"/>
+          </a:fontRef>
+        </p:style>
+        <p:txBody>
+          <a:bodyPr lIns="741155" tIns="259492" rIns="1852888" bIns="203886" rtlCol="0" anchor="ctr">
+            <a:normAutofit fontScale="85000" lnSpcReduction="10000"/>
+          </a:bodyPr>
+          <a:lstStyle/>
+          <a:p>
+            <a:r>
+              <a:rPr lang="en-US" sz="2600">
+                <a:solidFill>
+                  <a:srgbClr val="FFFFFF"/>
+                </a:solidFill>
+              </a:rPr>
+              <a:t>The </a:t>
+            </a:r>
+            <a:r>
+              <a:rPr lang="en-US" sz="2600">
+                <a:solidFill>
+                  <a:srgbClr val="FFFFFF"/>
+                </a:solidFill>
+                <a:hlinkClick r:id="rId7">
+                  <a:extLst>
+                    <a:ext uri="{A12FA001-AC4F-418D-AE19-62706E023703}">
+                      <ahyp:hlinkClr xmlns:ahyp="http://schemas.microsoft.com/office/drawing/2018/hyperlinkcolor" val="tx"/>
+                    </a:ext>
+                  </a:extLst>
+                </a:hlinkClick>
+              </a:rPr>
+              <a:t>Slido app</a:t>
+            </a:r>
+            <a:r>
+              <a:rPr lang="en-US" sz="2600">
+                <a:solidFill>
+                  <a:srgbClr val="FFFFFF"/>
+                </a:solidFill>
+              </a:rPr>
+              <a:t> must be installed on every computer you’re presenting from</a:t>
+            </a:r>
+          </a:p>
+        </p:txBody>
+      </p:sp>
+      <p:pic>
+        <p:nvPicPr>
+          <p:cNvPr id="6" name="Graphic 5">
+            <a:extLst>
+              <a:ext uri="{FF2B5EF4-FFF2-40B4-BE49-F238E27FC236}">
+                <a16:creationId xmlns:a16="http://schemas.microsoft.com/office/drawing/2014/main" id="{3A251CCD-54A0-4940-4F6B-25BC53B5EC99}"/>
+              </a:ext>
+            </a:extLst>
+          </p:cNvPr>
+          <p:cNvPicPr>
+            <a:picLocks/>
+          </p:cNvPicPr>
+          <p:nvPr/>
+        </p:nvPicPr>
+        <p:blipFill>
+          <a:blip r:embed="rId8">
+            <a:extLst>
+              <a:ext uri="{96DAC541-7B7A-43D3-8B79-37D633B846F1}">
+                <asvg:svgBlip xmlns:asvg="http://schemas.microsoft.com/office/drawing/2016/SVG/main" r:embed="rId9"/>
+              </a:ext>
+            </a:extLst>
+          </a:blip>
+          <a:stretch>
+            <a:fillRect/>
+          </a:stretch>
+        </p:blipFill>
+        <p:spPr>
+          <a:xfrm>
+            <a:off x="296462" y="6190785"/>
+            <a:ext cx="296462" cy="296462"/>
+          </a:xfrm>
+          <a:prstGeom prst="rect">
+            <a:avLst/>
+          </a:prstGeom>
+        </p:spPr>
+      </p:pic>
+      <p:sp>
+        <p:nvSpPr>
+          <p:cNvPr id="7" name="Trapezoid 6">
+            <a:extLst>
+              <a:ext uri="{FF2B5EF4-FFF2-40B4-BE49-F238E27FC236}">
+                <a16:creationId xmlns:a16="http://schemas.microsoft.com/office/drawing/2014/main" id="{848C23DF-6C75-B0AF-5B8A-8B4B4D196777}"/>
+              </a:ext>
+            </a:extLst>
+          </p:cNvPr>
+          <p:cNvSpPr/>
+          <p:nvPr/>
+        </p:nvSpPr>
+        <p:spPr>
+          <a:xfrm rot="2700000">
+            <a:off x="9620371" y="514924"/>
+            <a:ext cx="3335198" cy="778213"/>
+          </a:xfrm>
+          <a:prstGeom prst="trapezoid">
+            <a:avLst>
+              <a:gd name="adj" fmla="val 100000"/>
+            </a:avLst>
+          </a:prstGeom>
+          <a:solidFill>
+            <a:srgbClr val="EDFAF2"/>
+          </a:solidFill>
+          <a:ln w="25400" cap="flat" cmpd="sng" algn="ctr">
+            <a:noFill/>
+            <a:prstDash val="solid"/>
+          </a:ln>
+          <a:effectLst/>
+          <a:extLst>
+            <a:ext uri="{91240B29-F687-4F45-9708-019B960494DF}">
+              <a14:hiddenLine xmlns:a14="http://schemas.microsoft.com/office/drawing/2010/main" w="25400" cap="flat" cmpd="sng" algn="ctr">
+                <a:solidFill>
+                  <a:schemeClr val="accent1">
+                    <a:shade val="15000"/>
+                  </a:schemeClr>
+                </a:solidFill>
+                <a:prstDash val="solid"/>
+              </a14:hiddenLine>
+            </a:ext>
+          </a:extLst>
+        </p:spPr>
+        <p:style>
+          <a:lnRef idx="2">
+            <a:schemeClr val="accent1">
+              <a:shade val="15000"/>
+            </a:schemeClr>
+          </a:lnRef>
+          <a:fillRef idx="1">
+            <a:schemeClr val="accent1"/>
+          </a:fillRef>
+          <a:effectRef idx="0">
+            <a:schemeClr val="accent1"/>
+          </a:effectRef>
+          <a:fontRef idx="minor">
+            <a:schemeClr val="lt1"/>
+          </a:fontRef>
+        </p:style>
+        <p:txBody>
+          <a:bodyPr tIns="0" bIns="0" rtlCol="0" anchor="t">
+            <a:normAutofit fontScale="70000" lnSpcReduction="20000"/>
+          </a:bodyPr>
+          <a:lstStyle/>
+          <a:p>
+            <a:pPr algn="ctr"/>
+            <a:r>
+              <a:rPr lang="en-US" sz="2600" b="1">
+                <a:solidFill>
+                  <a:srgbClr val="198038"/>
+                </a:solidFill>
+              </a:rPr>
+              <a:t>Do not edit
+</a:t>
+            </a:r>
+            <a:r>
+              <a:rPr lang="en-US" sz="2200">
+                <a:solidFill>
+                  <a:srgbClr val="198038"/>
+                </a:solidFill>
+                <a:hlinkClick r:id="rId10">
+                  <a:extLst>
+                    <a:ext uri="{A12FA001-AC4F-418D-AE19-62706E023703}">
+                      <ahyp:hlinkClr xmlns:ahyp="http://schemas.microsoft.com/office/drawing/2018/hyperlinkcolor" val="tx"/>
+                    </a:ext>
+                  </a:extLst>
+                </a:hlinkClick>
+              </a:rPr>
+              <a:t>How to change the design</a:t>
+            </a:r>
+            <a:endParaRPr lang="en-US" sz="2200">
+              <a:solidFill>
+                <a:srgbClr val="198038"/>
+              </a:solidFill>
+            </a:endParaRPr>
+          </a:p>
+        </p:txBody>
+      </p:sp>
+      <p:pic>
+        <p:nvPicPr>
+          <p:cNvPr id="9" name="Graphic 8">
+            <a:extLst>
+              <a:ext uri="{FF2B5EF4-FFF2-40B4-BE49-F238E27FC236}">
+                <a16:creationId xmlns:a16="http://schemas.microsoft.com/office/drawing/2014/main" id="{A45E1350-8273-D551-6CEA-68E4F462397E}"/>
+              </a:ext>
+            </a:extLst>
+          </p:cNvPr>
+          <p:cNvPicPr>
+            <a:picLocks/>
+          </p:cNvPicPr>
+          <p:nvPr/>
+        </p:nvPicPr>
+        <p:blipFill>
+          <a:blip r:embed="rId11">
+            <a:extLst>
+              <a:ext uri="{96DAC541-7B7A-43D3-8B79-37D633B846F1}">
+                <asvg:svgBlip xmlns:asvg="http://schemas.microsoft.com/office/drawing/2016/SVG/main" r:embed="rId12"/>
+              </a:ext>
+            </a:extLst>
+          </a:blip>
+          <a:stretch>
+            <a:fillRect/>
+          </a:stretch>
+        </p:blipFill>
+        <p:spPr>
+          <a:xfrm>
+            <a:off x="10746748" y="6153727"/>
+            <a:ext cx="1111733" cy="370578"/>
+          </a:xfrm>
+          <a:prstGeom prst="rect">
+            <a:avLst/>
+          </a:prstGeom>
+        </p:spPr>
+      </p:pic>
+    </p:spTree>
+    <p:custDataLst>
+      <p:tags r:id="rId1"/>
+    </p:custDataLst>
+    <p:extLst>
+      <p:ext uri="{BB962C8B-B14F-4D97-AF65-F5344CB8AC3E}">
+        <p14:creationId xmlns:p14="http://schemas.microsoft.com/office/powerpoint/2010/main" val="3960180954"/>
+      </p:ext>
+    </p:extLst>
+  </p:cSld>
+  <p:clrMapOvr>
+    <a:masterClrMapping/>
+  </p:clrMapOvr>
+  <p:timing>
+    <p:tnLst>
+      <p:par>
+        <p:cTn id="1" dur="indefinite" restart="never" nodeType="tmRoot">
+          <p:childTnLst>
+            <p:seq concurrent="1" nextAc="seek">
+              <p:cTn id="2" dur="indefinite" nodeType="mainSeq">
+                <p:childTnLst>
+                  <p:par>
+                    <p:cTn id="3" fill="hold">
+                      <p:stCondLst>
+                        <p:cond delay="indefinite"/>
+                      </p:stCondLst>
+                      <p:childTnLst>
+                        <p:par>
+                          <p:cTn id="4" fill="hold">
+                            <p:stCondLst>
+                              <p:cond delay="0"/>
+                            </p:stCondLst>
+                            <p:childTnLst>
+                              <p:par>
+                                <p:cTn id="5" presetID="26" presetClass="emph" presetSubtype="0" fill="hold" grpId="0" nodeType="clickEffect">
+                                  <p:stCondLst>
+                                    <p:cond delay="0"/>
+                                  </p:stCondLst>
+                                  <p:childTnLst>
+                                    <p:animEffect transition="out" filter="fade">
+                                      <p:cBhvr>
+                                        <p:cTn id="6" dur="50" tmFilter="0, 0; .2, .5; .8, .5; 1, 0"/>
+                                        <p:tgtEl>
+                                          <p:spTgt spid="3"/>
+                                        </p:tgtEl>
+                                      </p:cBhvr>
+                                    </p:animEffect>
+                                    <p:animScale>
+                                      <p:cBhvr>
+                                        <p:cTn id="7" dur="25" autoRev="1" fill="hold"/>
+                                        <p:tgtEl>
+                                          <p:spTgt spid="3"/>
+                                        </p:tgtEl>
+                                      </p:cBhvr>
+                                      <p:by x="105000" y="105000"/>
+                                    </p:animScale>
+                                  </p:childTnLst>
+                                </p:cTn>
+                              </p:par>
+                            </p:childTnLst>
+                          </p:cTn>
+                        </p:par>
+                      </p:childTnLst>
+                    </p:cTn>
+                  </p:par>
+                </p:childTnLst>
+              </p:cTn>
+              <p:prevCondLst>
+                <p:cond evt="onPrev" delay="0">
+                  <p:tgtEl>
+                    <p:sldTgt/>
+                  </p:tgtEl>
+                </p:cond>
+              </p:prevCondLst>
+              <p:nextCondLst>
+                <p:cond evt="onNext" delay="0">
+                  <p:tgtEl>
+                    <p:sldTgt/>
+                  </p:tgtEl>
+                </p:cond>
+              </p:nextCondLst>
+            </p:seq>
+          </p:childTnLst>
+        </p:cTn>
+      </p:par>
+    </p:tnLst>
+    <p:bldLst>
+      <p:bldP spid="3" grpId="0" animBg="1"/>
+    </p:bldLst>
+  </p:timing>
+</p:sld>
+</file>
+
+<file path=ppt/slides/slide20.xml><?xml version="1.0" encoding="utf-8"?>
 <p:sld xmlns:a="http://schemas.openxmlformats.org/drawingml/2006/main" xmlns:r="http://schemas.openxmlformats.org/officeDocument/2006/relationships" xmlns:p="http://schemas.openxmlformats.org/presentationml/2006/main">
   <p:cSld>
     <p:spTree>
@@ -11941,7 +12903,7 @@
 </p:sld>
 </file>
 
-<file path=ppt/slides/slide19.xml><?xml version="1.0" encoding="utf-8"?>
+<file path=ppt/slides/slide21.xml><?xml version="1.0" encoding="utf-8"?>
 <p:sld xmlns:a="http://schemas.openxmlformats.org/drawingml/2006/main" xmlns:r="http://schemas.openxmlformats.org/officeDocument/2006/relationships" xmlns:p="http://schemas.openxmlformats.org/presentationml/2006/main" show="0">
   <p:cSld>
     <p:spTree>
@@ -12388,122 +13350,7 @@
 </p:sld>
 </file>
 
-<file path=ppt/slides/slide2.xml><?xml version="1.0" encoding="utf-8"?>
-<p:sld xmlns:a="http://schemas.openxmlformats.org/drawingml/2006/main" xmlns:r="http://schemas.openxmlformats.org/officeDocument/2006/relationships" xmlns:p="http://schemas.openxmlformats.org/presentationml/2006/main">
-  <p:cSld>
-    <p:spTree>
-      <p:nvGrpSpPr>
-        <p:cNvPr id="1" name=""/>
-        <p:cNvGrpSpPr/>
-        <p:nvPr/>
-      </p:nvGrpSpPr>
-      <p:grpSpPr>
-        <a:xfrm>
-          <a:off x="0" y="0"/>
-          <a:ext cx="0" cy="0"/>
-          <a:chOff x="0" y="0"/>
-          <a:chExt cx="0" cy="0"/>
-        </a:xfrm>
-      </p:grpSpPr>
-      <p:sp>
-        <p:nvSpPr>
-          <p:cNvPr id="3" name="Title 2">
-            <a:extLst>
-              <a:ext uri="{FF2B5EF4-FFF2-40B4-BE49-F238E27FC236}">
-                <a16:creationId xmlns:a16="http://schemas.microsoft.com/office/drawing/2014/main" id="{9323871C-7CA8-1448-8FFC-1AE6E1838941}"/>
-              </a:ext>
-            </a:extLst>
-          </p:cNvPr>
-          <p:cNvSpPr>
-            <a:spLocks noGrp="1"/>
-          </p:cNvSpPr>
-          <p:nvPr>
-            <p:ph type="title"/>
-          </p:nvPr>
-        </p:nvSpPr>
-        <p:spPr/>
-        <p:txBody>
-          <a:bodyPr/>
-          <a:lstStyle/>
-          <a:p>
-            <a:r>
-              <a:rPr lang="en-US" dirty="0"/>
-              <a:t>Reminders</a:t>
-            </a:r>
-          </a:p>
-        </p:txBody>
-      </p:sp>
-      <p:sp>
-        <p:nvSpPr>
-          <p:cNvPr id="5" name="Text Placeholder 4">
-            <a:extLst>
-              <a:ext uri="{FF2B5EF4-FFF2-40B4-BE49-F238E27FC236}">
-                <a16:creationId xmlns:a16="http://schemas.microsoft.com/office/drawing/2014/main" id="{F4E0A5F0-1D89-954D-91FB-596CD9E690F2}"/>
-              </a:ext>
-            </a:extLst>
-          </p:cNvPr>
-          <p:cNvSpPr>
-            <a:spLocks noGrp="1"/>
-          </p:cNvSpPr>
-          <p:nvPr>
-            <p:ph type="body" idx="1"/>
-          </p:nvPr>
-        </p:nvSpPr>
-        <p:spPr/>
-        <p:txBody>
-          <a:bodyPr/>
-          <a:lstStyle/>
-          <a:p>
-            <a:pPr marL="76200" indent="0">
-              <a:buNone/>
-            </a:pPr>
-            <a:r>
-              <a:rPr lang="en-US" b="1" dirty="0"/>
-              <a:t>Coming up next week:</a:t>
-            </a:r>
-          </a:p>
-          <a:p>
-            <a:pPr marL="76200" indent="0">
-              <a:buNone/>
-            </a:pPr>
-            <a:endParaRPr lang="en-US" b="1" dirty="0"/>
-          </a:p>
-          <a:p>
-            <a:r>
-              <a:rPr lang="en-US" dirty="0"/>
-              <a:t>Monday: Project Update 3: Focus on feature generation</a:t>
-            </a:r>
-            <a:br>
-              <a:rPr lang="en-US" dirty="0"/>
-            </a:br>
-            <a:endParaRPr lang="en-US" dirty="0"/>
-          </a:p>
-          <a:p>
-            <a:r>
-              <a:rPr lang="en-US" dirty="0"/>
-              <a:t>Tuesday: Weekly Feedback Form</a:t>
-            </a:r>
-            <a:br>
-              <a:rPr lang="en-US" dirty="0"/>
-            </a:br>
-            <a:endParaRPr lang="en-US" dirty="0"/>
-          </a:p>
-        </p:txBody>
-      </p:sp>
-    </p:spTree>
-    <p:extLst>
-      <p:ext uri="{BB962C8B-B14F-4D97-AF65-F5344CB8AC3E}">
-        <p14:creationId xmlns:p14="http://schemas.microsoft.com/office/powerpoint/2010/main" val="4239382787"/>
-      </p:ext>
-    </p:extLst>
-  </p:cSld>
-  <p:clrMapOvr>
-    <a:masterClrMapping/>
-  </p:clrMapOvr>
-</p:sld>
-</file>
-
-<file path=ppt/slides/slide20.xml><?xml version="1.0" encoding="utf-8"?>
+<file path=ppt/slides/slide22.xml><?xml version="1.0" encoding="utf-8"?>
 <p:sld xmlns:a="http://schemas.openxmlformats.org/drawingml/2006/main" xmlns:r="http://schemas.openxmlformats.org/officeDocument/2006/relationships" xmlns:p="http://schemas.openxmlformats.org/presentationml/2006/main" showMasterSp="0">
   <p:cSld>
     <p:bg>
@@ -13028,7 +13875,7 @@
 </p:sld>
 </file>
 
-<file path=ppt/slides/slide21.xml><?xml version="1.0" encoding="utf-8"?>
+<file path=ppt/slides/slide23.xml><?xml version="1.0" encoding="utf-8"?>
 <p:sld xmlns:a="http://schemas.openxmlformats.org/drawingml/2006/main" xmlns:r="http://schemas.openxmlformats.org/officeDocument/2006/relationships" xmlns:p="http://schemas.openxmlformats.org/presentationml/2006/main" show="0">
   <p:cSld>
     <p:spTree>
@@ -13149,7 +13996,7 @@
 </p:sld>
 </file>
 
-<file path=ppt/slides/slide22.xml><?xml version="1.0" encoding="utf-8"?>
+<file path=ppt/slides/slide24.xml><?xml version="1.0" encoding="utf-8"?>
 <p:sld xmlns:a="http://schemas.openxmlformats.org/drawingml/2006/main" xmlns:r="http://schemas.openxmlformats.org/officeDocument/2006/relationships" xmlns:p="http://schemas.openxmlformats.org/presentationml/2006/main">
   <p:cSld>
     <p:spTree>
@@ -13329,7 +14176,7 @@
 </p:sld>
 </file>
 
-<file path=ppt/slides/slide23.xml><?xml version="1.0" encoding="utf-8"?>
+<file path=ppt/slides/slide25.xml><?xml version="1.0" encoding="utf-8"?>
 <p:sld xmlns:a="http://schemas.openxmlformats.org/drawingml/2006/main" xmlns:r="http://schemas.openxmlformats.org/officeDocument/2006/relationships" xmlns:p="http://schemas.openxmlformats.org/presentationml/2006/main">
   <p:cSld>
     <p:spTree>
@@ -13482,7 +14329,7 @@
 </p:sld>
 </file>
 
-<file path=ppt/slides/slide24.xml><?xml version="1.0" encoding="utf-8"?>
+<file path=ppt/slides/slide26.xml><?xml version="1.0" encoding="utf-8"?>
 <p:sld xmlns:a="http://schemas.openxmlformats.org/drawingml/2006/main" xmlns:r="http://schemas.openxmlformats.org/officeDocument/2006/relationships" xmlns:p="http://schemas.openxmlformats.org/presentationml/2006/main">
   <p:cSld>
     <p:spTree>
@@ -13582,7 +14429,7 @@
 </p:sld>
 </file>
 
-<file path=ppt/slides/slide25.xml><?xml version="1.0" encoding="utf-8"?>
+<file path=ppt/slides/slide27.xml><?xml version="1.0" encoding="utf-8"?>
 <p:sld xmlns:a="http://schemas.openxmlformats.org/drawingml/2006/main" xmlns:r="http://schemas.openxmlformats.org/officeDocument/2006/relationships" xmlns:p="http://schemas.openxmlformats.org/presentationml/2006/main">
   <p:cSld>
     <p:spTree>
@@ -13674,245 +14521,6 @@
     <p:extLst>
       <p:ext uri="{BB962C8B-B14F-4D97-AF65-F5344CB8AC3E}">
         <p14:creationId xmlns:p14="http://schemas.microsoft.com/office/powerpoint/2010/main" val="466559840"/>
-      </p:ext>
-    </p:extLst>
-  </p:cSld>
-  <p:clrMapOvr>
-    <a:masterClrMapping/>
-  </p:clrMapOvr>
-</p:sld>
-</file>
-
-<file path=ppt/slides/slide26.xml><?xml version="1.0" encoding="utf-8"?>
-<p:sld xmlns:a="http://schemas.openxmlformats.org/drawingml/2006/main" xmlns:r="http://schemas.openxmlformats.org/officeDocument/2006/relationships" xmlns:p="http://schemas.openxmlformats.org/presentationml/2006/main">
-  <p:cSld>
-    <p:spTree>
-      <p:nvGrpSpPr>
-        <p:cNvPr id="1" name=""/>
-        <p:cNvGrpSpPr/>
-        <p:nvPr/>
-      </p:nvGrpSpPr>
-      <p:grpSpPr>
-        <a:xfrm>
-          <a:off x="0" y="0"/>
-          <a:ext cx="0" cy="0"/>
-          <a:chOff x="0" y="0"/>
-          <a:chExt cx="0" cy="0"/>
-        </a:xfrm>
-      </p:grpSpPr>
-      <p:sp>
-        <p:nvSpPr>
-          <p:cNvPr id="2" name="Title 1">
-            <a:extLst>
-              <a:ext uri="{FF2B5EF4-FFF2-40B4-BE49-F238E27FC236}">
-                <a16:creationId xmlns:a16="http://schemas.microsoft.com/office/drawing/2014/main" id="{C5E248E6-03FE-5E72-6952-7BDB290D4903}"/>
-              </a:ext>
-            </a:extLst>
-          </p:cNvPr>
-          <p:cNvSpPr>
-            <a:spLocks noGrp="1"/>
-          </p:cNvSpPr>
-          <p:nvPr>
-            <p:ph type="title"/>
-          </p:nvPr>
-        </p:nvSpPr>
-        <p:spPr/>
-        <p:txBody>
-          <a:bodyPr/>
-          <a:lstStyle/>
-          <a:p>
-            <a:r>
-              <a:rPr lang="en-US" dirty="0"/>
-              <a:t>Missing values</a:t>
-            </a:r>
-          </a:p>
-        </p:txBody>
-      </p:sp>
-      <p:sp>
-        <p:nvSpPr>
-          <p:cNvPr id="3" name="Text Placeholder 2">
-            <a:extLst>
-              <a:ext uri="{FF2B5EF4-FFF2-40B4-BE49-F238E27FC236}">
-                <a16:creationId xmlns:a16="http://schemas.microsoft.com/office/drawing/2014/main" id="{59C6D3EE-BC81-6284-2A05-709A07242A50}"/>
-              </a:ext>
-            </a:extLst>
-          </p:cNvPr>
-          <p:cNvSpPr>
-            <a:spLocks noGrp="1"/>
-          </p:cNvSpPr>
-          <p:nvPr>
-            <p:ph type="body" idx="1"/>
-          </p:nvPr>
-        </p:nvSpPr>
-        <p:spPr/>
-        <p:txBody>
-          <a:bodyPr/>
-          <a:lstStyle/>
-          <a:p>
-            <a:r>
-              <a:rPr lang="en-US" dirty="0"/>
-              <a:t>Real data always has missing information</a:t>
-            </a:r>
-          </a:p>
-          <a:p>
-            <a:r>
-              <a:rPr lang="en-US" dirty="0"/>
-              <a:t>First question: do you know when data is missing? Or is it just…not there</a:t>
-            </a:r>
-          </a:p>
-          <a:p>
-            <a:r>
-              <a:rPr lang="en-US" dirty="0"/>
-              <a:t>NEVER drop all the rows with missing data</a:t>
-            </a:r>
-          </a:p>
-          <a:p>
-            <a:pPr lvl="1"/>
-            <a:r>
-              <a:rPr lang="en-US" dirty="0"/>
-              <a:t>What are you going to do at test time with an entity with missing data shows up?</a:t>
-            </a:r>
-          </a:p>
-          <a:p>
-            <a:r>
-              <a:rPr lang="en-US" dirty="0"/>
-              <a:t>Strategies for handling missingness depend on belief about distribution shift in missingness between training data and deployment</a:t>
-            </a:r>
-          </a:p>
-        </p:txBody>
-      </p:sp>
-    </p:spTree>
-    <p:extLst>
-      <p:ext uri="{BB962C8B-B14F-4D97-AF65-F5344CB8AC3E}">
-        <p14:creationId xmlns:p14="http://schemas.microsoft.com/office/powerpoint/2010/main" val="3360183020"/>
-      </p:ext>
-    </p:extLst>
-  </p:cSld>
-  <p:clrMapOvr>
-    <a:masterClrMapping/>
-  </p:clrMapOvr>
-</p:sld>
-</file>
-
-<file path=ppt/slides/slide27.xml><?xml version="1.0" encoding="utf-8"?>
-<p:sld xmlns:a="http://schemas.openxmlformats.org/drawingml/2006/main" xmlns:r="http://schemas.openxmlformats.org/officeDocument/2006/relationships" xmlns:p="http://schemas.openxmlformats.org/presentationml/2006/main">
-  <p:cSld>
-    <p:spTree>
-      <p:nvGrpSpPr>
-        <p:cNvPr id="1" name=""/>
-        <p:cNvGrpSpPr/>
-        <p:nvPr/>
-      </p:nvGrpSpPr>
-      <p:grpSpPr>
-        <a:xfrm>
-          <a:off x="0" y="0"/>
-          <a:ext cx="0" cy="0"/>
-          <a:chOff x="0" y="0"/>
-          <a:chExt cx="0" cy="0"/>
-        </a:xfrm>
-      </p:grpSpPr>
-      <p:sp>
-        <p:nvSpPr>
-          <p:cNvPr id="2" name="Title 1">
-            <a:extLst>
-              <a:ext uri="{FF2B5EF4-FFF2-40B4-BE49-F238E27FC236}">
-                <a16:creationId xmlns:a16="http://schemas.microsoft.com/office/drawing/2014/main" id="{5DFEE20D-C8C5-317C-1DDF-33FB591811A5}"/>
-              </a:ext>
-            </a:extLst>
-          </p:cNvPr>
-          <p:cNvSpPr>
-            <a:spLocks noGrp="1"/>
-          </p:cNvSpPr>
-          <p:nvPr>
-            <p:ph type="title"/>
-          </p:nvPr>
-        </p:nvSpPr>
-        <p:spPr/>
-        <p:txBody>
-          <a:bodyPr/>
-          <a:lstStyle/>
-          <a:p>
-            <a:r>
-              <a:rPr lang="en-US" dirty="0"/>
-              <a:t>Missing values</a:t>
-            </a:r>
-          </a:p>
-        </p:txBody>
-      </p:sp>
-      <p:sp>
-        <p:nvSpPr>
-          <p:cNvPr id="3" name="Text Placeholder 2">
-            <a:extLst>
-              <a:ext uri="{FF2B5EF4-FFF2-40B4-BE49-F238E27FC236}">
-                <a16:creationId xmlns:a16="http://schemas.microsoft.com/office/drawing/2014/main" id="{79DCE926-8A42-D606-1801-43215E9A3D18}"/>
-              </a:ext>
-            </a:extLst>
-          </p:cNvPr>
-          <p:cNvSpPr>
-            <a:spLocks noGrp="1"/>
-          </p:cNvSpPr>
-          <p:nvPr>
-            <p:ph type="body" idx="1"/>
-          </p:nvPr>
-        </p:nvSpPr>
-        <p:spPr/>
-        <p:txBody>
-          <a:bodyPr/>
-          <a:lstStyle/>
-          <a:p>
-            <a:pPr marL="76200" indent="0">
-              <a:buNone/>
-            </a:pPr>
-            <a:r>
-              <a:rPr lang="en-US" dirty="0"/>
-              <a:t>Models for missingness:</a:t>
-            </a:r>
-          </a:p>
-          <a:p>
-            <a:r>
-              <a:rPr lang="en-US" dirty="0"/>
-              <a:t>Missing completely at random: uniform probability of missingness</a:t>
-            </a:r>
-          </a:p>
-          <a:p>
-            <a:r>
-              <a:rPr lang="en-US" dirty="0"/>
-              <a:t>Missing at random: </a:t>
-            </a:r>
-            <a:r>
-              <a:rPr lang="en-US" dirty="0" err="1"/>
-              <a:t>Pr</a:t>
-            </a:r>
-            <a:r>
-              <a:rPr lang="en-US" dirty="0"/>
-              <a:t>[missingness] captured by observed features</a:t>
-            </a:r>
-          </a:p>
-          <a:p>
-            <a:r>
-              <a:rPr lang="en-US" dirty="0"/>
-              <a:t>Missing not at random: none of the above</a:t>
-            </a:r>
-          </a:p>
-          <a:p>
-            <a:r>
-              <a:rPr lang="en-US" dirty="0"/>
-              <a:t>Similar to causal inference: assumptions cannot be verified by (observational) data alone </a:t>
-            </a:r>
-            <a:r>
-              <a:rPr lang="en-US" dirty="0">
-                <a:sym typeface="Wingdings" panose="05000000000000000000" pitchFamily="2" charset="2"/>
-              </a:rPr>
-              <a:t></a:t>
-            </a:r>
-            <a:endParaRPr lang="en-US" dirty="0"/>
-          </a:p>
-        </p:txBody>
-      </p:sp>
-    </p:spTree>
-    <p:extLst>
-      <p:ext uri="{BB962C8B-B14F-4D97-AF65-F5344CB8AC3E}">
-        <p14:creationId xmlns:p14="http://schemas.microsoft.com/office/powerpoint/2010/main" val="3585074227"/>
       </p:ext>
     </p:extLst>
   </p:cSld>
@@ -13990,42 +14598,32 @@
           <a:p>
             <a:r>
               <a:rPr lang="en-US" dirty="0"/>
-              <a:t>Handling missingness depends on your goals</a:t>
-            </a:r>
-          </a:p>
-          <a:p>
-            <a:r>
-              <a:rPr lang="en-US" dirty="0"/>
-              <a:t>Statistical inference: recover the correct value of a </a:t>
-            </a:r>
-            <a:r>
-              <a:rPr lang="en-US" i="1" dirty="0"/>
-              <a:t>parameter</a:t>
-            </a:r>
-            <a:r>
-              <a:rPr lang="en-US" dirty="0"/>
-              <a:t> (e.g., the mean of a covariate or a coefficient in a linear regression model)</a:t>
-            </a:r>
-          </a:p>
-          <a:p>
-            <a:r>
-              <a:rPr lang="en-US" dirty="0"/>
-              <a:t>ML: predict unseen examples</a:t>
-            </a:r>
-          </a:p>
-          <a:p>
-            <a:endParaRPr lang="en-US" dirty="0"/>
-          </a:p>
-          <a:p>
-            <a:r>
-              <a:rPr lang="en-US" dirty="0"/>
-              <a:t>In inference, it is theoretically acceptable to throw away missing data if either (a) data is missing completely at random or (b) your model includes all variables the probability of missingness depends on </a:t>
-            </a:r>
-          </a:p>
-          <a:p>
-            <a:r>
-              <a:rPr lang="en-US" dirty="0"/>
-              <a:t>In prediction, missingness is part of the distribution and will likely be present at test time as well</a:t>
+              <a:t>Real data always has missing information</a:t>
+            </a:r>
+          </a:p>
+          <a:p>
+            <a:r>
+              <a:rPr lang="en-US" dirty="0"/>
+              <a:t>First question: do you know when data is missing? Or is it just…not there</a:t>
+            </a:r>
+          </a:p>
+          <a:p>
+            <a:r>
+              <a:rPr lang="en-US" dirty="0"/>
+              <a:t>NEVER drop all the rows with missing data</a:t>
+            </a:r>
+          </a:p>
+          <a:p>
+            <a:pPr lvl="1"/>
+            <a:r>
+              <a:rPr lang="en-US" dirty="0"/>
+              <a:t>What are you going to do at test time with an entity with missing data shows up?</a:t>
+            </a:r>
+          </a:p>
+          <a:p>
+            <a:r>
+              <a:rPr lang="en-US" dirty="0"/>
+              <a:t>Strategies for handling missingness depend on belief about distribution shift in missingness between training data and deployment</a:t>
             </a:r>
           </a:p>
         </p:txBody>
@@ -14033,7 +14631,7 @@
     </p:spTree>
     <p:extLst>
       <p:ext uri="{BB962C8B-B14F-4D97-AF65-F5344CB8AC3E}">
-        <p14:creationId xmlns:p14="http://schemas.microsoft.com/office/powerpoint/2010/main" val="3504445841"/>
+        <p14:creationId xmlns:p14="http://schemas.microsoft.com/office/powerpoint/2010/main" val="3360183020"/>
       </p:ext>
     </p:extLst>
   </p:cSld>
@@ -14062,7 +14660,13 @@
       </p:grpSpPr>
       <p:sp>
         <p:nvSpPr>
-          <p:cNvPr id="3" name="Title 2"/>
+          <p:cNvPr id="2" name="Title 1">
+            <a:extLst>
+              <a:ext uri="{FF2B5EF4-FFF2-40B4-BE49-F238E27FC236}">
+                <a16:creationId xmlns:a16="http://schemas.microsoft.com/office/drawing/2014/main" id="{5DFEE20D-C8C5-317C-1DDF-33FB591811A5}"/>
+              </a:ext>
+            </a:extLst>
+          </p:cNvPr>
           <p:cNvSpPr>
             <a:spLocks noGrp="1"/>
           </p:cNvSpPr>
@@ -14077,14 +14681,20 @@
           <a:p>
             <a:r>
               <a:rPr lang="en-US" dirty="0"/>
-              <a:t>Imputation</a:t>
+              <a:t>Missing values</a:t>
             </a:r>
           </a:p>
         </p:txBody>
       </p:sp>
       <p:sp>
         <p:nvSpPr>
-          <p:cNvPr id="2" name="Content Placeholder 1"/>
+          <p:cNvPr id="3" name="Text Placeholder 2">
+            <a:extLst>
+              <a:ext uri="{FF2B5EF4-FFF2-40B4-BE49-F238E27FC236}">
+                <a16:creationId xmlns:a16="http://schemas.microsoft.com/office/drawing/2014/main" id="{79DCE926-8A42-D606-1801-43215E9A3D18}"/>
+              </a:ext>
+            </a:extLst>
+          </p:cNvPr>
           <p:cNvSpPr>
             <a:spLocks noGrp="1"/>
           </p:cNvSpPr>
@@ -14097,35 +14707,59 @@
           <a:bodyPr/>
           <a:lstStyle/>
           <a:p>
-            <a:r>
-              <a:rPr lang="en-US" dirty="0"/>
-              <a:t>Impute (Fill in) missing values based on why you think they may be missing and what you want the model to do with those missing values</a:t>
-            </a:r>
-          </a:p>
-          <a:p>
-            <a:pPr lvl="1"/>
+            <a:pPr marL="76200" indent="0">
+              <a:buNone/>
+            </a:pPr>
+            <a:r>
+              <a:rPr lang="en-US" dirty="0"/>
+              <a:t>Models for missingness:</a:t>
+            </a:r>
+          </a:p>
+          <a:p>
+            <a:r>
+              <a:rPr lang="en-US" dirty="0"/>
+              <a:t>Missing completely at random (MCAR): uniform probability of missingness</a:t>
+            </a:r>
+          </a:p>
+          <a:p>
+            <a:r>
+              <a:rPr lang="en-US" dirty="0"/>
+              <a:t>Missing at random: </a:t>
+            </a:r>
+            <a:r>
+              <a:rPr lang="en-US" dirty="0" err="1"/>
+              <a:t>Pr</a:t>
+            </a:r>
+            <a:r>
+              <a:rPr lang="en-US" dirty="0"/>
+              <a:t>[missingness] captured by observed features</a:t>
+            </a:r>
+          </a:p>
+          <a:p>
+            <a:r>
+              <a:rPr lang="en-US" dirty="0"/>
+              <a:t>Missing not at random (MNAR): none of the above (2016 elections)</a:t>
+            </a:r>
+          </a:p>
+          <a:p>
+            <a:r>
+              <a:rPr lang="en-US" dirty="0"/>
+              <a:t>Similar to causal inference: assumptions cannot be verified by (observational) data alone </a:t>
+            </a:r>
+            <a:r>
+              <a:rPr lang="en-US" dirty="0">
+                <a:sym typeface="Wingdings" panose="05000000000000000000" pitchFamily="2" charset="2"/>
+              </a:rPr>
+              <a:t></a:t>
+            </a:r>
             <a:endParaRPr lang="en-US" dirty="0"/>
-          </a:p>
-          <a:p>
-            <a:r>
-              <a:rPr lang="en-US" dirty="0"/>
-              <a:t>Typically, also add binary feature (dummy) for missing vs not missing in case “</a:t>
-            </a:r>
-            <a:r>
-              <a:rPr lang="en-US" dirty="0" err="1"/>
-              <a:t>missingness</a:t>
-            </a:r>
-            <a:r>
-              <a:rPr lang="en-US" dirty="0"/>
-              <a:t>” is predictive of the outcome</a:t>
-            </a:r>
           </a:p>
         </p:txBody>
       </p:sp>
     </p:spTree>
     <p:extLst>
       <p:ext uri="{BB962C8B-B14F-4D97-AF65-F5344CB8AC3E}">
-        <p14:creationId xmlns:p14="http://schemas.microsoft.com/office/powerpoint/2010/main" val="2415355454"/>
+        <p14:creationId xmlns:p14="http://schemas.microsoft.com/office/powerpoint/2010/main" val="3585074227"/>
       </p:ext>
     </p:extLst>
   </p:cSld>
@@ -14154,10 +14788,10 @@
       </p:grpSpPr>
       <p:sp>
         <p:nvSpPr>
-          <p:cNvPr id="2" name="Title 1">
+          <p:cNvPr id="3" name="Title 2">
             <a:extLst>
               <a:ext uri="{FF2B5EF4-FFF2-40B4-BE49-F238E27FC236}">
-                <a16:creationId xmlns:a16="http://schemas.microsoft.com/office/drawing/2014/main" id="{21359BA9-BA2B-D148-89DA-A99081B1FF81}"/>
+                <a16:creationId xmlns:a16="http://schemas.microsoft.com/office/drawing/2014/main" id="{9323871C-7CA8-1448-8FFC-1AE6E1838941}"/>
               </a:ext>
             </a:extLst>
           </p:cNvPr>
@@ -14175,17 +14809,17 @@
           <a:p>
             <a:r>
               <a:rPr lang="en-US" dirty="0"/>
-              <a:t>Recap from Metrics and Update Assignment 2</a:t>
+              <a:t>Reminders</a:t>
             </a:r>
           </a:p>
         </p:txBody>
       </p:sp>
       <p:sp>
         <p:nvSpPr>
-          <p:cNvPr id="3" name="Text Placeholder 2">
+          <p:cNvPr id="5" name="Text Placeholder 4">
             <a:extLst>
               <a:ext uri="{FF2B5EF4-FFF2-40B4-BE49-F238E27FC236}">
-                <a16:creationId xmlns:a16="http://schemas.microsoft.com/office/drawing/2014/main" id="{DDA03E0F-5F3D-5B4D-8232-BF72B84A198E}"/>
+                <a16:creationId xmlns:a16="http://schemas.microsoft.com/office/drawing/2014/main" id="{F4E0A5F0-1D89-954D-91FB-596CD9E690F2}"/>
               </a:ext>
             </a:extLst>
           </p:cNvPr>
@@ -14204,6 +14838,35 @@
             <a:pPr marL="76200" indent="0">
               <a:buNone/>
             </a:pPr>
+            <a:r>
+              <a:rPr lang="en-US" b="1" dirty="0"/>
+              <a:t>Coming up next week:</a:t>
+            </a:r>
+          </a:p>
+          <a:p>
+            <a:pPr marL="76200" indent="0">
+              <a:buNone/>
+            </a:pPr>
+            <a:endParaRPr lang="en-US" b="1" dirty="0"/>
+          </a:p>
+          <a:p>
+            <a:r>
+              <a:rPr lang="en-US" dirty="0"/>
+              <a:t>Monday: Project Update 3: Focus on feature generation and getting v0 results</a:t>
+            </a:r>
+            <a:br>
+              <a:rPr lang="en-US" dirty="0"/>
+            </a:br>
+            <a:endParaRPr lang="en-US" dirty="0"/>
+          </a:p>
+          <a:p>
+            <a:r>
+              <a:rPr lang="en-US" dirty="0"/>
+              <a:t>Tuesday: Weekly Feedback Form</a:t>
+            </a:r>
+            <a:br>
+              <a:rPr lang="en-US" dirty="0"/>
+            </a:br>
             <a:endParaRPr lang="en-US" dirty="0"/>
           </a:p>
         </p:txBody>
@@ -14211,100 +14874,13 @@
     </p:spTree>
     <p:extLst>
       <p:ext uri="{BB962C8B-B14F-4D97-AF65-F5344CB8AC3E}">
-        <p14:creationId xmlns:p14="http://schemas.microsoft.com/office/powerpoint/2010/main" val="1721185332"/>
+        <p14:creationId xmlns:p14="http://schemas.microsoft.com/office/powerpoint/2010/main" val="4239382787"/>
       </p:ext>
     </p:extLst>
   </p:cSld>
   <p:clrMapOvr>
     <a:masterClrMapping/>
   </p:clrMapOvr>
-  <p:timing>
-    <p:tnLst>
-      <p:par>
-        <p:cTn id="1" dur="indefinite" restart="never" nodeType="tmRoot">
-          <p:childTnLst>
-            <p:seq concurrent="1" nextAc="seek">
-              <p:cTn id="2" dur="indefinite" nodeType="mainSeq">
-                <p:childTnLst>
-                  <p:par>
-                    <p:cTn id="3" fill="hold">
-                      <p:stCondLst>
-                        <p:cond delay="indefinite"/>
-                      </p:stCondLst>
-                      <p:childTnLst>
-                        <p:par>
-                          <p:cTn id="4" fill="hold">
-                            <p:stCondLst>
-                              <p:cond delay="0"/>
-                            </p:stCondLst>
-                            <p:childTnLst>
-                              <p:par>
-                                <p:cTn id="5" presetID="1" presetClass="entr" presetSubtype="0" fill="hold" grpId="0" nodeType="clickEffect" nodePh="1">
-                                  <p:stCondLst>
-                                    <p:cond delay="0"/>
-                                  </p:stCondLst>
-                                  <p:endCondLst>
-                                    <p:cond evt="begin" delay="0">
-                                      <p:tn val="5"/>
-                                    </p:cond>
-                                  </p:endCondLst>
-                                  <p:childTnLst>
-                                    <p:set>
-                                      <p:cBhvr>
-                                        <p:cTn id="6" dur="1" fill="hold">
-                                          <p:stCondLst>
-                                            <p:cond delay="0"/>
-                                          </p:stCondLst>
-                                        </p:cTn>
-                                        <p:tgtEl>
-                                          <p:spTgt spid="3">
-                                            <p:txEl>
-                                              <p:pRg st="0" end="0"/>
-                                            </p:txEl>
-                                          </p:spTgt>
-                                        </p:tgtEl>
-                                        <p:attrNameLst>
-                                          <p:attrName>style.visibility</p:attrName>
-                                        </p:attrNameLst>
-                                      </p:cBhvr>
-                                      <p:to>
-                                        <p:strVal val="visible"/>
-                                      </p:to>
-                                    </p:set>
-                                  </p:childTnLst>
-                                </p:cTn>
-                              </p:par>
-                            </p:childTnLst>
-                          </p:cTn>
-                        </p:par>
-                      </p:childTnLst>
-                    </p:cTn>
-                  </p:par>
-                </p:childTnLst>
-              </p:cTn>
-              <p:prevCondLst>
-                <p:cond evt="onPrev" delay="0">
-                  <p:tgtEl>
-                    <p:sldTgt/>
-                  </p:tgtEl>
-                </p:cond>
-              </p:prevCondLst>
-              <p:nextCondLst>
-                <p:cond evt="onNext" delay="0">
-                  <p:tgtEl>
-                    <p:sldTgt/>
-                  </p:tgtEl>
-                </p:cond>
-              </p:nextCondLst>
-            </p:seq>
-          </p:childTnLst>
-        </p:cTn>
-      </p:par>
-    </p:tnLst>
-    <p:bldLst>
-      <p:bldP spid="3" grpId="0" build="p"/>
-    </p:bldLst>
-  </p:timing>
 </p:sld>
 </file>
 
@@ -14327,7 +14903,13 @@
       </p:grpSpPr>
       <p:sp>
         <p:nvSpPr>
-          <p:cNvPr id="3" name="Title 2"/>
+          <p:cNvPr id="2" name="Title 1">
+            <a:extLst>
+              <a:ext uri="{FF2B5EF4-FFF2-40B4-BE49-F238E27FC236}">
+                <a16:creationId xmlns:a16="http://schemas.microsoft.com/office/drawing/2014/main" id="{C5E248E6-03FE-5E72-6952-7BDB290D4903}"/>
+              </a:ext>
+            </a:extLst>
+          </p:cNvPr>
           <p:cNvSpPr>
             <a:spLocks noGrp="1"/>
           </p:cNvSpPr>
@@ -14342,14 +14924,20 @@
           <a:p>
             <a:r>
               <a:rPr lang="en-US" dirty="0"/>
-              <a:t>Imputing Missing Values: Some Options</a:t>
+              <a:t>Missing values</a:t>
             </a:r>
           </a:p>
         </p:txBody>
       </p:sp>
       <p:sp>
         <p:nvSpPr>
-          <p:cNvPr id="2" name="Content Placeholder 1"/>
+          <p:cNvPr id="3" name="Text Placeholder 2">
+            <a:extLst>
+              <a:ext uri="{FF2B5EF4-FFF2-40B4-BE49-F238E27FC236}">
+                <a16:creationId xmlns:a16="http://schemas.microsoft.com/office/drawing/2014/main" id="{59C6D3EE-BC81-6284-2A05-709A07242A50}"/>
+              </a:ext>
+            </a:extLst>
+          </p:cNvPr>
           <p:cNvSpPr>
             <a:spLocks noGrp="1"/>
           </p:cNvSpPr>
@@ -14357,85 +14945,57 @@
             <p:ph type="body" idx="1"/>
           </p:nvPr>
         </p:nvSpPr>
-        <p:spPr>
-          <a:xfrm>
-            <a:off x="415600" y="1601179"/>
-            <a:ext cx="11360700" cy="4555200"/>
-          </a:xfrm>
-        </p:spPr>
+        <p:spPr/>
         <p:txBody>
           <a:bodyPr/>
           <a:lstStyle/>
           <a:p>
-            <a:pPr marL="76200" indent="0">
-              <a:buNone/>
-            </a:pPr>
+            <a:r>
+              <a:rPr lang="en-US" dirty="0"/>
+              <a:t>Handling missingness depends on your goals</a:t>
+            </a:r>
+          </a:p>
+          <a:p>
+            <a:r>
+              <a:rPr lang="en-US" dirty="0"/>
+              <a:t>Statistical inference: recover the correct value of a </a:t>
+            </a:r>
+            <a:r>
+              <a:rPr lang="en-US" i="1" dirty="0"/>
+              <a:t>parameter</a:t>
+            </a:r>
+            <a:r>
+              <a:rPr lang="en-US" dirty="0"/>
+              <a:t> (e.g., the mean of a covariate or a coefficient in a linear regression model)</a:t>
+            </a:r>
+          </a:p>
+          <a:p>
+            <a:r>
+              <a:rPr lang="en-US" dirty="0"/>
+              <a:t>ML: predict unseen examples</a:t>
+            </a:r>
+          </a:p>
+          <a:p>
             <a:endParaRPr lang="en-US" dirty="0"/>
           </a:p>
           <a:p>
             <a:r>
               <a:rPr lang="en-US" dirty="0"/>
-              <a:t>Central Tendency: Mean / Median / Mode</a:t>
-            </a:r>
-            <a:br>
-              <a:rPr lang="en-US" dirty="0"/>
-            </a:br>
-            <a:endParaRPr lang="en-US" dirty="0"/>
-          </a:p>
-          <a:p>
-            <a:r>
-              <a:rPr lang="en-US" dirty="0"/>
-              <a:t>ML methods that handle missing data (e.g., </a:t>
-            </a:r>
-            <a:r>
-              <a:rPr lang="en-US" dirty="0" err="1"/>
-              <a:t>xgboost</a:t>
-            </a:r>
-            <a:r>
-              <a:rPr lang="en-US" dirty="0"/>
-              <a:t>)</a:t>
-            </a:r>
-          </a:p>
-          <a:p>
-            <a:endParaRPr lang="en-US" dirty="0"/>
-          </a:p>
-          <a:p>
-            <a:r>
-              <a:rPr lang="en-US" dirty="0"/>
-              <a:t>Others</a:t>
-            </a:r>
-          </a:p>
-          <a:p>
-            <a:pPr lvl="1"/>
-            <a:r>
-              <a:rPr lang="en-US" dirty="0"/>
-              <a:t>Regression</a:t>
-            </a:r>
-          </a:p>
-          <a:p>
-            <a:pPr lvl="1"/>
-            <a:r>
-              <a:rPr lang="en-US" dirty="0"/>
-              <a:t>k-Nearest Neighbor</a:t>
-            </a:r>
-          </a:p>
-          <a:p>
-            <a:pPr lvl="1"/>
-            <a:r>
-              <a:rPr lang="en-US" dirty="0"/>
-              <a:t>Multiple Imputation</a:t>
-            </a:r>
-            <a:br>
-              <a:rPr lang="en-US" dirty="0"/>
-            </a:br>
-            <a:endParaRPr lang="en-US" dirty="0"/>
+              <a:t>In inference, it is theoretically acceptable to throw away missing data if either (a) data is missing completely at random or (b) your model includes all variables the probability of missingness depends on </a:t>
+            </a:r>
+          </a:p>
+          <a:p>
+            <a:r>
+              <a:rPr lang="en-US" dirty="0"/>
+              <a:t>In prediction, missingness is part of the distribution and will likely be present at test time as well</a:t>
+            </a:r>
           </a:p>
         </p:txBody>
       </p:sp>
     </p:spTree>
     <p:extLst>
       <p:ext uri="{BB962C8B-B14F-4D97-AF65-F5344CB8AC3E}">
-        <p14:creationId xmlns:p14="http://schemas.microsoft.com/office/powerpoint/2010/main" val="1168414506"/>
+        <p14:creationId xmlns:p14="http://schemas.microsoft.com/office/powerpoint/2010/main" val="3504445841"/>
       </p:ext>
     </p:extLst>
   </p:cSld>
@@ -14479,7 +15039,7 @@
           <a:p>
             <a:r>
               <a:rPr lang="en-US" dirty="0"/>
-              <a:t>Imputing – Central Tendency</a:t>
+              <a:t>Imputation</a:t>
             </a:r>
           </a:p>
         </p:txBody>
@@ -14501,37 +15061,25 @@
           <a:p>
             <a:r>
               <a:rPr lang="en-US" dirty="0"/>
-              <a:t>Simple to calculate and computationally fast</a:t>
-            </a:r>
-            <a:br>
-              <a:rPr lang="en-US" dirty="0"/>
-            </a:br>
+              <a:t>Impute (Fill in) missing values based on why you think they may be missing and what you want the model to do with those missing values</a:t>
+            </a:r>
+          </a:p>
+          <a:p>
+            <a:pPr lvl="1"/>
             <a:endParaRPr lang="en-US" dirty="0"/>
           </a:p>
           <a:p>
             <a:r>
               <a:rPr lang="en-US" dirty="0"/>
-              <a:t>Often a reasonable starting point</a:t>
-            </a:r>
-            <a:br>
-              <a:rPr lang="en-US" dirty="0"/>
-            </a:br>
-            <a:endParaRPr lang="en-US" dirty="0"/>
-          </a:p>
-          <a:p>
-            <a:r>
-              <a:rPr lang="en-US" dirty="0"/>
-              <a:t>May be able to capture more nuance by using other, correlated data to help fill in missing values</a:t>
-            </a:r>
-            <a:br>
-              <a:rPr lang="en-US" dirty="0"/>
-            </a:br>
-            <a:endParaRPr lang="en-US" dirty="0"/>
-          </a:p>
-          <a:p>
-            <a:r>
-              <a:rPr lang="en-US" dirty="0"/>
-              <a:t>Under-represents variance/covariance of data</a:t>
+              <a:t>Typically, also add binary feature (dummy) for missing vs not missing in case “</a:t>
+            </a:r>
+            <a:r>
+              <a:rPr lang="en-US" dirty="0" err="1"/>
+              <a:t>missingness</a:t>
+            </a:r>
+            <a:r>
+              <a:rPr lang="en-US" dirty="0"/>
+              <a:t>” is predictive of the outcome</a:t>
             </a:r>
           </a:p>
         </p:txBody>
@@ -14539,91 +15087,13 @@
     </p:spTree>
     <p:extLst>
       <p:ext uri="{BB962C8B-B14F-4D97-AF65-F5344CB8AC3E}">
-        <p14:creationId xmlns:p14="http://schemas.microsoft.com/office/powerpoint/2010/main" val="2396215195"/>
+        <p14:creationId xmlns:p14="http://schemas.microsoft.com/office/powerpoint/2010/main" val="2415355454"/>
       </p:ext>
     </p:extLst>
   </p:cSld>
   <p:clrMapOvr>
     <a:masterClrMapping/>
   </p:clrMapOvr>
-  <p:timing>
-    <p:tnLst>
-      <p:par>
-        <p:cTn id="1" dur="indefinite" restart="never" nodeType="tmRoot">
-          <p:childTnLst>
-            <p:seq concurrent="1" nextAc="seek">
-              <p:cTn id="2" dur="indefinite" nodeType="mainSeq">
-                <p:childTnLst>
-                  <p:par>
-                    <p:cTn id="3" fill="hold">
-                      <p:stCondLst>
-                        <p:cond delay="indefinite"/>
-                      </p:stCondLst>
-                      <p:childTnLst>
-                        <p:par>
-                          <p:cTn id="4" fill="hold">
-                            <p:stCondLst>
-                              <p:cond delay="0"/>
-                            </p:stCondLst>
-                            <p:childTnLst>
-                              <p:par>
-                                <p:cTn id="5" presetID="1" presetClass="entr" presetSubtype="0" fill="hold" grpId="0" nodeType="clickEffect">
-                                  <p:stCondLst>
-                                    <p:cond delay="0"/>
-                                  </p:stCondLst>
-                                  <p:childTnLst>
-                                    <p:set>
-                                      <p:cBhvr>
-                                        <p:cTn id="6" dur="1" fill="hold">
-                                          <p:stCondLst>
-                                            <p:cond delay="0"/>
-                                          </p:stCondLst>
-                                        </p:cTn>
-                                        <p:tgtEl>
-                                          <p:spTgt spid="2"/>
-                                        </p:tgtEl>
-                                        <p:attrNameLst>
-                                          <p:attrName>style.visibility</p:attrName>
-                                        </p:attrNameLst>
-                                      </p:cBhvr>
-                                      <p:to>
-                                        <p:strVal val="visible"/>
-                                      </p:to>
-                                    </p:set>
-                                  </p:childTnLst>
-                                </p:cTn>
-                              </p:par>
-                            </p:childTnLst>
-                          </p:cTn>
-                        </p:par>
-                      </p:childTnLst>
-                    </p:cTn>
-                  </p:par>
-                </p:childTnLst>
-              </p:cTn>
-              <p:prevCondLst>
-                <p:cond evt="onPrev" delay="0">
-                  <p:tgtEl>
-                    <p:sldTgt/>
-                  </p:tgtEl>
-                </p:cond>
-              </p:prevCondLst>
-              <p:nextCondLst>
-                <p:cond evt="onNext" delay="0">
-                  <p:tgtEl>
-                    <p:sldTgt/>
-                  </p:tgtEl>
-                </p:cond>
-              </p:nextCondLst>
-            </p:seq>
-          </p:childTnLst>
-        </p:cTn>
-      </p:par>
-    </p:tnLst>
-    <p:bldLst>
-      <p:bldP spid="2" grpId="0"/>
-    </p:bldLst>
-  </p:timing>
 </p:sld>
 </file>
 
@@ -14661,7 +15131,7 @@
           <a:p>
             <a:r>
               <a:rPr lang="en-US" dirty="0"/>
-              <a:t>Imputing – ML Methods with Missing Data Handling</a:t>
+              <a:t>Imputing Missing Values: Some Options</a:t>
             </a:r>
           </a:p>
         </p:txBody>
@@ -14676,14 +15146,35 @@
             <p:ph type="body" idx="1"/>
           </p:nvPr>
         </p:nvSpPr>
-        <p:spPr/>
+        <p:spPr>
+          <a:xfrm>
+            <a:off x="415600" y="1601179"/>
+            <a:ext cx="11360700" cy="4555200"/>
+          </a:xfrm>
+        </p:spPr>
         <p:txBody>
           <a:bodyPr/>
           <a:lstStyle/>
           <a:p>
-            <a:r>
-              <a:rPr lang="en-US" dirty="0"/>
-              <a:t>Some models have built-in handling of missing data, such as </a:t>
+            <a:pPr marL="76200" indent="0">
+              <a:buNone/>
+            </a:pPr>
+            <a:endParaRPr lang="en-US" dirty="0"/>
+          </a:p>
+          <a:p>
+            <a:r>
+              <a:rPr lang="en-US" dirty="0"/>
+              <a:t>Central Tendency: Mean / Median / Mode</a:t>
+            </a:r>
+            <a:br>
+              <a:rPr lang="en-US" dirty="0"/>
+            </a:br>
+            <a:endParaRPr lang="en-US" dirty="0"/>
+          </a:p>
+          <a:p>
+            <a:r>
+              <a:rPr lang="en-US" dirty="0"/>
+              <a:t>ML methods that handle missing data (e.g., </a:t>
             </a:r>
             <a:r>
               <a:rPr lang="en-US" dirty="0" err="1"/>
@@ -14691,119 +15182,55 @@
             </a:r>
             <a:r>
               <a:rPr lang="en-US" dirty="0"/>
-              <a:t> (which decides which direction to send missing values at each split)</a:t>
+              <a:t>)</a:t>
+            </a:r>
+          </a:p>
+          <a:p>
+            <a:endParaRPr lang="en-US" dirty="0"/>
+          </a:p>
+          <a:p>
+            <a:r>
+              <a:rPr lang="en-US" dirty="0"/>
+              <a:t>Others</a:t>
+            </a:r>
+          </a:p>
+          <a:p>
+            <a:pPr lvl="1"/>
+            <a:r>
+              <a:rPr lang="en-US" dirty="0"/>
+              <a:t>Regression</a:t>
+            </a:r>
+          </a:p>
+          <a:p>
+            <a:pPr lvl="1"/>
+            <a:r>
+              <a:rPr lang="en-US" dirty="0"/>
+              <a:t>k-Nearest Neighbor</a:t>
+            </a:r>
+          </a:p>
+          <a:p>
+            <a:pPr lvl="1"/>
+            <a:r>
+              <a:rPr lang="en-US" dirty="0"/>
+              <a:t>Multiple Imputation</a:t>
             </a:r>
             <a:br>
               <a:rPr lang="en-US" dirty="0"/>
             </a:br>
             <a:endParaRPr lang="en-US" dirty="0"/>
-          </a:p>
-          <a:p>
-            <a:r>
-              <a:rPr lang="en-US" dirty="0"/>
-              <a:t>May not be the best modeling method for your problem, don’t want to be locked into certain type of model</a:t>
-            </a:r>
-            <a:br>
-              <a:rPr lang="en-US" dirty="0"/>
-            </a:br>
-            <a:endParaRPr lang="en-US" dirty="0"/>
-          </a:p>
-          <a:p>
-            <a:r>
-              <a:rPr lang="en-US" dirty="0"/>
-              <a:t>Nevertheless, worth exploring performance of other imputation methods even when using these models as well</a:t>
-            </a:r>
           </a:p>
         </p:txBody>
       </p:sp>
     </p:spTree>
     <p:extLst>
       <p:ext uri="{BB962C8B-B14F-4D97-AF65-F5344CB8AC3E}">
-        <p14:creationId xmlns:p14="http://schemas.microsoft.com/office/powerpoint/2010/main" val="2521997284"/>
+        <p14:creationId xmlns:p14="http://schemas.microsoft.com/office/powerpoint/2010/main" val="1168414506"/>
       </p:ext>
     </p:extLst>
   </p:cSld>
   <p:clrMapOvr>
     <a:masterClrMapping/>
   </p:clrMapOvr>
-  <p:timing>
-    <p:tnLst>
-      <p:par>
-        <p:cTn id="1" dur="indefinite" restart="never" nodeType="tmRoot">
-          <p:childTnLst>
-            <p:seq concurrent="1" nextAc="seek">
-              <p:cTn id="2" dur="indefinite" nodeType="mainSeq">
-                <p:childTnLst>
-                  <p:par>
-                    <p:cTn id="3" fill="hold">
-                      <p:stCondLst>
-                        <p:cond delay="indefinite"/>
-                      </p:stCondLst>
-                      <p:childTnLst>
-                        <p:par>
-                          <p:cTn id="4" fill="hold">
-                            <p:stCondLst>
-                              <p:cond delay="0"/>
-                            </p:stCondLst>
-                            <p:childTnLst>
-                              <p:par>
-                                <p:cTn id="5" presetID="1" presetClass="entr" presetSubtype="0" fill="hold" grpId="0" nodeType="clickEffect">
-                                  <p:stCondLst>
-                                    <p:cond delay="0"/>
-                                  </p:stCondLst>
-                                  <p:childTnLst>
-                                    <p:set>
-                                      <p:cBhvr>
-                                        <p:cTn id="6" dur="1" fill="hold">
-                                          <p:stCondLst>
-                                            <p:cond delay="0"/>
-                                          </p:stCondLst>
-                                        </p:cTn>
-                                        <p:tgtEl>
-                                          <p:spTgt spid="2"/>
-                                        </p:tgtEl>
-                                        <p:attrNameLst>
-                                          <p:attrName>style.visibility</p:attrName>
-                                        </p:attrNameLst>
-                                      </p:cBhvr>
-                                      <p:to>
-                                        <p:strVal val="visible"/>
-                                      </p:to>
-                                    </p:set>
-                                  </p:childTnLst>
-                                </p:cTn>
-                              </p:par>
-                            </p:childTnLst>
-                          </p:cTn>
-                        </p:par>
-                      </p:childTnLst>
-                    </p:cTn>
-                  </p:par>
-                </p:childTnLst>
-              </p:cTn>
-              <p:prevCondLst>
-                <p:cond evt="onPrev" delay="0">
-                  <p:tgtEl>
-                    <p:sldTgt/>
-                  </p:tgtEl>
-                </p:cond>
-              </p:prevCondLst>
-              <p:nextCondLst>
-                <p:cond evt="onNext" delay="0">
-                  <p:tgtEl>
-                    <p:sldTgt/>
-                  </p:tgtEl>
-                </p:cond>
-              </p:nextCondLst>
-            </p:seq>
-          </p:childTnLst>
-        </p:cTn>
-      </p:par>
-    </p:tnLst>
-    <p:bldLst>
-      <p:bldP spid="2" grpId="0"/>
-    </p:bldLst>
-  </p:timing>
 </p:sld>
 </file>
 
@@ -14841,7 +15268,7 @@
           <a:p>
             <a:r>
               <a:rPr lang="en-US" dirty="0"/>
-              <a:t>Imputing – Regression</a:t>
+              <a:t>Imputing – Central Tendency</a:t>
             </a:r>
           </a:p>
         </p:txBody>
@@ -14863,7 +15290,7 @@
           <a:p>
             <a:r>
               <a:rPr lang="en-US" dirty="0"/>
-              <a:t>Make use of information in correlated features, more flexible than central tendency</a:t>
+              <a:t>Simple to calculate and computationally fast</a:t>
             </a:r>
             <a:br>
               <a:rPr lang="en-US" dirty="0"/>
@@ -14873,7 +15300,7 @@
           <a:p>
             <a:r>
               <a:rPr lang="en-US" dirty="0"/>
-              <a:t>However, may not be flexible enough to capture complex relationships or interactions</a:t>
+              <a:t>Often a reasonable starting point</a:t>
             </a:r>
             <a:br>
               <a:rPr lang="en-US" dirty="0"/>
@@ -14883,7 +15310,7 @@
           <a:p>
             <a:r>
               <a:rPr lang="en-US" dirty="0"/>
-              <a:t>May be somewhat more computationally expensive </a:t>
+              <a:t>May be able to capture more nuance by using other, correlated data to help fill in missing values</a:t>
             </a:r>
             <a:br>
               <a:rPr lang="en-US" dirty="0"/>
@@ -14893,7 +15320,7 @@
           <a:p>
             <a:r>
               <a:rPr lang="en-US" dirty="0"/>
-              <a:t>Generally will still underestimate variation in data</a:t>
+              <a:t>Under-represents variance/covariance of data</a:t>
             </a:r>
           </a:p>
         </p:txBody>
@@ -14901,7 +15328,7 @@
     </p:spTree>
     <p:extLst>
       <p:ext uri="{BB962C8B-B14F-4D97-AF65-F5344CB8AC3E}">
-        <p14:creationId xmlns:p14="http://schemas.microsoft.com/office/powerpoint/2010/main" val="3808227576"/>
+        <p14:creationId xmlns:p14="http://schemas.microsoft.com/office/powerpoint/2010/main" val="2396215195"/>
       </p:ext>
     </p:extLst>
   </p:cSld>
@@ -15023,7 +15450,7 @@
           <a:p>
             <a:r>
               <a:rPr lang="en-US" dirty="0"/>
-              <a:t>Imputing – k-Nearest Neighbor</a:t>
+              <a:t>Imputing – ML Methods with Missing Data Handling</a:t>
             </a:r>
           </a:p>
         </p:txBody>
@@ -15045,7 +15472,15 @@
           <a:p>
             <a:r>
               <a:rPr lang="en-US" dirty="0"/>
-              <a:t>More flexible option, capture more complexity in relationships in data</a:t>
+              <a:t>Some models have built-in handling of missing data, such as </a:t>
+            </a:r>
+            <a:r>
+              <a:rPr lang="en-US" dirty="0" err="1"/>
+              <a:t>xgboost</a:t>
+            </a:r>
+            <a:r>
+              <a:rPr lang="en-US" dirty="0"/>
+              <a:t> (which decides which direction to send missing values at each split)</a:t>
             </a:r>
             <a:br>
               <a:rPr lang="en-US" dirty="0"/>
@@ -15055,7 +15490,7 @@
           <a:p>
             <a:r>
               <a:rPr lang="en-US" dirty="0"/>
-              <a:t>Difficult to choose appropriate distance metric, value of k</a:t>
+              <a:t>May not be the best modeling method for your problem, don’t want to be locked into certain type of model</a:t>
             </a:r>
             <a:br>
               <a:rPr lang="en-US" dirty="0"/>
@@ -15065,17 +15500,7 @@
           <a:p>
             <a:r>
               <a:rPr lang="en-US" dirty="0"/>
-              <a:t>More computationally expensive than other methods of imputation</a:t>
-            </a:r>
-            <a:br>
-              <a:rPr lang="en-US" dirty="0"/>
-            </a:br>
-            <a:endParaRPr lang="en-US" dirty="0"/>
-          </a:p>
-          <a:p>
-            <a:r>
-              <a:rPr lang="en-US" dirty="0"/>
-              <a:t>Requires entire training set to calculate imputed values for new examples</a:t>
+              <a:t>Nevertheless, worth exploring performance of other imputation methods even when using these models as well</a:t>
             </a:r>
           </a:p>
         </p:txBody>
@@ -15083,7 +15508,7 @@
     </p:spTree>
     <p:extLst>
       <p:ext uri="{BB962C8B-B14F-4D97-AF65-F5344CB8AC3E}">
-        <p14:creationId xmlns:p14="http://schemas.microsoft.com/office/powerpoint/2010/main" val="3729575760"/>
+        <p14:creationId xmlns:p14="http://schemas.microsoft.com/office/powerpoint/2010/main" val="2521997284"/>
       </p:ext>
     </p:extLst>
   </p:cSld>
@@ -15205,7 +15630,7 @@
           <a:p>
             <a:r>
               <a:rPr lang="en-US" dirty="0"/>
-              <a:t>Imputing – Multiple Imputation</a:t>
+              <a:t>Imputing – Regression</a:t>
             </a:r>
           </a:p>
         </p:txBody>
@@ -15227,7 +15652,7 @@
           <a:p>
             <a:r>
               <a:rPr lang="en-US" dirty="0"/>
-              <a:t>Create multiple “complete” datasets with different values using different regression models</a:t>
+              <a:t>Make use of information in correlated features, more flexible than central tendency</a:t>
             </a:r>
             <a:br>
               <a:rPr lang="en-US" dirty="0"/>
@@ -15237,7 +15662,7 @@
           <a:p>
             <a:r>
               <a:rPr lang="en-US" dirty="0"/>
-              <a:t>Helps analyze sensitivity to handling of missing values</a:t>
+              <a:t>However, may not be flexible enough to capture complex relationships or interactions</a:t>
             </a:r>
             <a:br>
               <a:rPr lang="en-US" dirty="0"/>
@@ -15247,7 +15672,7 @@
           <a:p>
             <a:r>
               <a:rPr lang="en-US" dirty="0"/>
-              <a:t>Much more computationally expensive, both for imputation and downstream modeling</a:t>
+              <a:t>May be somewhat more computationally expensive </a:t>
             </a:r>
             <a:br>
               <a:rPr lang="en-US" dirty="0"/>
@@ -15257,7 +15682,7 @@
           <a:p>
             <a:r>
               <a:rPr lang="en-US" dirty="0"/>
-              <a:t>Can provide better representation of variability in data</a:t>
+              <a:t>Generally will still underestimate variation in data</a:t>
             </a:r>
           </a:p>
         </p:txBody>
@@ -15265,7 +15690,7 @@
     </p:spTree>
     <p:extLst>
       <p:ext uri="{BB962C8B-B14F-4D97-AF65-F5344CB8AC3E}">
-        <p14:creationId xmlns:p14="http://schemas.microsoft.com/office/powerpoint/2010/main" val="2069799902"/>
+        <p14:creationId xmlns:p14="http://schemas.microsoft.com/office/powerpoint/2010/main" val="3808227576"/>
       </p:ext>
     </p:extLst>
   </p:cSld>
@@ -15372,6 +15797,370 @@
       </p:grpSpPr>
       <p:sp>
         <p:nvSpPr>
+          <p:cNvPr id="3" name="Title 2"/>
+          <p:cNvSpPr>
+            <a:spLocks noGrp="1"/>
+          </p:cNvSpPr>
+          <p:nvPr>
+            <p:ph type="title"/>
+          </p:nvPr>
+        </p:nvSpPr>
+        <p:spPr/>
+        <p:txBody>
+          <a:bodyPr/>
+          <a:lstStyle/>
+          <a:p>
+            <a:r>
+              <a:rPr lang="en-US" dirty="0"/>
+              <a:t>Imputing – k-Nearest Neighbor</a:t>
+            </a:r>
+          </a:p>
+        </p:txBody>
+      </p:sp>
+      <p:sp>
+        <p:nvSpPr>
+          <p:cNvPr id="2" name="Content Placeholder 1"/>
+          <p:cNvSpPr>
+            <a:spLocks noGrp="1"/>
+          </p:cNvSpPr>
+          <p:nvPr>
+            <p:ph type="body" idx="1"/>
+          </p:nvPr>
+        </p:nvSpPr>
+        <p:spPr/>
+        <p:txBody>
+          <a:bodyPr/>
+          <a:lstStyle/>
+          <a:p>
+            <a:r>
+              <a:rPr lang="en-US" dirty="0"/>
+              <a:t>More flexible option, capture more complexity in relationships in data</a:t>
+            </a:r>
+            <a:br>
+              <a:rPr lang="en-US" dirty="0"/>
+            </a:br>
+            <a:endParaRPr lang="en-US" dirty="0"/>
+          </a:p>
+          <a:p>
+            <a:r>
+              <a:rPr lang="en-US" dirty="0"/>
+              <a:t>Difficult to choose appropriate distance metric, value of k</a:t>
+            </a:r>
+            <a:br>
+              <a:rPr lang="en-US" dirty="0"/>
+            </a:br>
+            <a:endParaRPr lang="en-US" dirty="0"/>
+          </a:p>
+          <a:p>
+            <a:r>
+              <a:rPr lang="en-US" dirty="0"/>
+              <a:t>More computationally expensive than other methods of imputation</a:t>
+            </a:r>
+            <a:br>
+              <a:rPr lang="en-US" dirty="0"/>
+            </a:br>
+            <a:endParaRPr lang="en-US" dirty="0"/>
+          </a:p>
+          <a:p>
+            <a:r>
+              <a:rPr lang="en-US" dirty="0"/>
+              <a:t>Requires entire training set to calculate imputed values for new examples</a:t>
+            </a:r>
+          </a:p>
+        </p:txBody>
+      </p:sp>
+    </p:spTree>
+    <p:extLst>
+      <p:ext uri="{BB962C8B-B14F-4D97-AF65-F5344CB8AC3E}">
+        <p14:creationId xmlns:p14="http://schemas.microsoft.com/office/powerpoint/2010/main" val="3729575760"/>
+      </p:ext>
+    </p:extLst>
+  </p:cSld>
+  <p:clrMapOvr>
+    <a:masterClrMapping/>
+  </p:clrMapOvr>
+  <p:timing>
+    <p:tnLst>
+      <p:par>
+        <p:cTn id="1" dur="indefinite" restart="never" nodeType="tmRoot">
+          <p:childTnLst>
+            <p:seq concurrent="1" nextAc="seek">
+              <p:cTn id="2" dur="indefinite" nodeType="mainSeq">
+                <p:childTnLst>
+                  <p:par>
+                    <p:cTn id="3" fill="hold">
+                      <p:stCondLst>
+                        <p:cond delay="indefinite"/>
+                      </p:stCondLst>
+                      <p:childTnLst>
+                        <p:par>
+                          <p:cTn id="4" fill="hold">
+                            <p:stCondLst>
+                              <p:cond delay="0"/>
+                            </p:stCondLst>
+                            <p:childTnLst>
+                              <p:par>
+                                <p:cTn id="5" presetID="1" presetClass="entr" presetSubtype="0" fill="hold" grpId="0" nodeType="clickEffect">
+                                  <p:stCondLst>
+                                    <p:cond delay="0"/>
+                                  </p:stCondLst>
+                                  <p:childTnLst>
+                                    <p:set>
+                                      <p:cBhvr>
+                                        <p:cTn id="6" dur="1" fill="hold">
+                                          <p:stCondLst>
+                                            <p:cond delay="0"/>
+                                          </p:stCondLst>
+                                        </p:cTn>
+                                        <p:tgtEl>
+                                          <p:spTgt spid="2"/>
+                                        </p:tgtEl>
+                                        <p:attrNameLst>
+                                          <p:attrName>style.visibility</p:attrName>
+                                        </p:attrNameLst>
+                                      </p:cBhvr>
+                                      <p:to>
+                                        <p:strVal val="visible"/>
+                                      </p:to>
+                                    </p:set>
+                                  </p:childTnLst>
+                                </p:cTn>
+                              </p:par>
+                            </p:childTnLst>
+                          </p:cTn>
+                        </p:par>
+                      </p:childTnLst>
+                    </p:cTn>
+                  </p:par>
+                </p:childTnLst>
+              </p:cTn>
+              <p:prevCondLst>
+                <p:cond evt="onPrev" delay="0">
+                  <p:tgtEl>
+                    <p:sldTgt/>
+                  </p:tgtEl>
+                </p:cond>
+              </p:prevCondLst>
+              <p:nextCondLst>
+                <p:cond evt="onNext" delay="0">
+                  <p:tgtEl>
+                    <p:sldTgt/>
+                  </p:tgtEl>
+                </p:cond>
+              </p:nextCondLst>
+            </p:seq>
+          </p:childTnLst>
+        </p:cTn>
+      </p:par>
+    </p:tnLst>
+    <p:bldLst>
+      <p:bldP spid="2" grpId="0"/>
+    </p:bldLst>
+  </p:timing>
+</p:sld>
+</file>
+
+<file path=ppt/slides/slide37.xml><?xml version="1.0" encoding="utf-8"?>
+<p:sld xmlns:a="http://schemas.openxmlformats.org/drawingml/2006/main" xmlns:r="http://schemas.openxmlformats.org/officeDocument/2006/relationships" xmlns:p="http://schemas.openxmlformats.org/presentationml/2006/main">
+  <p:cSld>
+    <p:spTree>
+      <p:nvGrpSpPr>
+        <p:cNvPr id="1" name=""/>
+        <p:cNvGrpSpPr/>
+        <p:nvPr/>
+      </p:nvGrpSpPr>
+      <p:grpSpPr>
+        <a:xfrm>
+          <a:off x="0" y="0"/>
+          <a:ext cx="0" cy="0"/>
+          <a:chOff x="0" y="0"/>
+          <a:chExt cx="0" cy="0"/>
+        </a:xfrm>
+      </p:grpSpPr>
+      <p:sp>
+        <p:nvSpPr>
+          <p:cNvPr id="3" name="Title 2"/>
+          <p:cNvSpPr>
+            <a:spLocks noGrp="1"/>
+          </p:cNvSpPr>
+          <p:nvPr>
+            <p:ph type="title"/>
+          </p:nvPr>
+        </p:nvSpPr>
+        <p:spPr/>
+        <p:txBody>
+          <a:bodyPr/>
+          <a:lstStyle/>
+          <a:p>
+            <a:r>
+              <a:rPr lang="en-US" dirty="0"/>
+              <a:t>Imputing – Multiple Imputation</a:t>
+            </a:r>
+          </a:p>
+        </p:txBody>
+      </p:sp>
+      <p:sp>
+        <p:nvSpPr>
+          <p:cNvPr id="2" name="Content Placeholder 1"/>
+          <p:cNvSpPr>
+            <a:spLocks noGrp="1"/>
+          </p:cNvSpPr>
+          <p:nvPr>
+            <p:ph type="body" idx="1"/>
+          </p:nvPr>
+        </p:nvSpPr>
+        <p:spPr/>
+        <p:txBody>
+          <a:bodyPr/>
+          <a:lstStyle/>
+          <a:p>
+            <a:r>
+              <a:rPr lang="en-US" dirty="0"/>
+              <a:t>Create multiple “complete” datasets with different values using different regression models</a:t>
+            </a:r>
+            <a:br>
+              <a:rPr lang="en-US" dirty="0"/>
+            </a:br>
+            <a:endParaRPr lang="en-US" dirty="0"/>
+          </a:p>
+          <a:p>
+            <a:r>
+              <a:rPr lang="en-US" dirty="0"/>
+              <a:t>Helps analyze sensitivity to handling of missing values</a:t>
+            </a:r>
+            <a:br>
+              <a:rPr lang="en-US" dirty="0"/>
+            </a:br>
+            <a:endParaRPr lang="en-US" dirty="0"/>
+          </a:p>
+          <a:p>
+            <a:r>
+              <a:rPr lang="en-US" dirty="0"/>
+              <a:t>Much more computationally expensive, both for imputation and downstream modeling</a:t>
+            </a:r>
+            <a:br>
+              <a:rPr lang="en-US" dirty="0"/>
+            </a:br>
+            <a:endParaRPr lang="en-US" dirty="0"/>
+          </a:p>
+          <a:p>
+            <a:r>
+              <a:rPr lang="en-US" dirty="0"/>
+              <a:t>Can provide better representation of variability in data</a:t>
+            </a:r>
+          </a:p>
+        </p:txBody>
+      </p:sp>
+    </p:spTree>
+    <p:extLst>
+      <p:ext uri="{BB962C8B-B14F-4D97-AF65-F5344CB8AC3E}">
+        <p14:creationId xmlns:p14="http://schemas.microsoft.com/office/powerpoint/2010/main" val="2069799902"/>
+      </p:ext>
+    </p:extLst>
+  </p:cSld>
+  <p:clrMapOvr>
+    <a:masterClrMapping/>
+  </p:clrMapOvr>
+  <p:timing>
+    <p:tnLst>
+      <p:par>
+        <p:cTn id="1" dur="indefinite" restart="never" nodeType="tmRoot">
+          <p:childTnLst>
+            <p:seq concurrent="1" nextAc="seek">
+              <p:cTn id="2" dur="indefinite" nodeType="mainSeq">
+                <p:childTnLst>
+                  <p:par>
+                    <p:cTn id="3" fill="hold">
+                      <p:stCondLst>
+                        <p:cond delay="indefinite"/>
+                      </p:stCondLst>
+                      <p:childTnLst>
+                        <p:par>
+                          <p:cTn id="4" fill="hold">
+                            <p:stCondLst>
+                              <p:cond delay="0"/>
+                            </p:stCondLst>
+                            <p:childTnLst>
+                              <p:par>
+                                <p:cTn id="5" presetID="1" presetClass="entr" presetSubtype="0" fill="hold" grpId="0" nodeType="clickEffect">
+                                  <p:stCondLst>
+                                    <p:cond delay="0"/>
+                                  </p:stCondLst>
+                                  <p:childTnLst>
+                                    <p:set>
+                                      <p:cBhvr>
+                                        <p:cTn id="6" dur="1" fill="hold">
+                                          <p:stCondLst>
+                                            <p:cond delay="0"/>
+                                          </p:stCondLst>
+                                        </p:cTn>
+                                        <p:tgtEl>
+                                          <p:spTgt spid="2"/>
+                                        </p:tgtEl>
+                                        <p:attrNameLst>
+                                          <p:attrName>style.visibility</p:attrName>
+                                        </p:attrNameLst>
+                                      </p:cBhvr>
+                                      <p:to>
+                                        <p:strVal val="visible"/>
+                                      </p:to>
+                                    </p:set>
+                                  </p:childTnLst>
+                                </p:cTn>
+                              </p:par>
+                            </p:childTnLst>
+                          </p:cTn>
+                        </p:par>
+                      </p:childTnLst>
+                    </p:cTn>
+                  </p:par>
+                </p:childTnLst>
+              </p:cTn>
+              <p:prevCondLst>
+                <p:cond evt="onPrev" delay="0">
+                  <p:tgtEl>
+                    <p:sldTgt/>
+                  </p:tgtEl>
+                </p:cond>
+              </p:prevCondLst>
+              <p:nextCondLst>
+                <p:cond evt="onNext" delay="0">
+                  <p:tgtEl>
+                    <p:sldTgt/>
+                  </p:tgtEl>
+                </p:cond>
+              </p:nextCondLst>
+            </p:seq>
+          </p:childTnLst>
+        </p:cTn>
+      </p:par>
+    </p:tnLst>
+    <p:bldLst>
+      <p:bldP spid="2" grpId="0"/>
+    </p:bldLst>
+  </p:timing>
+</p:sld>
+</file>
+
+<file path=ppt/slides/slide38.xml><?xml version="1.0" encoding="utf-8"?>
+<p:sld xmlns:a="http://schemas.openxmlformats.org/drawingml/2006/main" xmlns:r="http://schemas.openxmlformats.org/officeDocument/2006/relationships" xmlns:p="http://schemas.openxmlformats.org/presentationml/2006/main">
+  <p:cSld>
+    <p:spTree>
+      <p:nvGrpSpPr>
+        <p:cNvPr id="1" name=""/>
+        <p:cNvGrpSpPr/>
+        <p:nvPr/>
+      </p:nvGrpSpPr>
+      <p:grpSpPr>
+        <a:xfrm>
+          <a:off x="0" y="0"/>
+          <a:ext cx="0" cy="0"/>
+          <a:chOff x="0" y="0"/>
+          <a:chExt cx="0" cy="0"/>
+        </a:xfrm>
+      </p:grpSpPr>
+      <p:sp>
+        <p:nvSpPr>
           <p:cNvPr id="2" name="Title 1">
             <a:extLst>
               <a:ext uri="{FF2B5EF4-FFF2-40B4-BE49-F238E27FC236}">
@@ -15466,7 +16255,7 @@
 </p:sld>
 </file>
 
-<file path=ppt/slides/slide37.xml><?xml version="1.0" encoding="utf-8"?>
+<file path=ppt/slides/slide39.xml><?xml version="1.0" encoding="utf-8"?>
 <p:sld xmlns:a="http://schemas.openxmlformats.org/drawingml/2006/main" xmlns:r="http://schemas.openxmlformats.org/officeDocument/2006/relationships" xmlns:p="http://schemas.openxmlformats.org/presentationml/2006/main">
   <p:cSld>
     <p:spTree>
@@ -15549,7 +16338,260 @@
 </p:sld>
 </file>
 
-<file path=ppt/slides/slide38.xml><?xml version="1.0" encoding="utf-8"?>
+<file path=ppt/slides/slide4.xml><?xml version="1.0" encoding="utf-8"?>
+<p:sld xmlns:a="http://schemas.openxmlformats.org/drawingml/2006/main" xmlns:r="http://schemas.openxmlformats.org/officeDocument/2006/relationships" xmlns:p="http://schemas.openxmlformats.org/presentationml/2006/main">
+  <p:cSld>
+    <p:spTree>
+      <p:nvGrpSpPr>
+        <p:cNvPr id="1" name=""/>
+        <p:cNvGrpSpPr/>
+        <p:nvPr/>
+      </p:nvGrpSpPr>
+      <p:grpSpPr>
+        <a:xfrm>
+          <a:off x="0" y="0"/>
+          <a:ext cx="0" cy="0"/>
+          <a:chOff x="0" y="0"/>
+          <a:chExt cx="0" cy="0"/>
+        </a:xfrm>
+      </p:grpSpPr>
+      <p:sp>
+        <p:nvSpPr>
+          <p:cNvPr id="2" name="Title 1">
+            <a:extLst>
+              <a:ext uri="{FF2B5EF4-FFF2-40B4-BE49-F238E27FC236}">
+                <a16:creationId xmlns:a16="http://schemas.microsoft.com/office/drawing/2014/main" id="{21359BA9-BA2B-D148-89DA-A99081B1FF81}"/>
+              </a:ext>
+            </a:extLst>
+          </p:cNvPr>
+          <p:cNvSpPr>
+            <a:spLocks noGrp="1"/>
+          </p:cNvSpPr>
+          <p:nvPr>
+            <p:ph type="title"/>
+          </p:nvPr>
+        </p:nvSpPr>
+        <p:spPr/>
+        <p:txBody>
+          <a:bodyPr/>
+          <a:lstStyle/>
+          <a:p>
+            <a:r>
+              <a:rPr lang="en-US" dirty="0"/>
+              <a:t>Recap from Metrics and Update Assignment 2</a:t>
+            </a:r>
+          </a:p>
+        </p:txBody>
+      </p:sp>
+      <p:sp>
+        <p:nvSpPr>
+          <p:cNvPr id="3" name="Text Placeholder 2">
+            <a:extLst>
+              <a:ext uri="{FF2B5EF4-FFF2-40B4-BE49-F238E27FC236}">
+                <a16:creationId xmlns:a16="http://schemas.microsoft.com/office/drawing/2014/main" id="{DDA03E0F-5F3D-5B4D-8232-BF72B84A198E}"/>
+              </a:ext>
+            </a:extLst>
+          </p:cNvPr>
+          <p:cNvSpPr>
+            <a:spLocks noGrp="1"/>
+          </p:cNvSpPr>
+          <p:nvPr>
+            <p:ph type="body" idx="1"/>
+          </p:nvPr>
+        </p:nvSpPr>
+        <p:spPr/>
+        <p:txBody>
+          <a:bodyPr/>
+          <a:lstStyle/>
+          <a:p>
+            <a:pPr marL="76200" indent="0">
+              <a:buNone/>
+            </a:pPr>
+            <a:endParaRPr lang="en-US" dirty="0"/>
+          </a:p>
+        </p:txBody>
+      </p:sp>
+    </p:spTree>
+    <p:extLst>
+      <p:ext uri="{BB962C8B-B14F-4D97-AF65-F5344CB8AC3E}">
+        <p14:creationId xmlns:p14="http://schemas.microsoft.com/office/powerpoint/2010/main" val="1721185332"/>
+      </p:ext>
+    </p:extLst>
+  </p:cSld>
+  <p:clrMapOvr>
+    <a:masterClrMapping/>
+  </p:clrMapOvr>
+  <p:timing>
+    <p:tnLst>
+      <p:par>
+        <p:cTn id="1" dur="indefinite" restart="never" nodeType="tmRoot">
+          <p:childTnLst>
+            <p:seq concurrent="1" nextAc="seek">
+              <p:cTn id="2" dur="indefinite" nodeType="mainSeq">
+                <p:childTnLst>
+                  <p:par>
+                    <p:cTn id="3" fill="hold">
+                      <p:stCondLst>
+                        <p:cond delay="indefinite"/>
+                      </p:stCondLst>
+                      <p:childTnLst>
+                        <p:par>
+                          <p:cTn id="4" fill="hold">
+                            <p:stCondLst>
+                              <p:cond delay="0"/>
+                            </p:stCondLst>
+                            <p:childTnLst>
+                              <p:par>
+                                <p:cTn id="5" presetID="1" presetClass="entr" presetSubtype="0" fill="hold" grpId="0" nodeType="clickEffect" nodePh="1">
+                                  <p:stCondLst>
+                                    <p:cond delay="0"/>
+                                  </p:stCondLst>
+                                  <p:endCondLst>
+                                    <p:cond evt="begin" delay="0">
+                                      <p:tn val="5"/>
+                                    </p:cond>
+                                  </p:endCondLst>
+                                  <p:childTnLst>
+                                    <p:set>
+                                      <p:cBhvr>
+                                        <p:cTn id="6" dur="1" fill="hold">
+                                          <p:stCondLst>
+                                            <p:cond delay="0"/>
+                                          </p:stCondLst>
+                                        </p:cTn>
+                                        <p:tgtEl>
+                                          <p:spTgt spid="3">
+                                            <p:txEl>
+                                              <p:pRg st="0" end="0"/>
+                                            </p:txEl>
+                                          </p:spTgt>
+                                        </p:tgtEl>
+                                        <p:attrNameLst>
+                                          <p:attrName>style.visibility</p:attrName>
+                                        </p:attrNameLst>
+                                      </p:cBhvr>
+                                      <p:to>
+                                        <p:strVal val="visible"/>
+                                      </p:to>
+                                    </p:set>
+                                  </p:childTnLst>
+                                </p:cTn>
+                              </p:par>
+                            </p:childTnLst>
+                          </p:cTn>
+                        </p:par>
+                      </p:childTnLst>
+                    </p:cTn>
+                  </p:par>
+                </p:childTnLst>
+              </p:cTn>
+              <p:prevCondLst>
+                <p:cond evt="onPrev" delay="0">
+                  <p:tgtEl>
+                    <p:sldTgt/>
+                  </p:tgtEl>
+                </p:cond>
+              </p:prevCondLst>
+              <p:nextCondLst>
+                <p:cond evt="onNext" delay="0">
+                  <p:tgtEl>
+                    <p:sldTgt/>
+                  </p:tgtEl>
+                </p:cond>
+              </p:nextCondLst>
+            </p:seq>
+          </p:childTnLst>
+        </p:cTn>
+      </p:par>
+    </p:tnLst>
+    <p:bldLst>
+      <p:bldP spid="3" grpId="0" build="p"/>
+    </p:bldLst>
+  </p:timing>
+</p:sld>
+</file>
+
+<file path=ppt/slides/slide40.xml><?xml version="1.0" encoding="utf-8"?>
+<p:sld xmlns:a="http://schemas.openxmlformats.org/drawingml/2006/main" xmlns:r="http://schemas.openxmlformats.org/officeDocument/2006/relationships" xmlns:p="http://schemas.openxmlformats.org/presentationml/2006/main">
+  <p:cSld>
+    <p:spTree>
+      <p:nvGrpSpPr>
+        <p:cNvPr id="1" name=""/>
+        <p:cNvGrpSpPr/>
+        <p:nvPr/>
+      </p:nvGrpSpPr>
+      <p:grpSpPr>
+        <a:xfrm>
+          <a:off x="0" y="0"/>
+          <a:ext cx="0" cy="0"/>
+          <a:chOff x="0" y="0"/>
+          <a:chExt cx="0" cy="0"/>
+        </a:xfrm>
+      </p:grpSpPr>
+      <p:sp>
+        <p:nvSpPr>
+          <p:cNvPr id="2" name="Title 1">
+            <a:extLst>
+              <a:ext uri="{FF2B5EF4-FFF2-40B4-BE49-F238E27FC236}">
+                <a16:creationId xmlns:a16="http://schemas.microsoft.com/office/drawing/2014/main" id="{05152530-FEC1-F60E-2D5D-3947303C64E4}"/>
+              </a:ext>
+            </a:extLst>
+          </p:cNvPr>
+          <p:cNvSpPr>
+            <a:spLocks noGrp="1"/>
+          </p:cNvSpPr>
+          <p:nvPr>
+            <p:ph type="title"/>
+          </p:nvPr>
+        </p:nvSpPr>
+        <p:spPr/>
+        <p:txBody>
+          <a:bodyPr/>
+          <a:lstStyle/>
+          <a:p>
+            <a:endParaRPr lang="en-US" dirty="0"/>
+          </a:p>
+        </p:txBody>
+      </p:sp>
+      <p:sp>
+        <p:nvSpPr>
+          <p:cNvPr id="3" name="Text Placeholder 2">
+            <a:extLst>
+              <a:ext uri="{FF2B5EF4-FFF2-40B4-BE49-F238E27FC236}">
+                <a16:creationId xmlns:a16="http://schemas.microsoft.com/office/drawing/2014/main" id="{00EF9F2B-2D42-4D7A-3D90-4EAE7EBCE4BF}"/>
+              </a:ext>
+            </a:extLst>
+          </p:cNvPr>
+          <p:cNvSpPr>
+            <a:spLocks noGrp="1"/>
+          </p:cNvSpPr>
+          <p:nvPr>
+            <p:ph type="body" idx="1"/>
+          </p:nvPr>
+        </p:nvSpPr>
+        <p:spPr/>
+        <p:txBody>
+          <a:bodyPr/>
+          <a:lstStyle/>
+          <a:p>
+            <a:endParaRPr lang="en-US"/>
+          </a:p>
+        </p:txBody>
+      </p:sp>
+    </p:spTree>
+    <p:extLst>
+      <p:ext uri="{BB962C8B-B14F-4D97-AF65-F5344CB8AC3E}">
+        <p14:creationId xmlns:p14="http://schemas.microsoft.com/office/powerpoint/2010/main" val="4262616857"/>
+      </p:ext>
+    </p:extLst>
+  </p:cSld>
+  <p:clrMapOvr>
+    <a:masterClrMapping/>
+  </p:clrMapOvr>
+</p:sld>
+</file>
+
+<file path=ppt/slides/slide41.xml><?xml version="1.0" encoding="utf-8"?>
 <p:sld xmlns:a="http://schemas.openxmlformats.org/drawingml/2006/main" xmlns:r="http://schemas.openxmlformats.org/officeDocument/2006/relationships" xmlns:p="http://schemas.openxmlformats.org/presentationml/2006/main">
   <p:cSld>
     <p:spTree>
@@ -15668,7 +16710,7 @@
 </p:sld>
 </file>
 
-<file path=ppt/slides/slide4.xml><?xml version="1.0" encoding="utf-8"?>
+<file path=ppt/slides/slide5.xml><?xml version="1.0" encoding="utf-8"?>
 <p:sld xmlns:a="http://schemas.openxmlformats.org/drawingml/2006/main" xmlns:r="http://schemas.openxmlformats.org/officeDocument/2006/relationships" xmlns:p="http://schemas.openxmlformats.org/presentationml/2006/main">
   <p:cSld>
     <p:spTree>
@@ -16106,7 +17148,7 @@
 </p:sld>
 </file>
 
-<file path=ppt/slides/slide5.xml><?xml version="1.0" encoding="utf-8"?>
+<file path=ppt/slides/slide6.xml><?xml version="1.0" encoding="utf-8"?>
 <p:sld xmlns:a="http://schemas.openxmlformats.org/drawingml/2006/main" xmlns:r="http://schemas.openxmlformats.org/officeDocument/2006/relationships" xmlns:p="http://schemas.openxmlformats.org/presentationml/2006/main">
   <p:cSld>
     <p:spTree>
@@ -16150,14 +17192,6 @@
           <a:lstStyle/>
           <a:p>
             <a:pPr algn="ctr"/>
-            <a:r>
-              <a:rPr lang="en-US" b="1" dirty="0" err="1"/>
-              <a:t>slido.com</a:t>
-            </a:r>
-            <a:r>
-              <a:rPr lang="en-US" b="1" dirty="0"/>
-              <a:t>/10718</a:t>
-            </a:r>
             <a:br>
               <a:rPr lang="en-US" dirty="0"/>
             </a:br>
@@ -16732,10 +17766,10 @@
       </p:sp>
       <p:pic>
         <p:nvPicPr>
-          <p:cNvPr id="5" name="Picture 4">
+          <p:cNvPr id="2" name="Picture 1">
             <a:extLst>
               <a:ext uri="{FF2B5EF4-FFF2-40B4-BE49-F238E27FC236}">
-                <a16:creationId xmlns:a16="http://schemas.microsoft.com/office/drawing/2014/main" id="{2361AD32-D689-6108-2A34-7E79136546A6}"/>
+                <a16:creationId xmlns:a16="http://schemas.microsoft.com/office/drawing/2014/main" id="{87513B85-80AF-E463-AAAD-7D64E1D2888A}"/>
               </a:ext>
             </a:extLst>
           </p:cNvPr>
@@ -16752,8 +17786,8 @@
         </p:blipFill>
         <p:spPr>
           <a:xfrm>
-            <a:off x="804381" y="4303717"/>
-            <a:ext cx="2278383" cy="2338871"/>
+            <a:off x="292828" y="4239133"/>
+            <a:ext cx="2425700" cy="5232400"/>
           </a:xfrm>
           <a:prstGeom prst="rect">
             <a:avLst/>
@@ -16773,7 +17807,532 @@
 </p:sld>
 </file>
 
-<file path=ppt/slides/slide6.xml><?xml version="1.0" encoding="utf-8"?>
+<file path=ppt/slides/slide7.xml><?xml version="1.0" encoding="utf-8"?>
+<p:sld xmlns:a="http://schemas.openxmlformats.org/drawingml/2006/main" xmlns:r="http://schemas.openxmlformats.org/officeDocument/2006/relationships" xmlns:p="http://schemas.openxmlformats.org/presentationml/2006/main" showMasterSp="0">
+  <p:cSld>
+    <p:bg>
+      <p:bgPr>
+        <a:solidFill>
+          <a:srgbClr val="FFFFFF"/>
+        </a:solidFill>
+        <a:effectLst/>
+      </p:bgPr>
+    </p:bg>
+    <p:spTree>
+      <p:nvGrpSpPr>
+        <p:cNvPr id="1" name=""/>
+        <p:cNvGrpSpPr/>
+        <p:nvPr/>
+      </p:nvGrpSpPr>
+      <p:grpSpPr>
+        <a:xfrm>
+          <a:off x="0" y="0"/>
+          <a:ext cx="0" cy="0"/>
+          <a:chOff x="0" y="0"/>
+          <a:chExt cx="0" cy="0"/>
+        </a:xfrm>
+      </p:grpSpPr>
+      <p:sp>
+        <p:nvSpPr>
+          <p:cNvPr id="2" name="Rectangle 1">
+            <a:extLst>
+              <a:ext uri="{FF2B5EF4-FFF2-40B4-BE49-F238E27FC236}">
+                <a16:creationId xmlns:a16="http://schemas.microsoft.com/office/drawing/2014/main" id="{395E2B55-2879-7968-BD8D-EA209F354F96}"/>
+              </a:ext>
+            </a:extLst>
+          </p:cNvPr>
+          <p:cNvSpPr/>
+          <p:nvPr>
+            <p:custDataLst>
+              <p:tags r:id="rId2"/>
+            </p:custDataLst>
+          </p:nvPr>
+        </p:nvSpPr>
+        <p:spPr>
+          <a:xfrm>
+            <a:off x="444693" y="1742703"/>
+            <a:ext cx="2371696" cy="2371696"/>
+          </a:xfrm>
+          <a:prstGeom prst="rect">
+            <a:avLst/>
+          </a:prstGeom>
+          <a:blipFill>
+            <a:blip r:embed="rId5">
+              <a:extLst>
+                <a:ext uri="{96DAC541-7B7A-43D3-8B79-37D633B846F1}">
+                  <asvg:svgBlip xmlns:asvg="http://schemas.microsoft.com/office/drawing/2016/SVG/main" r:embed="rId6"/>
+                </a:ext>
+              </a:extLst>
+            </a:blip>
+            <a:stretch>
+              <a:fillRect/>
+            </a:stretch>
+          </a:blipFill>
+          <a:ln>
+            <a:solidFill>
+              <a:srgbClr val="FFFFFF"/>
+            </a:solidFill>
+          </a:ln>
+        </p:spPr>
+        <p:style>
+          <a:lnRef idx="2">
+            <a:schemeClr val="accent1">
+              <a:shade val="15000"/>
+            </a:schemeClr>
+          </a:lnRef>
+          <a:fillRef idx="1">
+            <a:schemeClr val="accent1"/>
+          </a:fillRef>
+          <a:effectRef idx="0">
+            <a:schemeClr val="accent1"/>
+          </a:effectRef>
+          <a:fontRef idx="minor">
+            <a:schemeClr val="lt1"/>
+          </a:fontRef>
+        </p:style>
+        <p:txBody>
+          <a:bodyPr rtlCol="0" anchor="ctr"/>
+          <a:lstStyle/>
+          <a:p>
+            <a:pPr algn="ctr"/>
+            <a:endParaRPr lang="en-US"/>
+          </a:p>
+        </p:txBody>
+      </p:sp>
+      <p:sp>
+        <p:nvSpPr>
+          <p:cNvPr id="3" name="Rectangle 2">
+            <a:extLst>
+              <a:ext uri="{FF2B5EF4-FFF2-40B4-BE49-F238E27FC236}">
+                <a16:creationId xmlns:a16="http://schemas.microsoft.com/office/drawing/2014/main" id="{90FFE72C-27AC-1D10-7845-EC9A3CD66CD2}"/>
+              </a:ext>
+            </a:extLst>
+          </p:cNvPr>
+          <p:cNvSpPr/>
+          <p:nvPr>
+            <p:custDataLst>
+              <p:tags r:id="rId3"/>
+            </p:custDataLst>
+          </p:nvPr>
+        </p:nvSpPr>
+        <p:spPr>
+          <a:xfrm>
+            <a:off x="3112851" y="1000897"/>
+            <a:ext cx="8486226" cy="3855308"/>
+          </a:xfrm>
+          <a:prstGeom prst="rect">
+            <a:avLst/>
+          </a:prstGeom>
+          <a:noFill/>
+          <a:ln w="25400" cap="flat" cmpd="sng" algn="ctr">
+            <a:solidFill>
+              <a:srgbClr val="FFFFFF"/>
+            </a:solidFill>
+            <a:prstDash val="solid"/>
+          </a:ln>
+          <a:effectLst/>
+          <a:extLst>
+            <a:ext uri="{909E8E84-426E-40DD-AFC4-6F175D3DCCD1}">
+              <a14:hiddenFill xmlns:a14="http://schemas.microsoft.com/office/drawing/2010/main">
+                <a:solidFill>
+                  <a:schemeClr val="accent1"/>
+                </a:solidFill>
+              </a14:hiddenFill>
+            </a:ext>
+          </a:extLst>
+        </p:spPr>
+        <p:style>
+          <a:lnRef idx="2">
+            <a:schemeClr val="accent1">
+              <a:shade val="15000"/>
+            </a:schemeClr>
+          </a:lnRef>
+          <a:fillRef idx="1">
+            <a:schemeClr val="accent1"/>
+          </a:fillRef>
+          <a:effectRef idx="0">
+            <a:schemeClr val="accent1"/>
+          </a:effectRef>
+          <a:fontRef idx="minor">
+            <a:schemeClr val="lt1"/>
+          </a:fontRef>
+        </p:style>
+        <p:txBody>
+          <a:bodyPr rtlCol="0" anchor="ctr"/>
+          <a:lstStyle/>
+          <a:p>
+            <a:r>
+              <a:rPr lang="en-US" sz="2400" b="1">
+                <a:solidFill>
+                  <a:srgbClr val="000000"/>
+                </a:solidFill>
+              </a:rPr>
+              <a:t>Given that the PR-k curve outlined is from a model applied to some validation data, which of the other curves shown could be from other models applied to the same validation data (check all that apply)?</a:t>
+            </a:r>
+          </a:p>
+        </p:txBody>
+      </p:sp>
+      <p:sp>
+        <p:nvSpPr>
+          <p:cNvPr id="4" name="Rectangle 3">
+            <a:extLst>
+              <a:ext uri="{FF2B5EF4-FFF2-40B4-BE49-F238E27FC236}">
+                <a16:creationId xmlns:a16="http://schemas.microsoft.com/office/drawing/2014/main" id="{343095E0-43EF-F96B-6372-2101C4615344}"/>
+              </a:ext>
+            </a:extLst>
+          </p:cNvPr>
+          <p:cNvSpPr/>
+          <p:nvPr/>
+        </p:nvSpPr>
+        <p:spPr>
+          <a:xfrm>
+            <a:off x="0" y="5820032"/>
+            <a:ext cx="12192001" cy="1037968"/>
+          </a:xfrm>
+          <a:prstGeom prst="rect">
+            <a:avLst/>
+          </a:prstGeom>
+          <a:solidFill>
+            <a:srgbClr val="198038"/>
+          </a:solidFill>
+          <a:ln w="25400" cap="flat" cmpd="sng" algn="ctr">
+            <a:noFill/>
+            <a:prstDash val="solid"/>
+          </a:ln>
+          <a:effectLst/>
+          <a:extLst>
+            <a:ext uri="{91240B29-F687-4F45-9708-019B960494DF}">
+              <a14:hiddenLine xmlns:a14="http://schemas.microsoft.com/office/drawing/2010/main" w="25400" cap="flat" cmpd="sng" algn="ctr">
+                <a:solidFill>
+                  <a:schemeClr val="accent1">
+                    <a:shade val="15000"/>
+                  </a:schemeClr>
+                </a:solidFill>
+                <a:prstDash val="solid"/>
+              </a14:hiddenLine>
+            </a:ext>
+          </a:extLst>
+        </p:spPr>
+        <p:style>
+          <a:lnRef idx="2">
+            <a:schemeClr val="accent1">
+              <a:shade val="15000"/>
+            </a:schemeClr>
+          </a:lnRef>
+          <a:fillRef idx="1">
+            <a:schemeClr val="accent1"/>
+          </a:fillRef>
+          <a:effectRef idx="0">
+            <a:schemeClr val="accent1"/>
+          </a:effectRef>
+          <a:fontRef idx="minor">
+            <a:schemeClr val="lt1"/>
+          </a:fontRef>
+        </p:style>
+        <p:txBody>
+          <a:bodyPr lIns="741155" tIns="259492" rIns="1852888" bIns="203886" rtlCol="0" anchor="ctr">
+            <a:normAutofit fontScale="85000" lnSpcReduction="10000"/>
+          </a:bodyPr>
+          <a:lstStyle/>
+          <a:p>
+            <a:r>
+              <a:rPr lang="en-US" sz="2600">
+                <a:solidFill>
+                  <a:srgbClr val="FFFFFF"/>
+                </a:solidFill>
+              </a:rPr>
+              <a:t>The </a:t>
+            </a:r>
+            <a:r>
+              <a:rPr lang="en-US" sz="2600">
+                <a:solidFill>
+                  <a:srgbClr val="FFFFFF"/>
+                </a:solidFill>
+                <a:hlinkClick r:id="rId7">
+                  <a:extLst>
+                    <a:ext uri="{A12FA001-AC4F-418D-AE19-62706E023703}">
+                      <ahyp:hlinkClr xmlns:ahyp="http://schemas.microsoft.com/office/drawing/2018/hyperlinkcolor" val="tx"/>
+                    </a:ext>
+                  </a:extLst>
+                </a:hlinkClick>
+              </a:rPr>
+              <a:t>Slido app</a:t>
+            </a:r>
+            <a:r>
+              <a:rPr lang="en-US" sz="2600">
+                <a:solidFill>
+                  <a:srgbClr val="FFFFFF"/>
+                </a:solidFill>
+              </a:rPr>
+              <a:t> must be installed on every computer you’re presenting from</a:t>
+            </a:r>
+          </a:p>
+        </p:txBody>
+      </p:sp>
+      <p:pic>
+        <p:nvPicPr>
+          <p:cNvPr id="6" name="Graphic 5">
+            <a:extLst>
+              <a:ext uri="{FF2B5EF4-FFF2-40B4-BE49-F238E27FC236}">
+                <a16:creationId xmlns:a16="http://schemas.microsoft.com/office/drawing/2014/main" id="{B0CE8CA0-EA78-390C-B17D-367743A8FB75}"/>
+              </a:ext>
+            </a:extLst>
+          </p:cNvPr>
+          <p:cNvPicPr>
+            <a:picLocks/>
+          </p:cNvPicPr>
+          <p:nvPr/>
+        </p:nvPicPr>
+        <p:blipFill>
+          <a:blip r:embed="rId8">
+            <a:extLst>
+              <a:ext uri="{96DAC541-7B7A-43D3-8B79-37D633B846F1}">
+                <asvg:svgBlip xmlns:asvg="http://schemas.microsoft.com/office/drawing/2016/SVG/main" r:embed="rId9"/>
+              </a:ext>
+            </a:extLst>
+          </a:blip>
+          <a:stretch>
+            <a:fillRect/>
+          </a:stretch>
+        </p:blipFill>
+        <p:spPr>
+          <a:xfrm>
+            <a:off x="296462" y="6190785"/>
+            <a:ext cx="296462" cy="296462"/>
+          </a:xfrm>
+          <a:prstGeom prst="rect">
+            <a:avLst/>
+          </a:prstGeom>
+        </p:spPr>
+      </p:pic>
+      <p:sp>
+        <p:nvSpPr>
+          <p:cNvPr id="7" name="Trapezoid 6">
+            <a:extLst>
+              <a:ext uri="{FF2B5EF4-FFF2-40B4-BE49-F238E27FC236}">
+                <a16:creationId xmlns:a16="http://schemas.microsoft.com/office/drawing/2014/main" id="{1BC843F0-261D-9CFD-1F64-B3678040C493}"/>
+              </a:ext>
+            </a:extLst>
+          </p:cNvPr>
+          <p:cNvSpPr/>
+          <p:nvPr/>
+        </p:nvSpPr>
+        <p:spPr>
+          <a:xfrm rot="2700000">
+            <a:off x="9620371" y="514924"/>
+            <a:ext cx="3335198" cy="778213"/>
+          </a:xfrm>
+          <a:prstGeom prst="trapezoid">
+            <a:avLst>
+              <a:gd name="adj" fmla="val 100000"/>
+            </a:avLst>
+          </a:prstGeom>
+          <a:solidFill>
+            <a:srgbClr val="EDFAF2"/>
+          </a:solidFill>
+          <a:ln w="25400" cap="flat" cmpd="sng" algn="ctr">
+            <a:noFill/>
+            <a:prstDash val="solid"/>
+          </a:ln>
+          <a:effectLst/>
+          <a:extLst>
+            <a:ext uri="{91240B29-F687-4F45-9708-019B960494DF}">
+              <a14:hiddenLine xmlns:a14="http://schemas.microsoft.com/office/drawing/2010/main" w="25400" cap="flat" cmpd="sng" algn="ctr">
+                <a:solidFill>
+                  <a:schemeClr val="accent1">
+                    <a:shade val="15000"/>
+                  </a:schemeClr>
+                </a:solidFill>
+                <a:prstDash val="solid"/>
+              </a14:hiddenLine>
+            </a:ext>
+          </a:extLst>
+        </p:spPr>
+        <p:style>
+          <a:lnRef idx="2">
+            <a:schemeClr val="accent1">
+              <a:shade val="15000"/>
+            </a:schemeClr>
+          </a:lnRef>
+          <a:fillRef idx="1">
+            <a:schemeClr val="accent1"/>
+          </a:fillRef>
+          <a:effectRef idx="0">
+            <a:schemeClr val="accent1"/>
+          </a:effectRef>
+          <a:fontRef idx="minor">
+            <a:schemeClr val="lt1"/>
+          </a:fontRef>
+        </p:style>
+        <p:txBody>
+          <a:bodyPr tIns="0" bIns="0" rtlCol="0" anchor="t">
+            <a:normAutofit fontScale="70000" lnSpcReduction="20000"/>
+          </a:bodyPr>
+          <a:lstStyle/>
+          <a:p>
+            <a:pPr algn="ctr"/>
+            <a:r>
+              <a:rPr lang="en-US" sz="2600" b="1">
+                <a:solidFill>
+                  <a:srgbClr val="198038"/>
+                </a:solidFill>
+              </a:rPr>
+              <a:t>Do not edit
+</a:t>
+            </a:r>
+            <a:r>
+              <a:rPr lang="en-US" sz="2200">
+                <a:solidFill>
+                  <a:srgbClr val="198038"/>
+                </a:solidFill>
+                <a:hlinkClick r:id="rId10">
+                  <a:extLst>
+                    <a:ext uri="{A12FA001-AC4F-418D-AE19-62706E023703}">
+                      <ahyp:hlinkClr xmlns:ahyp="http://schemas.microsoft.com/office/drawing/2018/hyperlinkcolor" val="tx"/>
+                    </a:ext>
+                  </a:extLst>
+                </a:hlinkClick>
+              </a:rPr>
+              <a:t>How to change the design</a:t>
+            </a:r>
+            <a:endParaRPr lang="en-US" sz="2200">
+              <a:solidFill>
+                <a:srgbClr val="198038"/>
+              </a:solidFill>
+            </a:endParaRPr>
+          </a:p>
+        </p:txBody>
+      </p:sp>
+      <p:pic>
+        <p:nvPicPr>
+          <p:cNvPr id="9" name="Graphic 8">
+            <a:extLst>
+              <a:ext uri="{FF2B5EF4-FFF2-40B4-BE49-F238E27FC236}">
+                <a16:creationId xmlns:a16="http://schemas.microsoft.com/office/drawing/2014/main" id="{1AA1A23C-DE1F-C9FE-AE4C-C475D5E8002F}"/>
+              </a:ext>
+            </a:extLst>
+          </p:cNvPr>
+          <p:cNvPicPr>
+            <a:picLocks/>
+          </p:cNvPicPr>
+          <p:nvPr/>
+        </p:nvPicPr>
+        <p:blipFill>
+          <a:blip r:embed="rId11">
+            <a:extLst>
+              <a:ext uri="{96DAC541-7B7A-43D3-8B79-37D633B846F1}">
+                <asvg:svgBlip xmlns:asvg="http://schemas.microsoft.com/office/drawing/2016/SVG/main" r:embed="rId12"/>
+              </a:ext>
+            </a:extLst>
+          </a:blip>
+          <a:stretch>
+            <a:fillRect/>
+          </a:stretch>
+        </p:blipFill>
+        <p:spPr>
+          <a:xfrm>
+            <a:off x="10746748" y="6153727"/>
+            <a:ext cx="1111733" cy="370578"/>
+          </a:xfrm>
+          <a:prstGeom prst="rect">
+            <a:avLst/>
+          </a:prstGeom>
+        </p:spPr>
+      </p:pic>
+    </p:spTree>
+    <p:custDataLst>
+      <p:tags r:id="rId1"/>
+    </p:custDataLst>
+    <p:extLst>
+      <p:ext uri="{BB962C8B-B14F-4D97-AF65-F5344CB8AC3E}">
+        <p14:creationId xmlns:p14="http://schemas.microsoft.com/office/powerpoint/2010/main" val="2776514697"/>
+      </p:ext>
+    </p:extLst>
+  </p:cSld>
+  <p:clrMapOvr>
+    <a:masterClrMapping/>
+  </p:clrMapOvr>
+  <p:timing>
+    <p:tnLst>
+      <p:par>
+        <p:cTn id="1" dur="indefinite" restart="never" nodeType="tmRoot">
+          <p:childTnLst>
+            <p:seq concurrent="1" nextAc="seek">
+              <p:cTn id="2" dur="indefinite" nodeType="mainSeq">
+                <p:childTnLst>
+                  <p:par>
+                    <p:cTn id="3" fill="hold">
+                      <p:stCondLst>
+                        <p:cond delay="indefinite"/>
+                      </p:stCondLst>
+                      <p:childTnLst>
+                        <p:par>
+                          <p:cTn id="4" fill="hold">
+                            <p:stCondLst>
+                              <p:cond delay="0"/>
+                            </p:stCondLst>
+                            <p:childTnLst>
+                              <p:par>
+                                <p:cTn id="5" presetID="26" presetClass="emph" presetSubtype="0" fill="hold" grpId="0" nodeType="clickEffect">
+                                  <p:stCondLst>
+                                    <p:cond delay="0"/>
+                                  </p:stCondLst>
+                                  <p:childTnLst>
+                                    <p:animEffect transition="out" filter="fade">
+                                      <p:cBhvr>
+                                        <p:cTn id="6" dur="50" tmFilter="0, 0; .2, .5; .8, .5; 1, 0"/>
+                                        <p:tgtEl>
+                                          <p:spTgt spid="3"/>
+                                        </p:tgtEl>
+                                      </p:cBhvr>
+                                    </p:animEffect>
+                                    <p:animScale>
+                                      <p:cBhvr>
+                                        <p:cTn id="7" dur="25" autoRev="1" fill="hold"/>
+                                        <p:tgtEl>
+                                          <p:spTgt spid="3"/>
+                                        </p:tgtEl>
+                                      </p:cBhvr>
+                                      <p:by x="105000" y="105000"/>
+                                    </p:animScale>
+                                  </p:childTnLst>
+                                </p:cTn>
+                              </p:par>
+                            </p:childTnLst>
+                          </p:cTn>
+                        </p:par>
+                      </p:childTnLst>
+                    </p:cTn>
+                  </p:par>
+                </p:childTnLst>
+              </p:cTn>
+              <p:prevCondLst>
+                <p:cond evt="onPrev" delay="0">
+                  <p:tgtEl>
+                    <p:sldTgt/>
+                  </p:tgtEl>
+                </p:cond>
+              </p:prevCondLst>
+              <p:nextCondLst>
+                <p:cond evt="onNext" delay="0">
+                  <p:tgtEl>
+                    <p:sldTgt/>
+                  </p:tgtEl>
+                </p:cond>
+              </p:nextCondLst>
+            </p:seq>
+          </p:childTnLst>
+        </p:cTn>
+      </p:par>
+    </p:tnLst>
+    <p:bldLst>
+      <p:bldP spid="3" grpId="0" animBg="1"/>
+    </p:bldLst>
+  </p:timing>
+</p:sld>
+</file>
+
+<file path=ppt/slides/slide8.xml><?xml version="1.0" encoding="utf-8"?>
 <p:sld xmlns:a="http://schemas.openxmlformats.org/drawingml/2006/main" xmlns:r="http://schemas.openxmlformats.org/officeDocument/2006/relationships" xmlns:p="http://schemas.openxmlformats.org/presentationml/2006/main">
   <p:cSld>
     <p:spTree>
@@ -16919,7 +18478,7 @@
 </p:sld>
 </file>
 
-<file path=ppt/slides/slide7.xml><?xml version="1.0" encoding="utf-8"?>
+<file path=ppt/slides/slide9.xml><?xml version="1.0" encoding="utf-8"?>
 <p:sld xmlns:a="http://schemas.openxmlformats.org/drawingml/2006/main" xmlns:r="http://schemas.openxmlformats.org/officeDocument/2006/relationships" xmlns:p="http://schemas.openxmlformats.org/presentationml/2006/main">
   <p:cSld>
     <p:spTree>
@@ -17028,229 +18587,6 @@
 </p:sld>
 </file>
 
-<file path=ppt/slides/slide8.xml><?xml version="1.0" encoding="utf-8"?>
-<p:sld xmlns:a="http://schemas.openxmlformats.org/drawingml/2006/main" xmlns:r="http://schemas.openxmlformats.org/officeDocument/2006/relationships" xmlns:p="http://schemas.openxmlformats.org/presentationml/2006/main">
-  <p:cSld>
-    <p:spTree>
-      <p:nvGrpSpPr>
-        <p:cNvPr id="1" name=""/>
-        <p:cNvGrpSpPr/>
-        <p:nvPr/>
-      </p:nvGrpSpPr>
-      <p:grpSpPr>
-        <a:xfrm>
-          <a:off x="0" y="0"/>
-          <a:ext cx="0" cy="0"/>
-          <a:chOff x="0" y="0"/>
-          <a:chExt cx="0" cy="0"/>
-        </a:xfrm>
-      </p:grpSpPr>
-      <p:sp>
-        <p:nvSpPr>
-          <p:cNvPr id="3" name="Title 2"/>
-          <p:cNvSpPr>
-            <a:spLocks noGrp="1"/>
-          </p:cNvSpPr>
-          <p:nvPr>
-            <p:ph type="title"/>
-          </p:nvPr>
-        </p:nvSpPr>
-        <p:spPr/>
-        <p:txBody>
-          <a:bodyPr/>
-          <a:lstStyle/>
-          <a:p>
-            <a:r>
-              <a:rPr lang="en-US" dirty="0"/>
-              <a:t>Why do we care?</a:t>
-            </a:r>
-          </a:p>
-        </p:txBody>
-      </p:sp>
-      <p:sp>
-        <p:nvSpPr>
-          <p:cNvPr id="2" name="Content Placeholder 1"/>
-          <p:cNvSpPr>
-            <a:spLocks noGrp="1"/>
-          </p:cNvSpPr>
-          <p:nvPr>
-            <p:ph type="body" idx="1"/>
-          </p:nvPr>
-        </p:nvSpPr>
-        <p:spPr/>
-        <p:txBody>
-          <a:bodyPr>
-            <a:normAutofit/>
-          </a:bodyPr>
-          <a:lstStyle/>
-          <a:p>
-            <a:r>
-              <a:rPr lang="en-US" dirty="0"/>
-              <a:t>Features are hints/rules of thumb you give your model</a:t>
-            </a:r>
-          </a:p>
-          <a:p>
-            <a:pPr lvl="1"/>
-            <a:r>
-              <a:rPr lang="en-US" sz="2000" dirty="0"/>
-              <a:t>Encoding domain knowledge and context for the model to use</a:t>
-            </a:r>
-          </a:p>
-          <a:p>
-            <a:endParaRPr lang="en-US" dirty="0"/>
-          </a:p>
-          <a:p>
-            <a:r>
-              <a:rPr lang="en-US" dirty="0"/>
-              <a:t>Feature generation is a critical part of the machine learning modeling process, especially with structured data.</a:t>
-            </a:r>
-          </a:p>
-          <a:p>
-            <a:endParaRPr lang="en-US" dirty="0"/>
-          </a:p>
-          <a:p>
-            <a:r>
-              <a:rPr lang="en-US" dirty="0"/>
-              <a:t>Complexity in features may allow us to use less complex models that are faster to run, easier to understand and easier to maintain.</a:t>
-            </a:r>
-          </a:p>
-          <a:p>
-            <a:endParaRPr lang="en-US" dirty="0"/>
-          </a:p>
-          <a:p>
-            <a:endParaRPr lang="en-US" dirty="0"/>
-          </a:p>
-        </p:txBody>
-      </p:sp>
-    </p:spTree>
-    <p:extLst>
-      <p:ext uri="{BB962C8B-B14F-4D97-AF65-F5344CB8AC3E}">
-        <p14:creationId xmlns:p14="http://schemas.microsoft.com/office/powerpoint/2010/main" val="837826461"/>
-      </p:ext>
-    </p:extLst>
-  </p:cSld>
-  <p:clrMapOvr>
-    <a:masterClrMapping/>
-  </p:clrMapOvr>
-</p:sld>
-</file>
-
-<file path=ppt/slides/slide9.xml><?xml version="1.0" encoding="utf-8"?>
-<p:sld xmlns:a="http://schemas.openxmlformats.org/drawingml/2006/main" xmlns:r="http://schemas.openxmlformats.org/officeDocument/2006/relationships" xmlns:p="http://schemas.openxmlformats.org/presentationml/2006/main">
-  <p:cSld>
-    <p:spTree>
-      <p:nvGrpSpPr>
-        <p:cNvPr id="1" name=""/>
-        <p:cNvGrpSpPr/>
-        <p:nvPr/>
-      </p:nvGrpSpPr>
-      <p:grpSpPr>
-        <a:xfrm>
-          <a:off x="0" y="0"/>
-          <a:ext cx="0" cy="0"/>
-          <a:chOff x="0" y="0"/>
-          <a:chExt cx="0" cy="0"/>
-        </a:xfrm>
-      </p:grpSpPr>
-      <p:sp>
-        <p:nvSpPr>
-          <p:cNvPr id="3" name="Title 2"/>
-          <p:cNvSpPr>
-            <a:spLocks noGrp="1"/>
-          </p:cNvSpPr>
-          <p:nvPr>
-            <p:ph type="title"/>
-          </p:nvPr>
-        </p:nvSpPr>
-        <p:spPr/>
-        <p:txBody>
-          <a:bodyPr/>
-          <a:lstStyle/>
-          <a:p>
-            <a:r>
-              <a:rPr lang="en-US" dirty="0"/>
-              <a:t>Practical Pointers</a:t>
-            </a:r>
-          </a:p>
-        </p:txBody>
-      </p:sp>
-      <p:sp>
-        <p:nvSpPr>
-          <p:cNvPr id="2" name="Content Placeholder 1"/>
-          <p:cNvSpPr>
-            <a:spLocks noGrp="1"/>
-          </p:cNvSpPr>
-          <p:nvPr>
-            <p:ph type="body" idx="1"/>
-          </p:nvPr>
-        </p:nvSpPr>
-        <p:spPr/>
-        <p:txBody>
-          <a:bodyPr>
-            <a:normAutofit/>
-          </a:bodyPr>
-          <a:lstStyle/>
-          <a:p>
-            <a:r>
-              <a:rPr lang="en-US" dirty="0"/>
-              <a:t>When generating a feature, what did you know and </a:t>
-            </a:r>
-            <a:r>
-              <a:rPr lang="en-US" b="1" u="sng" dirty="0"/>
-              <a:t>when</a:t>
-            </a:r>
-            <a:r>
-              <a:rPr lang="en-US" dirty="0"/>
-              <a:t> did you know it?</a:t>
-            </a:r>
-          </a:p>
-          <a:p>
-            <a:pPr lvl="1"/>
-            <a:r>
-              <a:rPr lang="en-US" dirty="0"/>
-              <a:t>You can only create features from information available </a:t>
-            </a:r>
-            <a:r>
-              <a:rPr lang="en-US" sz="3200" b="1" dirty="0">
-                <a:solidFill>
-                  <a:srgbClr val="FF0000"/>
-                </a:solidFill>
-              </a:rPr>
-              <a:t>before</a:t>
-            </a:r>
-            <a:r>
-              <a:rPr lang="en-US" dirty="0"/>
-              <a:t> the “training” date for a given row</a:t>
-            </a:r>
-            <a:br>
-              <a:rPr lang="en-US" dirty="0"/>
-            </a:br>
-            <a:endParaRPr lang="en-US" dirty="0"/>
-          </a:p>
-          <a:p>
-            <a:r>
-              <a:rPr lang="en-US" dirty="0"/>
-              <a:t>Domain/expert knowledge and prior research in the field can help a lot!</a:t>
-            </a:r>
-          </a:p>
-          <a:p>
-            <a:endParaRPr lang="en-US" dirty="0"/>
-          </a:p>
-        </p:txBody>
-      </p:sp>
-    </p:spTree>
-    <p:extLst>
-      <p:ext uri="{BB962C8B-B14F-4D97-AF65-F5344CB8AC3E}">
-        <p14:creationId xmlns:p14="http://schemas.microsoft.com/office/powerpoint/2010/main" val="4045032903"/>
-      </p:ext>
-    </p:extLst>
-  </p:cSld>
-  <p:clrMapOvr>
-    <a:masterClrMapping/>
-  </p:clrMapOvr>
-</p:sld>
-</file>
-
 <file path=ppt/tags/tag1.xml><?xml version="1.0" encoding="utf-8"?>
 <p:tagLst xmlns:a="http://schemas.openxmlformats.org/drawingml/2006/main" xmlns:r="http://schemas.openxmlformats.org/officeDocument/2006/relationships" xmlns:p="http://schemas.openxmlformats.org/presentationml/2006/main">
   <p:tag name="SLIDO_APP_VERSION" val="1.5.0.0"/>
@@ -17260,11 +18596,17 @@
 </p:tagLst>
 </file>
 
+<file path=ppt/tags/tag10.xml><?xml version="1.0" encoding="utf-8"?>
+<p:tagLst xmlns:a="http://schemas.openxmlformats.org/drawingml/2006/main" xmlns:r="http://schemas.openxmlformats.org/officeDocument/2006/relationships" xmlns:p="http://schemas.openxmlformats.org/presentationml/2006/main">
+  <p:tag name="SLIDO_ELEMENT" val="title"/>
+</p:tagLst>
+</file>
+
 <file path=ppt/tags/tag2.xml><?xml version="1.0" encoding="utf-8"?>
 <p:tagLst xmlns:a="http://schemas.openxmlformats.org/drawingml/2006/main" xmlns:r="http://schemas.openxmlformats.org/officeDocument/2006/relationships" xmlns:p="http://schemas.openxmlformats.org/presentationml/2006/main">
   <p:tag name="SLIDO_TYPE" val="SlidoPoll"/>
-  <p:tag name="SLIDO_POLL_UUID" val="aa6a89c6-875e-4f7b-a267-78443e5fe7ca"/>
-  <p:tag name="SLIDO_TIMELINE" val="W3sicG9sbFF1ZXN0aW9uVXVpZCI6IjE2YzI3YTU2LTBiMzktNGQ4Ni05N2UwLTBjZmQyMTA2YzhlYyIsInNob3dSZXN1bHRzIjpmYWxzZX0seyJwb2xsUXVlc3Rpb25VdWlkIjoiMTZjMjdhNTYtMGIzOS00ZDg2LTk3ZTAtMGNmZDIxMDZjOGVjIiwic2hvd1Jlc3VsdHMiOnRydWV9XQ=="/>
+  <p:tag name="SLIDO_POLL_UUID" val="a6f7c418-b22d-4577-b6a0-9fec70f325a6"/>
+  <p:tag name="SLIDO_TIMELINE" val="W3sicG9sbFF1ZXN0aW9uVXVpZCI6IjY4YTIxYzU5LWIzMDAtNGU4Zi1hNWMyLTk1Njc1NDU4MGE3NCIsInNob3dSZXN1bHRzIjpmYWxzZX0seyJwb2xsUXVlc3Rpb25VdWlkIjoiNjhhMjFjNTktYjMwMC00ZThmLWE1YzItOTU2NzU0NTgwYTc0Iiwic2hvd1Jlc3VsdHMiOnRydWV9XQ=="/>
 </p:tagLst>
 </file>
 
@@ -17278,6 +18620,42 @@
 <file path=ppt/tags/tag4.xml><?xml version="1.0" encoding="utf-8"?>
 <p:tagLst xmlns:a="http://schemas.openxmlformats.org/drawingml/2006/main" xmlns:r="http://schemas.openxmlformats.org/officeDocument/2006/relationships" xmlns:p="http://schemas.openxmlformats.org/presentationml/2006/main">
   <p:tag name="SLIDO_ELEMENT" val="title"/>
+</p:tagLst>
+</file>
+
+<file path=ppt/tags/tag5.xml><?xml version="1.0" encoding="utf-8"?>
+<p:tagLst xmlns:a="http://schemas.openxmlformats.org/drawingml/2006/main" xmlns:r="http://schemas.openxmlformats.org/officeDocument/2006/relationships" xmlns:p="http://schemas.openxmlformats.org/presentationml/2006/main">
+  <p:tag name="SLIDO_TYPE" val="SlidoPoll"/>
+  <p:tag name="SLIDO_POLL_UUID" val="e6613a4b-8d6d-4e9c-beaf-6c9eb4040146"/>
+  <p:tag name="SLIDO_TIMELINE" val="W3sicG9sbFF1ZXN0aW9uVXVpZCI6Ijg4OTBkMWNmLTEwZWUtNDdlZC1iZWM4LWJlZmYyYjZiY2M0ZSIsInNob3dSZXN1bHRzIjpmYWxzZX0seyJwb2xsUXVlc3Rpb25VdWlkIjoiODg5MGQxY2YtMTBlZS00N2VkLWJlYzgtYmVmZjJiNmJjYzRlIiwic2hvd1Jlc3VsdHMiOnRydWV9XQ=="/>
+</p:tagLst>
+</file>
+
+<file path=ppt/tags/tag6.xml><?xml version="1.0" encoding="utf-8"?>
+<p:tagLst xmlns:a="http://schemas.openxmlformats.org/drawingml/2006/main" xmlns:r="http://schemas.openxmlformats.org/officeDocument/2006/relationships" xmlns:p="http://schemas.openxmlformats.org/presentationml/2006/main">
+  <p:tag name="SLIDO_ELEMENT" val="interaction_image"/>
+  <p:tag name="INTERACTION_TYPE" val="MultipleChoice"/>
+</p:tagLst>
+</file>
+
+<file path=ppt/tags/tag7.xml><?xml version="1.0" encoding="utf-8"?>
+<p:tagLst xmlns:a="http://schemas.openxmlformats.org/drawingml/2006/main" xmlns:r="http://schemas.openxmlformats.org/officeDocument/2006/relationships" xmlns:p="http://schemas.openxmlformats.org/presentationml/2006/main">
+  <p:tag name="SLIDO_ELEMENT" val="title"/>
+</p:tagLst>
+</file>
+
+<file path=ppt/tags/tag8.xml><?xml version="1.0" encoding="utf-8"?>
+<p:tagLst xmlns:a="http://schemas.openxmlformats.org/drawingml/2006/main" xmlns:r="http://schemas.openxmlformats.org/officeDocument/2006/relationships" xmlns:p="http://schemas.openxmlformats.org/presentationml/2006/main">
+  <p:tag name="SLIDO_TYPE" val="SlidoPoll"/>
+  <p:tag name="SLIDO_POLL_UUID" val="aa6a89c6-875e-4f7b-a267-78443e5fe7ca"/>
+  <p:tag name="SLIDO_TIMELINE" val="W3sicG9sbFF1ZXN0aW9uVXVpZCI6IjE2YzI3YTU2LTBiMzktNGQ4Ni05N2UwLTBjZmQyMTA2YzhlYyIsInNob3dSZXN1bHRzIjpmYWxzZX0seyJwb2xsUXVlc3Rpb25VdWlkIjoiMTZjMjdhNTYtMGIzOS00ZDg2LTk3ZTAtMGNmZDIxMDZjOGVjIiwic2hvd1Jlc3VsdHMiOnRydWV9XQ=="/>
+</p:tagLst>
+</file>
+
+<file path=ppt/tags/tag9.xml><?xml version="1.0" encoding="utf-8"?>
+<p:tagLst xmlns:a="http://schemas.openxmlformats.org/drawingml/2006/main" xmlns:r="http://schemas.openxmlformats.org/officeDocument/2006/relationships" xmlns:p="http://schemas.openxmlformats.org/presentationml/2006/main">
+  <p:tag name="SLIDO_ELEMENT" val="interaction_image"/>
+  <p:tag name="INTERACTION_TYPE" val="MultipleChoice"/>
 </p:tagLst>
 </file>
 
